--- a/2개월차_변수선별_및_대리모델구축.pptx
+++ b/2개월차_변수선별_및_대리모델구축.pptx
@@ -11405,7 +11405,7 @@
           <a:p>
             <a:r>
               <a:rPr lang="en-US" dirty="0"/>
-              <a:t>1개월차 데이터를 보면 분기 이후 2차 통과로 가는 유량이 1차 통과와 다르다. 그런데 핀 두께와 개수를 하나로 공유하면 한쪽에 맞추는 순간 다른 쪽이 불리해진다. 그래서 핀을 통과별로 분리해 후보 변수를 11개로 늘렸고, 분기 입구 두께 상한은 1개월차 데이터를 근거로 줄였다. 해석 조건도 실제 발열 배치에 맞춰 갱신했으므로 1개월차 수치와는 직접 비교하지 않는다.</a:t>
+              <a:t>냉각유는 1차 통과를 지난 뒤 분기에서 전원공급모듈 쪽으로 일부가 빠지기 때문에, 2차 통과는 1차 통과보다 적은 유량이 흐른다. 핀을 하나의 변수로 공유하면 한쪽 통과에 맞추는 순간 다른 쪽이 불리해지므로, 핀 두께와 개수를 통과별로 따로 두어 후보 변수는 11개가 된다. 11차원은 대리모델을 바로 만들기에 큰 공간이라, 먼저 영향이 있는 변수를 선별한다.</a:t>
             </a:r>
             <a:endParaRPr lang="en-US" dirty="0"/>
           </a:p>
@@ -11845,7 +11845,7 @@
           <a:p>
             <a:r>
               <a:rPr lang="en-US" dirty="0"/>
-              <a:t>1개월차 구조에 선별 실험표 생성(DSD.py)과 선별 판정·대리모델 학습(DSD_analysis.py, ML.py)을 추가했다. 형상 빌드, 해석, 결과 저장 모듈은 그대로 두고 변수 개수만 늘렸다. 선별이 끝나면 프로그램이 멈추고 판정 결과를 사람이 확인한 뒤 2단계로 넘어간다.</a:t>
+              <a:t>자동해석 구조에 선별 실험표 생성(DSD.py)과 선별 판정·대리모델 학습(DSD_analysis.py, ML.py)을 추가했다. 형상 빌드, 해석, 결과 저장 모듈은 그대로 활용한다. 선별이 끝나면 프로그램이 멈추고 판정 결과를 사람이 확인한 뒤 2단계로 넘어간다.</a:t>
             </a:r>
             <a:endParaRPr lang="en-US" dirty="0"/>
           </a:p>
@@ -17165,7 +17165,7 @@
                 <a:ea typeface="Malgun Gothic" pitchFamily="34" charset="-122"/>
                 <a:cs typeface="Malgun Gothic" pitchFamily="34" charset="-120"/>
               </a:rPr>
-              <a:t>1.  후보 설계변수 재정의</a:t>
+              <a:t>1.  후보 설계변수 정의</a:t>
             </a:r>
             <a:endParaRPr lang="en-US" sz="1100" dirty="0"/>
           </a:p>
@@ -17823,7 +17823,7 @@
                 <a:ea typeface="Malgun Gothic" pitchFamily="34" charset="-122"/>
                 <a:cs typeface="Malgun Gothic" pitchFamily="34" charset="-120"/>
               </a:rPr>
-              <a:t>후보 설계변수 재정의</a:t>
+              <a:t>후보 설계변수 정의</a:t>
             </a:r>
             <a:endParaRPr lang="en-US" sz="2200" dirty="0"/>
           </a:p>
@@ -17921,7 +17921,7 @@
                 <a:ea typeface="Malgun Gothic" pitchFamily="34" charset="-122"/>
                 <a:cs typeface="Malgun Gothic" pitchFamily="34" charset="-120"/>
               </a:rPr>
-              <a:t>1개월차 데이터에서 확인한 것</a:t>
+              <a:t>핀을 통과별로 나눈 이유</a:t>
             </a:r>
             <a:endParaRPr lang="en-US" sz="1300" dirty="0"/>
           </a:p>
@@ -18513,7 +18513,7 @@
                 <a:ea typeface="Malgun Gothic" pitchFamily="34" charset="-122"/>
                 <a:cs typeface="Malgun Gothic" pitchFamily="34" charset="-120"/>
               </a:rPr>
-              <a:t>→  핀 두께 · 개수를 1차 · 2차 통과별로 분리</a:t>
+              <a:t>→  핀 두께 · 개수를 1차 · 2차 통과별로 독립 변수화</a:t>
             </a:r>
             <a:endParaRPr lang="en-US" sz="1150" dirty="0"/>
           </a:p>
@@ -18611,7 +18611,7 @@
                 <a:ea typeface="Malgun Gothic" pitchFamily="34" charset="-122"/>
                 <a:cs typeface="Malgun Gothic" pitchFamily="34" charset="-120"/>
               </a:rPr>
-              <a:t>설계공간 변경</a:t>
+              <a:t>후보 설계변수  —  11개</a:t>
             </a:r>
             <a:endParaRPr lang="en-US" sz="1300" dirty="0"/>
           </a:p>
@@ -18632,7 +18632,7 @@
           </p:nvPr>
         </p:nvGraphicFramePr>
         <p:xfrm>
-          <a:off x="6647688" y="1865376"/>
+          <a:off x="6647688" y="1847088"/>
           <a:ext cx="4846320" cy="914400"/>
         </p:xfrm>
         <a:graphic>
@@ -18640,11 +18640,11 @@
             <a:tbl>
               <a:tblPr/>
               <a:tblGrid>
-                <a:gridCol w="1325880"/>
-                <a:gridCol w="1600200"/>
-                <a:gridCol w="1920240"/>
+                <a:gridCol w="1188720"/>
+                <a:gridCol w="2011680"/>
+                <a:gridCol w="1645920"/>
               </a:tblGrid>
-              <a:tr h="283464">
+              <a:tr h="239573">
                 <a:tc>
                   <a:txBody>
                     <a:bodyPr/>
@@ -18654,7 +18654,7 @@
                         <a:buNone/>
                       </a:pPr>
                       <a:r>
-                        <a:rPr lang="en-US" sz="950" b="1" dirty="0">
+                        <a:rPr lang="en-US" sz="930" b="1" dirty="0">
                           <a:solidFill>
                             <a:srgbClr val="16305B"/>
                           </a:solidFill>
@@ -18662,9 +18662,9 @@
                           <a:ea typeface="Malgun Gothic" pitchFamily="34" charset="-122"/>
                           <a:cs typeface="Malgun Gothic" pitchFamily="34" charset="-120"/>
                         </a:rPr>
-                        <a:t>항목</a:t>
+                        <a:t>구분</a:t>
                       </a:r>
-                      <a:endParaRPr lang="en-US" sz="950" dirty="0">
+                      <a:endParaRPr lang="en-US" sz="930" dirty="0">
                         <a:latin typeface="Malgun Gothic" charset="0"/>
                         <a:ea typeface="Malgun Gothic" charset="0"/>
                         <a:cs typeface="Malgun Gothic" charset="0"/>
@@ -18704,7 +18704,7 @@
                         <a:buNone/>
                       </a:pPr>
                       <a:r>
-                        <a:rPr lang="en-US" sz="950" b="1" dirty="0">
+                        <a:rPr lang="en-US" sz="930" b="1" dirty="0">
                           <a:solidFill>
                             <a:srgbClr val="16305B"/>
                           </a:solidFill>
@@ -18712,9 +18712,9 @@
                           <a:ea typeface="Malgun Gothic" pitchFamily="34" charset="-122"/>
                           <a:cs typeface="Malgun Gothic" pitchFamily="34" charset="-120"/>
                         </a:rPr>
-                        <a:t>1개월차</a:t>
+                        <a:t>설계변수</a:t>
                       </a:r>
-                      <a:endParaRPr lang="en-US" sz="950" dirty="0">
+                      <a:endParaRPr lang="en-US" sz="930" dirty="0">
                         <a:latin typeface="Malgun Gothic" charset="0"/>
                         <a:ea typeface="Malgun Gothic" charset="0"/>
                         <a:cs typeface="Malgun Gothic" charset="0"/>
@@ -18754,7 +18754,7 @@
                         <a:buNone/>
                       </a:pPr>
                       <a:r>
-                        <a:rPr lang="en-US" sz="950" b="1" dirty="0">
+                        <a:rPr lang="en-US" sz="930" b="1" dirty="0">
                           <a:solidFill>
                             <a:srgbClr val="16305B"/>
                           </a:solidFill>
@@ -18762,9 +18762,9 @@
                           <a:ea typeface="Malgun Gothic" pitchFamily="34" charset="-122"/>
                           <a:cs typeface="Malgun Gothic" pitchFamily="34" charset="-120"/>
                         </a:rPr>
-                        <a:t>2개월차</a:t>
+                        <a:t>범위</a:t>
                       </a:r>
-                      <a:endParaRPr lang="en-US" sz="950" dirty="0">
+                      <a:endParaRPr lang="en-US" sz="930" dirty="0">
                         <a:latin typeface="Malgun Gothic" charset="0"/>
                         <a:ea typeface="Malgun Gothic" charset="0"/>
                         <a:cs typeface="Malgun Gothic" charset="0"/>
@@ -18796,27 +18796,48 @@
                   </a:tcPr>
                 </a:tc>
               </a:tr>
-              <a:tr h="283464">
-                <a:tc>
+              <a:tr h="239573">
+                <a:tc rowSpan="7">
                   <a:txBody>
                     <a:bodyPr/>
                     <a:lstStyle/>
                     <a:p>
-                      <a:pPr indent="0" marL="0">
+                      <a:pPr algn="ctr" indent="0" marL="0">
                         <a:buNone/>
                       </a:pPr>
                       <a:r>
-                        <a:rPr lang="en-US" sz="950" dirty="0">
+                        <a:rPr lang="en-US" sz="930" b="1" dirty="0">
                           <a:solidFill>
-                            <a:srgbClr val="1C2733"/>
+                            <a:srgbClr val="16305B"/>
                           </a:solidFill>
                           <a:latin typeface="Malgun Gothic" pitchFamily="34" charset="0"/>
                           <a:ea typeface="Malgun Gothic" pitchFamily="34" charset="-122"/>
                           <a:cs typeface="Malgun Gothic" pitchFamily="34" charset="-120"/>
                         </a:rPr>
-                        <a:t>핀 두께</a:t>
+                        <a:t>유로 형상</a:t>
                       </a:r>
-                      <a:endParaRPr lang="en-US" sz="950" dirty="0">
+                      <a:endParaRPr lang="en-US" sz="930" dirty="0">
+                        <a:latin typeface="Malgun Gothic" charset="0"/>
+                        <a:ea typeface="Malgun Gothic" charset="0"/>
+                        <a:cs typeface="Malgun Gothic" charset="0"/>
+                      </a:endParaRPr>
+                    </a:p>
+                    <a:p>
+                      <a:pPr algn="ctr" indent="0" marL="0">
+                        <a:buNone/>
+                      </a:pPr>
+                      <a:r>
+                        <a:rPr lang="en-US" sz="930" b="1" dirty="0">
+                          <a:solidFill>
+                            <a:srgbClr val="16305B"/>
+                          </a:solidFill>
+                          <a:latin typeface="Malgun Gothic" pitchFamily="34" charset="0"/>
+                          <a:ea typeface="Malgun Gothic" pitchFamily="34" charset="-122"/>
+                          <a:cs typeface="Malgun Gothic" pitchFamily="34" charset="-120"/>
+                        </a:rPr>
+                        <a:t>(7)</a:t>
+                      </a:r>
+                      <a:endParaRPr lang="en-US" sz="930" dirty="0">
                         <a:latin typeface="Malgun Gothic" charset="0"/>
                         <a:ea typeface="Malgun Gothic" charset="0"/>
                         <a:cs typeface="Malgun Gothic" charset="0"/>
@@ -18842,6 +18863,9 @@
                       <a:headEnd type="none" w="med" len="med"/>
                       <a:tailEnd type="none" w="med" len="med"/>
                     </a:lnB>
+                    <a:solidFill>
+                      <a:srgbClr val="F7F9FC"/>
+                    </a:solidFill>
                   </a:tcPr>
                 </a:tc>
                 <a:tc>
@@ -18853,7 +18877,7 @@
                         <a:buNone/>
                       </a:pPr>
                       <a:r>
-                        <a:rPr lang="en-US" sz="950" dirty="0">
+                        <a:rPr lang="en-US" sz="930" dirty="0">
                           <a:solidFill>
                             <a:srgbClr val="1C2733"/>
                           </a:solidFill>
@@ -18861,9 +18885,9 @@
                           <a:ea typeface="Malgun Gothic" pitchFamily="34" charset="-122"/>
                           <a:cs typeface="Malgun Gothic" pitchFamily="34" charset="-120"/>
                         </a:rPr>
-                        <a:t>공유 1개</a:t>
+                        <a:t>입구 유로 두께</a:t>
                       </a:r>
-                      <a:endParaRPr lang="en-US" sz="950" dirty="0">
+                      <a:endParaRPr lang="en-US" sz="930" dirty="0">
                         <a:latin typeface="Malgun Gothic" charset="0"/>
                         <a:ea typeface="Malgun Gothic" charset="0"/>
                         <a:cs typeface="Malgun Gothic" charset="0"/>
@@ -18900,17 +18924,17 @@
                         <a:buNone/>
                       </a:pPr>
                       <a:r>
-                        <a:rPr lang="en-US" sz="950" b="1" dirty="0">
+                        <a:rPr lang="en-US" sz="930" dirty="0">
                           <a:solidFill>
-                            <a:srgbClr val="16305B"/>
+                            <a:srgbClr val="1C2733"/>
                           </a:solidFill>
                           <a:latin typeface="Malgun Gothic" pitchFamily="34" charset="0"/>
                           <a:ea typeface="Malgun Gothic" pitchFamily="34" charset="-122"/>
                           <a:cs typeface="Malgun Gothic" pitchFamily="34" charset="-120"/>
                         </a:rPr>
-                        <a:t>1차 · 2차 분리</a:t>
+                        <a:t>13 ~ 25 mm</a:t>
                       </a:r>
-                      <a:endParaRPr lang="en-US" sz="950" dirty="0">
+                      <a:endParaRPr lang="en-US" sz="930" dirty="0">
                         <a:latin typeface="Malgun Gothic" charset="0"/>
                         <a:ea typeface="Malgun Gothic" charset="0"/>
                         <a:cs typeface="Malgun Gothic" charset="0"/>
@@ -18939,7 +18963,10 @@
                   </a:tcPr>
                 </a:tc>
               </a:tr>
-              <a:tr h="283464">
+              <a:tr h="239573">
+                <a:tc vMerge="1">
+                  <a:tcPr/>
+                </a:tc>
                 <a:tc>
                   <a:txBody>
                     <a:bodyPr/>
@@ -18949,7 +18976,7 @@
                         <a:buNone/>
                       </a:pPr>
                       <a:r>
-                        <a:rPr lang="en-US" sz="950" dirty="0">
+                        <a:rPr lang="en-US" sz="930" dirty="0">
                           <a:solidFill>
                             <a:srgbClr val="1C2733"/>
                           </a:solidFill>
@@ -18957,9 +18984,9 @@
                           <a:ea typeface="Malgun Gothic" pitchFamily="34" charset="-122"/>
                           <a:cs typeface="Malgun Gothic" pitchFamily="34" charset="-120"/>
                         </a:rPr>
-                        <a:t>핀 개수</a:t>
+                        <a:t>입구 각도</a:t>
                       </a:r>
-                      <a:endParaRPr lang="en-US" sz="950" dirty="0">
+                      <a:endParaRPr lang="en-US" sz="930" dirty="0">
                         <a:latin typeface="Malgun Gothic" charset="0"/>
                         <a:ea typeface="Malgun Gothic" charset="0"/>
                         <a:cs typeface="Malgun Gothic" charset="0"/>
@@ -18996,7 +19023,7 @@
                         <a:buNone/>
                       </a:pPr>
                       <a:r>
-                        <a:rPr lang="en-US" sz="950" dirty="0">
+                        <a:rPr lang="en-US" sz="930" dirty="0">
                           <a:solidFill>
                             <a:srgbClr val="1C2733"/>
                           </a:solidFill>
@@ -19004,9 +19031,9 @@
                           <a:ea typeface="Malgun Gothic" pitchFamily="34" charset="-122"/>
                           <a:cs typeface="Malgun Gothic" pitchFamily="34" charset="-120"/>
                         </a:rPr>
-                        <a:t>공유 1개 (10~21)</a:t>
+                        <a:t>90 ~ 150 °</a:t>
                       </a:r>
-                      <a:endParaRPr lang="en-US" sz="950" dirty="0">
+                      <a:endParaRPr lang="en-US" sz="930" dirty="0">
                         <a:latin typeface="Malgun Gothic" charset="0"/>
                         <a:ea typeface="Malgun Gothic" charset="0"/>
                         <a:cs typeface="Malgun Gothic" charset="0"/>
@@ -19034,6 +19061,11 @@
                     </a:lnB>
                   </a:tcPr>
                 </a:tc>
+              </a:tr>
+              <a:tr h="239573">
+                <a:tc vMerge="1">
+                  <a:tcPr/>
+                </a:tc>
                 <a:tc>
                   <a:txBody>
                     <a:bodyPr/>
@@ -19043,17 +19075,17 @@
                         <a:buNone/>
                       </a:pPr>
                       <a:r>
-                        <a:rPr lang="en-US" sz="950" b="1" dirty="0">
+                        <a:rPr lang="en-US" sz="930" dirty="0">
                           <a:solidFill>
-                            <a:srgbClr val="16305B"/>
+                            <a:srgbClr val="1C2733"/>
                           </a:solidFill>
                           <a:latin typeface="Malgun Gothic" pitchFamily="34" charset="0"/>
                           <a:ea typeface="Malgun Gothic" pitchFamily="34" charset="-122"/>
                           <a:cs typeface="Malgun Gothic" pitchFamily="34" charset="-120"/>
                         </a:rPr>
-                        <a:t>1차 · 2차 분리 (10~24)</a:t>
+                        <a:t>분기 입구 두께</a:t>
                       </a:r>
-                      <a:endParaRPr lang="en-US" sz="950" dirty="0">
+                      <a:endParaRPr lang="en-US" sz="930" dirty="0">
                         <a:latin typeface="Malgun Gothic" charset="0"/>
                         <a:ea typeface="Malgun Gothic" charset="0"/>
                         <a:cs typeface="Malgun Gothic" charset="0"/>
@@ -19081,8 +19113,6 @@
                     </a:lnB>
                   </a:tcPr>
                 </a:tc>
-              </a:tr>
-              <a:tr h="283464">
                 <a:tc>
                   <a:txBody>
                     <a:bodyPr/>
@@ -19092,7 +19122,7 @@
                         <a:buNone/>
                       </a:pPr>
                       <a:r>
-                        <a:rPr lang="en-US" sz="950" dirty="0">
+                        <a:rPr lang="en-US" sz="930" dirty="0">
                           <a:solidFill>
                             <a:srgbClr val="1C2733"/>
                           </a:solidFill>
@@ -19100,9 +19130,9 @@
                           <a:ea typeface="Malgun Gothic" pitchFamily="34" charset="-122"/>
                           <a:cs typeface="Malgun Gothic" pitchFamily="34" charset="-120"/>
                         </a:rPr>
-                        <a:t>분기 입구 두께</a:t>
+                        <a:t>3 ~ 10 mm</a:t>
                       </a:r>
-                      <a:endParaRPr lang="en-US" sz="950" dirty="0">
+                      <a:endParaRPr lang="en-US" sz="930" dirty="0">
                         <a:latin typeface="Malgun Gothic" charset="0"/>
                         <a:ea typeface="Malgun Gothic" charset="0"/>
                         <a:cs typeface="Malgun Gothic" charset="0"/>
@@ -19130,6 +19160,11 @@
                     </a:lnB>
                   </a:tcPr>
                 </a:tc>
+              </a:tr>
+              <a:tr h="239573">
+                <a:tc vMerge="1">
+                  <a:tcPr/>
+                </a:tc>
                 <a:tc>
                   <a:txBody>
                     <a:bodyPr/>
@@ -19139,7 +19174,7 @@
                         <a:buNone/>
                       </a:pPr>
                       <a:r>
-                        <a:rPr lang="en-US" sz="950" dirty="0">
+                        <a:rPr lang="en-US" sz="930" dirty="0">
                           <a:solidFill>
                             <a:srgbClr val="1C2733"/>
                           </a:solidFill>
@@ -19147,9 +19182,9 @@
                           <a:ea typeface="Malgun Gothic" pitchFamily="34" charset="-122"/>
                           <a:cs typeface="Malgun Gothic" pitchFamily="34" charset="-120"/>
                         </a:rPr>
-                        <a:t>3 ~ 20 mm</a:t>
+                        <a:t>중간 유로 두께</a:t>
                       </a:r>
-                      <a:endParaRPr lang="en-US" sz="950" dirty="0">
+                      <a:endParaRPr lang="en-US" sz="930" dirty="0">
                         <a:latin typeface="Malgun Gothic" charset="0"/>
                         <a:ea typeface="Malgun Gothic" charset="0"/>
                         <a:cs typeface="Malgun Gothic" charset="0"/>
@@ -19186,17 +19221,17 @@
                         <a:buNone/>
                       </a:pPr>
                       <a:r>
-                        <a:rPr lang="en-US" sz="950" b="1" dirty="0">
+                        <a:rPr lang="en-US" sz="930" dirty="0">
                           <a:solidFill>
-                            <a:srgbClr val="16305B"/>
+                            <a:srgbClr val="1C2733"/>
                           </a:solidFill>
                           <a:latin typeface="Malgun Gothic" pitchFamily="34" charset="0"/>
                           <a:ea typeface="Malgun Gothic" pitchFamily="34" charset="-122"/>
                           <a:cs typeface="Malgun Gothic" pitchFamily="34" charset="-120"/>
                         </a:rPr>
-                        <a:t>3 ~ 10 mm</a:t>
+                        <a:t>10 ~ 25 mm</a:t>
                       </a:r>
-                      <a:endParaRPr lang="en-US" sz="950" dirty="0">
+                      <a:endParaRPr lang="en-US" sz="930" dirty="0">
                         <a:latin typeface="Malgun Gothic" charset="0"/>
                         <a:ea typeface="Malgun Gothic" charset="0"/>
                         <a:cs typeface="Malgun Gothic" charset="0"/>
@@ -19225,7 +19260,10 @@
                   </a:tcPr>
                 </a:tc>
               </a:tr>
-              <a:tr h="283464">
+              <a:tr h="239573">
+                <a:tc vMerge="1">
+                  <a:tcPr/>
+                </a:tc>
                 <a:tc>
                   <a:txBody>
                     <a:bodyPr/>
@@ -19235,7 +19273,7 @@
                         <a:buNone/>
                       </a:pPr>
                       <a:r>
-                        <a:rPr lang="en-US" sz="950" dirty="0">
+                        <a:rPr lang="en-US" sz="930" dirty="0">
                           <a:solidFill>
                             <a:srgbClr val="1C2733"/>
                           </a:solidFill>
@@ -19243,9 +19281,9 @@
                           <a:ea typeface="Malgun Gothic" pitchFamily="34" charset="-122"/>
                           <a:cs typeface="Malgun Gothic" pitchFamily="34" charset="-120"/>
                         </a:rPr>
-                        <a:t>최소 핀 갭</a:t>
+                        <a:t>중간 각도</a:t>
                       </a:r>
-                      <a:endParaRPr lang="en-US" sz="950" dirty="0">
+                      <a:endParaRPr lang="en-US" sz="930" dirty="0">
                         <a:latin typeface="Malgun Gothic" charset="0"/>
                         <a:ea typeface="Malgun Gothic" charset="0"/>
                         <a:cs typeface="Malgun Gothic" charset="0"/>
@@ -19282,7 +19320,7 @@
                         <a:buNone/>
                       </a:pPr>
                       <a:r>
-                        <a:rPr lang="en-US" sz="950" dirty="0">
+                        <a:rPr lang="en-US" sz="930" dirty="0">
                           <a:solidFill>
                             <a:srgbClr val="1C2733"/>
                           </a:solidFill>
@@ -19290,9 +19328,9 @@
                           <a:ea typeface="Malgun Gothic" pitchFamily="34" charset="-122"/>
                           <a:cs typeface="Malgun Gothic" pitchFamily="34" charset="-120"/>
                         </a:rPr>
-                        <a:t>2.5 mm</a:t>
+                        <a:t>90 ~ 140 °</a:t>
                       </a:r>
-                      <a:endParaRPr lang="en-US" sz="950" dirty="0">
+                      <a:endParaRPr lang="en-US" sz="930" dirty="0">
                         <a:latin typeface="Malgun Gothic" charset="0"/>
                         <a:ea typeface="Malgun Gothic" charset="0"/>
                         <a:cs typeface="Malgun Gothic" charset="0"/>
@@ -19320,6 +19358,11 @@
                     </a:lnB>
                   </a:tcPr>
                 </a:tc>
+              </a:tr>
+              <a:tr h="239573">
+                <a:tc vMerge="1">
+                  <a:tcPr/>
+                </a:tc>
                 <a:tc>
                   <a:txBody>
                     <a:bodyPr/>
@@ -19329,17 +19372,17 @@
                         <a:buNone/>
                       </a:pPr>
                       <a:r>
-                        <a:rPr lang="en-US" sz="950" b="1" dirty="0">
+                        <a:rPr lang="en-US" sz="930" dirty="0">
                           <a:solidFill>
-                            <a:srgbClr val="16305B"/>
+                            <a:srgbClr val="1C2733"/>
                           </a:solidFill>
                           <a:latin typeface="Malgun Gothic" pitchFamily="34" charset="0"/>
                           <a:ea typeface="Malgun Gothic" pitchFamily="34" charset="-122"/>
                           <a:cs typeface="Malgun Gothic" pitchFamily="34" charset="-120"/>
                         </a:rPr>
-                        <a:t>2.0 mm</a:t>
+                        <a:t>중간 입구 두께</a:t>
                       </a:r>
-                      <a:endParaRPr lang="en-US" sz="950" dirty="0">
+                      <a:endParaRPr lang="en-US" sz="930" dirty="0">
                         <a:latin typeface="Malgun Gothic" charset="0"/>
                         <a:ea typeface="Malgun Gothic" charset="0"/>
                         <a:cs typeface="Malgun Gothic" charset="0"/>
@@ -19367,8 +19410,6 @@
                     </a:lnB>
                   </a:tcPr>
                 </a:tc>
-              </a:tr>
-              <a:tr h="283464">
                 <a:tc>
                   <a:txBody>
                     <a:bodyPr/>
@@ -19378,7 +19419,7 @@
                         <a:buNone/>
                       </a:pPr>
                       <a:r>
-                        <a:rPr lang="en-US" sz="950" dirty="0">
+                        <a:rPr lang="en-US" sz="930" dirty="0">
                           <a:solidFill>
                             <a:srgbClr val="1C2733"/>
                           </a:solidFill>
@@ -19386,9 +19427,9 @@
                           <a:ea typeface="Malgun Gothic" pitchFamily="34" charset="-122"/>
                           <a:cs typeface="Malgun Gothic" pitchFamily="34" charset="-120"/>
                         </a:rPr>
-                        <a:t>후보 변수</a:t>
+                        <a:t>10 ~ 25 mm</a:t>
                       </a:r>
-                      <a:endParaRPr lang="en-US" sz="950" dirty="0">
+                      <a:endParaRPr lang="en-US" sz="930" dirty="0">
                         <a:latin typeface="Malgun Gothic" charset="0"/>
                         <a:ea typeface="Malgun Gothic" charset="0"/>
                         <a:cs typeface="Malgun Gothic" charset="0"/>
@@ -19416,6 +19457,11 @@
                     </a:lnB>
                   </a:tcPr>
                 </a:tc>
+              </a:tr>
+              <a:tr h="239573">
+                <a:tc vMerge="1">
+                  <a:tcPr/>
+                </a:tc>
                 <a:tc>
                   <a:txBody>
                     <a:bodyPr/>
@@ -19425,7 +19471,7 @@
                         <a:buNone/>
                       </a:pPr>
                       <a:r>
-                        <a:rPr lang="en-US" sz="950" dirty="0">
+                        <a:rPr lang="en-US" sz="930" dirty="0">
                           <a:solidFill>
                             <a:srgbClr val="1C2733"/>
                           </a:solidFill>
@@ -19433,9 +19479,9 @@
                           <a:ea typeface="Malgun Gothic" pitchFamily="34" charset="-122"/>
                           <a:cs typeface="Malgun Gothic" pitchFamily="34" charset="-120"/>
                         </a:rPr>
-                        <a:t>9개</a:t>
+                        <a:t>출구 유로 두께</a:t>
                       </a:r>
-                      <a:endParaRPr lang="en-US" sz="950" dirty="0">
+                      <a:endParaRPr lang="en-US" sz="930" dirty="0">
                         <a:latin typeface="Malgun Gothic" charset="0"/>
                         <a:ea typeface="Malgun Gothic" charset="0"/>
                         <a:cs typeface="Malgun Gothic" charset="0"/>
@@ -19472,17 +19518,17 @@
                         <a:buNone/>
                       </a:pPr>
                       <a:r>
-                        <a:rPr lang="en-US" sz="950" b="1" dirty="0">
+                        <a:rPr lang="en-US" sz="930" dirty="0">
                           <a:solidFill>
-                            <a:srgbClr val="16305B"/>
+                            <a:srgbClr val="1C2733"/>
                           </a:solidFill>
                           <a:latin typeface="Malgun Gothic" pitchFamily="34" charset="0"/>
                           <a:ea typeface="Malgun Gothic" pitchFamily="34" charset="-122"/>
                           <a:cs typeface="Malgun Gothic" pitchFamily="34" charset="-120"/>
                         </a:rPr>
-                        <a:t>11개</a:t>
+                        <a:t>13 ~ 35 mm</a:t>
                       </a:r>
-                      <a:endParaRPr lang="en-US" sz="950" dirty="0">
+                      <a:endParaRPr lang="en-US" sz="930" dirty="0">
                         <a:latin typeface="Malgun Gothic" charset="0"/>
                         <a:ea typeface="Malgun Gothic" charset="0"/>
                         <a:cs typeface="Malgun Gothic" charset="0"/>
@@ -19511,6 +19557,538 @@
                   </a:tcPr>
                 </a:tc>
               </a:tr>
+              <a:tr h="239573">
+                <a:tc rowSpan="2">
+                  <a:txBody>
+                    <a:bodyPr/>
+                    <a:lstStyle/>
+                    <a:p>
+                      <a:pPr algn="ctr" indent="0" marL="0">
+                        <a:buNone/>
+                      </a:pPr>
+                      <a:r>
+                        <a:rPr lang="en-US" sz="930" b="1" dirty="0">
+                          <a:solidFill>
+                            <a:srgbClr val="16305B"/>
+                          </a:solidFill>
+                          <a:latin typeface="Malgun Gothic" pitchFamily="34" charset="0"/>
+                          <a:ea typeface="Malgun Gothic" pitchFamily="34" charset="-122"/>
+                          <a:cs typeface="Malgun Gothic" pitchFamily="34" charset="-120"/>
+                        </a:rPr>
+                        <a:t>1차 통과 핀</a:t>
+                      </a:r>
+                      <a:endParaRPr lang="en-US" sz="930" dirty="0">
+                        <a:latin typeface="Malgun Gothic" charset="0"/>
+                        <a:ea typeface="Malgun Gothic" charset="0"/>
+                        <a:cs typeface="Malgun Gothic" charset="0"/>
+                      </a:endParaRPr>
+                    </a:p>
+                    <a:p>
+                      <a:pPr algn="ctr" indent="0" marL="0">
+                        <a:buNone/>
+                      </a:pPr>
+                      <a:r>
+                        <a:rPr lang="en-US" sz="930" b="1" dirty="0">
+                          <a:solidFill>
+                            <a:srgbClr val="16305B"/>
+                          </a:solidFill>
+                          <a:latin typeface="Malgun Gothic" pitchFamily="34" charset="0"/>
+                          <a:ea typeface="Malgun Gothic" pitchFamily="34" charset="-122"/>
+                          <a:cs typeface="Malgun Gothic" pitchFamily="34" charset="-120"/>
+                        </a:rPr>
+                        <a:t>(2)</a:t>
+                      </a:r>
+                      <a:endParaRPr lang="en-US" sz="930" dirty="0">
+                        <a:latin typeface="Malgun Gothic" charset="0"/>
+                        <a:ea typeface="Malgun Gothic" charset="0"/>
+                        <a:cs typeface="Malgun Gothic" charset="0"/>
+                      </a:endParaRPr>
+                    </a:p>
+                  </a:txBody>
+                  <a:tcPr marL="50800" marR="50800" marT="25400" marB="25400" anchor="ctr">
+                    <a:lnL w="0" cap="flat" cmpd="sng" algn="ctr">
+                      <a:noFill/>
+                    </a:lnL>
+                    <a:lnR w="0" cap="flat" cmpd="sng" algn="ctr">
+                      <a:noFill/>
+                    </a:lnR>
+                    <a:lnT w="0" cap="flat" cmpd="sng" algn="ctr">
+                      <a:noFill/>
+                    </a:lnT>
+                    <a:lnB w="6350" cap="flat" cmpd="sng" algn="ctr">
+                      <a:solidFill>
+                        <a:srgbClr val="DDE3EB"/>
+                      </a:solidFill>
+                      <a:prstDash val="solid"/>
+                      <a:round/>
+                      <a:headEnd type="none" w="med" len="med"/>
+                      <a:tailEnd type="none" w="med" len="med"/>
+                    </a:lnB>
+                    <a:solidFill>
+                      <a:srgbClr val="F7F9FC"/>
+                    </a:solidFill>
+                  </a:tcPr>
+                </a:tc>
+                <a:tc>
+                  <a:txBody>
+                    <a:bodyPr/>
+                    <a:lstStyle/>
+                    <a:p>
+                      <a:pPr indent="0" marL="0">
+                        <a:buNone/>
+                      </a:pPr>
+                      <a:r>
+                        <a:rPr lang="en-US" sz="930" b="1" dirty="0">
+                          <a:solidFill>
+                            <a:srgbClr val="16305B"/>
+                          </a:solidFill>
+                          <a:latin typeface="Malgun Gothic" pitchFamily="34" charset="0"/>
+                          <a:ea typeface="Malgun Gothic" pitchFamily="34" charset="-122"/>
+                          <a:cs typeface="Malgun Gothic" pitchFamily="34" charset="-120"/>
+                        </a:rPr>
+                        <a:t>1차 핀 두께</a:t>
+                      </a:r>
+                      <a:endParaRPr lang="en-US" sz="930" dirty="0">
+                        <a:latin typeface="Malgun Gothic" charset="0"/>
+                        <a:ea typeface="Malgun Gothic" charset="0"/>
+                        <a:cs typeface="Malgun Gothic" charset="0"/>
+                      </a:endParaRPr>
+                    </a:p>
+                  </a:txBody>
+                  <a:tcPr marL="50800" marR="50800" marT="25400" marB="25400" anchor="ctr">
+                    <a:lnL w="0" cap="flat" cmpd="sng" algn="ctr">
+                      <a:noFill/>
+                    </a:lnL>
+                    <a:lnR w="0" cap="flat" cmpd="sng" algn="ctr">
+                      <a:noFill/>
+                    </a:lnR>
+                    <a:lnT w="0" cap="flat" cmpd="sng" algn="ctr">
+                      <a:noFill/>
+                    </a:lnT>
+                    <a:lnB w="6350" cap="flat" cmpd="sng" algn="ctr">
+                      <a:solidFill>
+                        <a:srgbClr val="DDE3EB"/>
+                      </a:solidFill>
+                      <a:prstDash val="solid"/>
+                      <a:round/>
+                      <a:headEnd type="none" w="med" len="med"/>
+                      <a:tailEnd type="none" w="med" len="med"/>
+                    </a:lnB>
+                  </a:tcPr>
+                </a:tc>
+                <a:tc>
+                  <a:txBody>
+                    <a:bodyPr/>
+                    <a:lstStyle/>
+                    <a:p>
+                      <a:pPr indent="0" marL="0">
+                        <a:buNone/>
+                      </a:pPr>
+                      <a:r>
+                        <a:rPr lang="en-US" sz="930" b="1" dirty="0">
+                          <a:solidFill>
+                            <a:srgbClr val="16305B"/>
+                          </a:solidFill>
+                          <a:latin typeface="Malgun Gothic" pitchFamily="34" charset="0"/>
+                          <a:ea typeface="Malgun Gothic" pitchFamily="34" charset="-122"/>
+                          <a:cs typeface="Malgun Gothic" pitchFamily="34" charset="-120"/>
+                        </a:rPr>
+                        <a:t>1.5 ~ 3.0 mm</a:t>
+                      </a:r>
+                      <a:endParaRPr lang="en-US" sz="930" dirty="0">
+                        <a:latin typeface="Malgun Gothic" charset="0"/>
+                        <a:ea typeface="Malgun Gothic" charset="0"/>
+                        <a:cs typeface="Malgun Gothic" charset="0"/>
+                      </a:endParaRPr>
+                    </a:p>
+                  </a:txBody>
+                  <a:tcPr marL="50800" marR="50800" marT="25400" marB="25400" anchor="ctr">
+                    <a:lnL w="0" cap="flat" cmpd="sng" algn="ctr">
+                      <a:noFill/>
+                    </a:lnL>
+                    <a:lnR w="0" cap="flat" cmpd="sng" algn="ctr">
+                      <a:noFill/>
+                    </a:lnR>
+                    <a:lnT w="0" cap="flat" cmpd="sng" algn="ctr">
+                      <a:noFill/>
+                    </a:lnT>
+                    <a:lnB w="6350" cap="flat" cmpd="sng" algn="ctr">
+                      <a:solidFill>
+                        <a:srgbClr val="DDE3EB"/>
+                      </a:solidFill>
+                      <a:prstDash val="solid"/>
+                      <a:round/>
+                      <a:headEnd type="none" w="med" len="med"/>
+                      <a:tailEnd type="none" w="med" len="med"/>
+                    </a:lnB>
+                  </a:tcPr>
+                </a:tc>
+              </a:tr>
+              <a:tr h="239573">
+                <a:tc vMerge="1">
+                  <a:tcPr/>
+                </a:tc>
+                <a:tc>
+                  <a:txBody>
+                    <a:bodyPr/>
+                    <a:lstStyle/>
+                    <a:p>
+                      <a:pPr indent="0" marL="0">
+                        <a:buNone/>
+                      </a:pPr>
+                      <a:r>
+                        <a:rPr lang="en-US" sz="930" b="1" dirty="0">
+                          <a:solidFill>
+                            <a:srgbClr val="16305B"/>
+                          </a:solidFill>
+                          <a:latin typeface="Malgun Gothic" pitchFamily="34" charset="0"/>
+                          <a:ea typeface="Malgun Gothic" pitchFamily="34" charset="-122"/>
+                          <a:cs typeface="Malgun Gothic" pitchFamily="34" charset="-120"/>
+                        </a:rPr>
+                        <a:t>1차 핀 개수</a:t>
+                      </a:r>
+                      <a:endParaRPr lang="en-US" sz="930" dirty="0">
+                        <a:latin typeface="Malgun Gothic" charset="0"/>
+                        <a:ea typeface="Malgun Gothic" charset="0"/>
+                        <a:cs typeface="Malgun Gothic" charset="0"/>
+                      </a:endParaRPr>
+                    </a:p>
+                  </a:txBody>
+                  <a:tcPr marL="50800" marR="50800" marT="25400" marB="25400" anchor="ctr">
+                    <a:lnL w="0" cap="flat" cmpd="sng" algn="ctr">
+                      <a:noFill/>
+                    </a:lnL>
+                    <a:lnR w="0" cap="flat" cmpd="sng" algn="ctr">
+                      <a:noFill/>
+                    </a:lnR>
+                    <a:lnT w="0" cap="flat" cmpd="sng" algn="ctr">
+                      <a:noFill/>
+                    </a:lnT>
+                    <a:lnB w="6350" cap="flat" cmpd="sng" algn="ctr">
+                      <a:solidFill>
+                        <a:srgbClr val="DDE3EB"/>
+                      </a:solidFill>
+                      <a:prstDash val="solid"/>
+                      <a:round/>
+                      <a:headEnd type="none" w="med" len="med"/>
+                      <a:tailEnd type="none" w="med" len="med"/>
+                    </a:lnB>
+                  </a:tcPr>
+                </a:tc>
+                <a:tc>
+                  <a:txBody>
+                    <a:bodyPr/>
+                    <a:lstStyle/>
+                    <a:p>
+                      <a:pPr indent="0" marL="0">
+                        <a:buNone/>
+                      </a:pPr>
+                      <a:r>
+                        <a:rPr lang="en-US" sz="930" b="1" dirty="0">
+                          <a:solidFill>
+                            <a:srgbClr val="16305B"/>
+                          </a:solidFill>
+                          <a:latin typeface="Malgun Gothic" pitchFamily="34" charset="0"/>
+                          <a:ea typeface="Malgun Gothic" pitchFamily="34" charset="-122"/>
+                          <a:cs typeface="Malgun Gothic" pitchFamily="34" charset="-120"/>
+                        </a:rPr>
+                        <a:t>10 ~ 24 개</a:t>
+                      </a:r>
+                      <a:endParaRPr lang="en-US" sz="930" dirty="0">
+                        <a:latin typeface="Malgun Gothic" charset="0"/>
+                        <a:ea typeface="Malgun Gothic" charset="0"/>
+                        <a:cs typeface="Malgun Gothic" charset="0"/>
+                      </a:endParaRPr>
+                    </a:p>
+                  </a:txBody>
+                  <a:tcPr marL="50800" marR="50800" marT="25400" marB="25400" anchor="ctr">
+                    <a:lnL w="0" cap="flat" cmpd="sng" algn="ctr">
+                      <a:noFill/>
+                    </a:lnL>
+                    <a:lnR w="0" cap="flat" cmpd="sng" algn="ctr">
+                      <a:noFill/>
+                    </a:lnR>
+                    <a:lnT w="0" cap="flat" cmpd="sng" algn="ctr">
+                      <a:noFill/>
+                    </a:lnT>
+                    <a:lnB w="6350" cap="flat" cmpd="sng" algn="ctr">
+                      <a:solidFill>
+                        <a:srgbClr val="DDE3EB"/>
+                      </a:solidFill>
+                      <a:prstDash val="solid"/>
+                      <a:round/>
+                      <a:headEnd type="none" w="med" len="med"/>
+                      <a:tailEnd type="none" w="med" len="med"/>
+                    </a:lnB>
+                  </a:tcPr>
+                </a:tc>
+              </a:tr>
+              <a:tr h="239573">
+                <a:tc rowSpan="2">
+                  <a:txBody>
+                    <a:bodyPr/>
+                    <a:lstStyle/>
+                    <a:p>
+                      <a:pPr algn="ctr" indent="0" marL="0">
+                        <a:buNone/>
+                      </a:pPr>
+                      <a:r>
+                        <a:rPr lang="en-US" sz="930" b="1" dirty="0">
+                          <a:solidFill>
+                            <a:srgbClr val="16305B"/>
+                          </a:solidFill>
+                          <a:latin typeface="Malgun Gothic" pitchFamily="34" charset="0"/>
+                          <a:ea typeface="Malgun Gothic" pitchFamily="34" charset="-122"/>
+                          <a:cs typeface="Malgun Gothic" pitchFamily="34" charset="-120"/>
+                        </a:rPr>
+                        <a:t>2차 통과 핀</a:t>
+                      </a:r>
+                      <a:endParaRPr lang="en-US" sz="930" dirty="0">
+                        <a:latin typeface="Malgun Gothic" charset="0"/>
+                        <a:ea typeface="Malgun Gothic" charset="0"/>
+                        <a:cs typeface="Malgun Gothic" charset="0"/>
+                      </a:endParaRPr>
+                    </a:p>
+                    <a:p>
+                      <a:pPr algn="ctr" indent="0" marL="0">
+                        <a:buNone/>
+                      </a:pPr>
+                      <a:r>
+                        <a:rPr lang="en-US" sz="930" b="1" dirty="0">
+                          <a:solidFill>
+                            <a:srgbClr val="16305B"/>
+                          </a:solidFill>
+                          <a:latin typeface="Malgun Gothic" pitchFamily="34" charset="0"/>
+                          <a:ea typeface="Malgun Gothic" pitchFamily="34" charset="-122"/>
+                          <a:cs typeface="Malgun Gothic" pitchFamily="34" charset="-120"/>
+                        </a:rPr>
+                        <a:t>(2)</a:t>
+                      </a:r>
+                      <a:endParaRPr lang="en-US" sz="930" dirty="0">
+                        <a:latin typeface="Malgun Gothic" charset="0"/>
+                        <a:ea typeface="Malgun Gothic" charset="0"/>
+                        <a:cs typeface="Malgun Gothic" charset="0"/>
+                      </a:endParaRPr>
+                    </a:p>
+                  </a:txBody>
+                  <a:tcPr marL="50800" marR="50800" marT="25400" marB="25400" anchor="ctr">
+                    <a:lnL w="0" cap="flat" cmpd="sng" algn="ctr">
+                      <a:noFill/>
+                    </a:lnL>
+                    <a:lnR w="0" cap="flat" cmpd="sng" algn="ctr">
+                      <a:noFill/>
+                    </a:lnR>
+                    <a:lnT w="0" cap="flat" cmpd="sng" algn="ctr">
+                      <a:noFill/>
+                    </a:lnT>
+                    <a:lnB w="6350" cap="flat" cmpd="sng" algn="ctr">
+                      <a:solidFill>
+                        <a:srgbClr val="DDE3EB"/>
+                      </a:solidFill>
+                      <a:prstDash val="solid"/>
+                      <a:round/>
+                      <a:headEnd type="none" w="med" len="med"/>
+                      <a:tailEnd type="none" w="med" len="med"/>
+                    </a:lnB>
+                    <a:solidFill>
+                      <a:srgbClr val="F7F9FC"/>
+                    </a:solidFill>
+                  </a:tcPr>
+                </a:tc>
+                <a:tc>
+                  <a:txBody>
+                    <a:bodyPr/>
+                    <a:lstStyle/>
+                    <a:p>
+                      <a:pPr indent="0" marL="0">
+                        <a:buNone/>
+                      </a:pPr>
+                      <a:r>
+                        <a:rPr lang="en-US" sz="930" b="1" dirty="0">
+                          <a:solidFill>
+                            <a:srgbClr val="16305B"/>
+                          </a:solidFill>
+                          <a:latin typeface="Malgun Gothic" pitchFamily="34" charset="0"/>
+                          <a:ea typeface="Malgun Gothic" pitchFamily="34" charset="-122"/>
+                          <a:cs typeface="Malgun Gothic" pitchFamily="34" charset="-120"/>
+                        </a:rPr>
+                        <a:t>2차 핀 두께</a:t>
+                      </a:r>
+                      <a:endParaRPr lang="en-US" sz="930" dirty="0">
+                        <a:latin typeface="Malgun Gothic" charset="0"/>
+                        <a:ea typeface="Malgun Gothic" charset="0"/>
+                        <a:cs typeface="Malgun Gothic" charset="0"/>
+                      </a:endParaRPr>
+                    </a:p>
+                  </a:txBody>
+                  <a:tcPr marL="50800" marR="50800" marT="25400" marB="25400" anchor="ctr">
+                    <a:lnL w="0" cap="flat" cmpd="sng" algn="ctr">
+                      <a:noFill/>
+                    </a:lnL>
+                    <a:lnR w="0" cap="flat" cmpd="sng" algn="ctr">
+                      <a:noFill/>
+                    </a:lnR>
+                    <a:lnT w="0" cap="flat" cmpd="sng" algn="ctr">
+                      <a:noFill/>
+                    </a:lnT>
+                    <a:lnB w="6350" cap="flat" cmpd="sng" algn="ctr">
+                      <a:solidFill>
+                        <a:srgbClr val="DDE3EB"/>
+                      </a:solidFill>
+                      <a:prstDash val="solid"/>
+                      <a:round/>
+                      <a:headEnd type="none" w="med" len="med"/>
+                      <a:tailEnd type="none" w="med" len="med"/>
+                    </a:lnB>
+                  </a:tcPr>
+                </a:tc>
+                <a:tc>
+                  <a:txBody>
+                    <a:bodyPr/>
+                    <a:lstStyle/>
+                    <a:p>
+                      <a:pPr indent="0" marL="0">
+                        <a:buNone/>
+                      </a:pPr>
+                      <a:r>
+                        <a:rPr lang="en-US" sz="930" b="1" dirty="0">
+                          <a:solidFill>
+                            <a:srgbClr val="16305B"/>
+                          </a:solidFill>
+                          <a:latin typeface="Malgun Gothic" pitchFamily="34" charset="0"/>
+                          <a:ea typeface="Malgun Gothic" pitchFamily="34" charset="-122"/>
+                          <a:cs typeface="Malgun Gothic" pitchFamily="34" charset="-120"/>
+                        </a:rPr>
+                        <a:t>1.5 ~ 3.0 mm</a:t>
+                      </a:r>
+                      <a:endParaRPr lang="en-US" sz="930" dirty="0">
+                        <a:latin typeface="Malgun Gothic" charset="0"/>
+                        <a:ea typeface="Malgun Gothic" charset="0"/>
+                        <a:cs typeface="Malgun Gothic" charset="0"/>
+                      </a:endParaRPr>
+                    </a:p>
+                  </a:txBody>
+                  <a:tcPr marL="50800" marR="50800" marT="25400" marB="25400" anchor="ctr">
+                    <a:lnL w="0" cap="flat" cmpd="sng" algn="ctr">
+                      <a:noFill/>
+                    </a:lnL>
+                    <a:lnR w="0" cap="flat" cmpd="sng" algn="ctr">
+                      <a:noFill/>
+                    </a:lnR>
+                    <a:lnT w="0" cap="flat" cmpd="sng" algn="ctr">
+                      <a:noFill/>
+                    </a:lnT>
+                    <a:lnB w="6350" cap="flat" cmpd="sng" algn="ctr">
+                      <a:solidFill>
+                        <a:srgbClr val="DDE3EB"/>
+                      </a:solidFill>
+                      <a:prstDash val="solid"/>
+                      <a:round/>
+                      <a:headEnd type="none" w="med" len="med"/>
+                      <a:tailEnd type="none" w="med" len="med"/>
+                    </a:lnB>
+                  </a:tcPr>
+                </a:tc>
+              </a:tr>
+              <a:tr h="239573">
+                <a:tc vMerge="1">
+                  <a:tcPr/>
+                </a:tc>
+                <a:tc>
+                  <a:txBody>
+                    <a:bodyPr/>
+                    <a:lstStyle/>
+                    <a:p>
+                      <a:pPr indent="0" marL="0">
+                        <a:buNone/>
+                      </a:pPr>
+                      <a:r>
+                        <a:rPr lang="en-US" sz="930" b="1" dirty="0">
+                          <a:solidFill>
+                            <a:srgbClr val="16305B"/>
+                          </a:solidFill>
+                          <a:latin typeface="Malgun Gothic" pitchFamily="34" charset="0"/>
+                          <a:ea typeface="Malgun Gothic" pitchFamily="34" charset="-122"/>
+                          <a:cs typeface="Malgun Gothic" pitchFamily="34" charset="-120"/>
+                        </a:rPr>
+                        <a:t>2차 핀 개수</a:t>
+                      </a:r>
+                      <a:endParaRPr lang="en-US" sz="930" dirty="0">
+                        <a:latin typeface="Malgun Gothic" charset="0"/>
+                        <a:ea typeface="Malgun Gothic" charset="0"/>
+                        <a:cs typeface="Malgun Gothic" charset="0"/>
+                      </a:endParaRPr>
+                    </a:p>
+                  </a:txBody>
+                  <a:tcPr marL="50800" marR="50800" marT="25400" marB="25400" anchor="ctr">
+                    <a:lnL w="0" cap="flat" cmpd="sng" algn="ctr">
+                      <a:noFill/>
+                    </a:lnL>
+                    <a:lnR w="0" cap="flat" cmpd="sng" algn="ctr">
+                      <a:noFill/>
+                    </a:lnR>
+                    <a:lnT w="0" cap="flat" cmpd="sng" algn="ctr">
+                      <a:noFill/>
+                    </a:lnT>
+                    <a:lnB w="6350" cap="flat" cmpd="sng" algn="ctr">
+                      <a:solidFill>
+                        <a:srgbClr val="DDE3EB"/>
+                      </a:solidFill>
+                      <a:prstDash val="solid"/>
+                      <a:round/>
+                      <a:headEnd type="none" w="med" len="med"/>
+                      <a:tailEnd type="none" w="med" len="med"/>
+                    </a:lnB>
+                  </a:tcPr>
+                </a:tc>
+                <a:tc>
+                  <a:txBody>
+                    <a:bodyPr/>
+                    <a:lstStyle/>
+                    <a:p>
+                      <a:pPr indent="0" marL="0">
+                        <a:buNone/>
+                      </a:pPr>
+                      <a:r>
+                        <a:rPr lang="en-US" sz="930" b="1" dirty="0">
+                          <a:solidFill>
+                            <a:srgbClr val="16305B"/>
+                          </a:solidFill>
+                          <a:latin typeface="Malgun Gothic" pitchFamily="34" charset="0"/>
+                          <a:ea typeface="Malgun Gothic" pitchFamily="34" charset="-122"/>
+                          <a:cs typeface="Malgun Gothic" pitchFamily="34" charset="-120"/>
+                        </a:rPr>
+                        <a:t>10 ~ 24 개</a:t>
+                      </a:r>
+                      <a:endParaRPr lang="en-US" sz="930" dirty="0">
+                        <a:latin typeface="Malgun Gothic" charset="0"/>
+                        <a:ea typeface="Malgun Gothic" charset="0"/>
+                        <a:cs typeface="Malgun Gothic" charset="0"/>
+                      </a:endParaRPr>
+                    </a:p>
+                  </a:txBody>
+                  <a:tcPr marL="50800" marR="50800" marT="25400" marB="25400" anchor="ctr">
+                    <a:lnL w="0" cap="flat" cmpd="sng" algn="ctr">
+                      <a:noFill/>
+                    </a:lnL>
+                    <a:lnR w="0" cap="flat" cmpd="sng" algn="ctr">
+                      <a:noFill/>
+                    </a:lnR>
+                    <a:lnT w="0" cap="flat" cmpd="sng" algn="ctr">
+                      <a:noFill/>
+                    </a:lnT>
+                    <a:lnB w="6350" cap="flat" cmpd="sng" algn="ctr">
+                      <a:solidFill>
+                        <a:srgbClr val="DDE3EB"/>
+                      </a:solidFill>
+                      <a:prstDash val="solid"/>
+                      <a:round/>
+                      <a:headEnd type="none" w="med" len="med"/>
+                      <a:tailEnd type="none" w="med" len="med"/>
+                    </a:lnB>
+                  </a:tcPr>
+                </a:tc>
+              </a:tr>
             </a:tbl>
           </a:graphicData>
         </a:graphic>
@@ -19523,8 +20101,8 @@
         </p:nvSpPr>
         <p:spPr>
           <a:xfrm>
-            <a:off x="6647688" y="3657600"/>
-            <a:ext cx="4846320" cy="640080"/>
+            <a:off x="6647688" y="4846320"/>
+            <a:ext cx="4846320" cy="365760"/>
           </a:xfrm>
           <a:prstGeom prst="rect">
             <a:avLst/>
@@ -19536,18 +20114,14 @@
           <a:bodyPr wrap="square" lIns="0" tIns="0" rIns="0" bIns="0" rtlCol="0" anchor="ctr"/>
           <a:lstStyle/>
           <a:p>
-            <a:pPr marL="342900" indent="-342900">
+            <a:pPr indent="0" marL="0">
               <a:lnSpc>
                 <a:spcPct val="115000"/>
               </a:lnSpc>
-              <a:spcAft>
-                <a:spcPts val="300"/>
-              </a:spcAft>
-              <a:buSzPct val="100000"/>
-              <a:buChar char="•"/>
+              <a:buNone/>
             </a:pPr>
             <a:r>
-              <a:rPr lang="en-US" sz="880" dirty="0">
+              <a:rPr lang="en-US" sz="860" i="1" dirty="0">
                 <a:solidFill>
                   <a:srgbClr val="6B7A8F"/>
                 </a:solidFill>
@@ -19555,148 +20129,15 @@
                 <a:ea typeface="Malgun Gothic" pitchFamily="34" charset="-122"/>
                 <a:cs typeface="Malgun Gothic" pitchFamily="34" charset="-120"/>
               </a:rPr>
-              <a:t>분기 입구 두께 — 목표 분기비(20~30%)를 만족한 설계가 모두 6.1 mm 이하 → 상한 축소</a:t>
+              <a:t>핀 갭은 두께 · 개수로 정해지는 종속값 — 최소 2.0 mm (제작 한계 2.5 mm는 최적화 단계 제약으로 적용)</a:t>
             </a:r>
-            <a:endParaRPr lang="en-US" sz="880" dirty="0"/>
-          </a:p>
-          <a:p>
-            <a:pPr marL="342900" indent="-342900">
-              <a:lnSpc>
-                <a:spcPct val="115000"/>
-              </a:lnSpc>
-              <a:spcAft>
-                <a:spcPts val="300"/>
-              </a:spcAft>
-              <a:buSzPct val="100000"/>
-              <a:buChar char="•"/>
-            </a:pPr>
-            <a:r>
-              <a:rPr lang="en-US" sz="880" dirty="0">
-                <a:solidFill>
-                  <a:srgbClr val="6B7A8F"/>
-                </a:solidFill>
-                <a:latin typeface="Malgun Gothic" pitchFamily="34" charset="0"/>
-                <a:ea typeface="Malgun Gothic" pitchFamily="34" charset="-122"/>
-                <a:cs typeface="Malgun Gothic" pitchFamily="34" charset="-120"/>
-              </a:rPr>
-              <a:t>최소 핀 갭 — 실험 범위는 넓히고, 제작 한계(2.5 mm)는 최적화 단계의 제약으로 적용</a:t>
-            </a:r>
-            <a:endParaRPr lang="en-US" sz="880" dirty="0"/>
+            <a:endParaRPr lang="en-US" sz="860" dirty="0"/>
           </a:p>
         </p:txBody>
       </p:sp>
       <p:sp>
         <p:nvSpPr>
           <p:cNvPr id="32" name="Shape 29"/>
-          <p:cNvSpPr/>
-          <p:nvPr/>
-        </p:nvSpPr>
-        <p:spPr>
-          <a:xfrm>
-            <a:off x="6647688" y="4370832"/>
-            <a:ext cx="4846320" cy="786384"/>
-          </a:xfrm>
-          <a:prstGeom prst="roundRect">
-            <a:avLst>
-              <a:gd name="adj" fmla="val 6977"/>
-            </a:avLst>
-          </a:prstGeom>
-          <a:solidFill>
-            <a:srgbClr val="EEF2F7"/>
-          </a:solidFill>
-          <a:ln w="12700">
-            <a:solidFill>
-              <a:srgbClr val="EEF2F7"/>
-            </a:solidFill>
-            <a:prstDash val="solid"/>
-          </a:ln>
-        </p:spPr>
-      </p:sp>
-      <p:sp>
-        <p:nvSpPr>
-          <p:cNvPr id="33" name="Text 30"/>
-          <p:cNvSpPr txBox="1"/>
-          <p:nvPr/>
-        </p:nvSpPr>
-        <p:spPr>
-          <a:xfrm>
-            <a:off x="6793992" y="4370832"/>
-            <a:ext cx="4572000" cy="786384"/>
-          </a:xfrm>
-          <a:prstGeom prst="rect">
-            <a:avLst/>
-          </a:prstGeom>
-          <a:noFill/>
-          <a:ln/>
-        </p:spPr>
-        <p:txBody>
-          <a:bodyPr wrap="square" lIns="0" tIns="0" rIns="0" bIns="0" rtlCol="0" anchor="ctr"/>
-          <a:lstStyle/>
-          <a:p>
-            <a:pPr indent="0" marL="0">
-              <a:lnSpc>
-                <a:spcPct val="120000"/>
-              </a:lnSpc>
-              <a:buNone/>
-            </a:pPr>
-            <a:r>
-              <a:rPr lang="en-US" sz="930" b="1" dirty="0">
-                <a:solidFill>
-                  <a:srgbClr val="16305B"/>
-                </a:solidFill>
-                <a:latin typeface="Malgun Gothic" pitchFamily="34" charset="0"/>
-                <a:ea typeface="Malgun Gothic" pitchFamily="34" charset="-122"/>
-                <a:cs typeface="Malgun Gothic" pitchFamily="34" charset="-120"/>
-              </a:rPr>
-              <a:t>해석 조건 갱신</a:t>
-            </a:r>
-            <a:endParaRPr lang="en-US" sz="930" dirty="0"/>
-          </a:p>
-          <a:p>
-            <a:pPr indent="0" marL="0">
-              <a:lnSpc>
-                <a:spcPct val="120000"/>
-              </a:lnSpc>
-              <a:buNone/>
-            </a:pPr>
-            <a:r>
-              <a:rPr lang="en-US" sz="930" dirty="0">
-                <a:solidFill>
-                  <a:srgbClr val="1C2733"/>
-                </a:solidFill>
-                <a:latin typeface="Malgun Gothic" pitchFamily="34" charset="0"/>
-                <a:ea typeface="Malgun Gothic" pitchFamily="34" charset="-122"/>
-                <a:cs typeface="Malgun Gothic" pitchFamily="34" charset="-120"/>
-              </a:rPr>
-              <a:t>발열원 17개(전 슬롯, 680 W) · 출구 역류 차단 · 높이 방향 메시 1.6 mm</a:t>
-            </a:r>
-            <a:endParaRPr lang="en-US" sz="930" dirty="0"/>
-          </a:p>
-          <a:p>
-            <a:pPr indent="0" marL="0">
-              <a:lnSpc>
-                <a:spcPct val="120000"/>
-              </a:lnSpc>
-              <a:buNone/>
-            </a:pPr>
-            <a:r>
-              <a:rPr lang="en-US" sz="930" dirty="0">
-                <a:solidFill>
-                  <a:srgbClr val="1C2733"/>
-                </a:solidFill>
-                <a:latin typeface="Malgun Gothic" pitchFamily="34" charset="0"/>
-                <a:ea typeface="Malgun Gothic" pitchFamily="34" charset="-122"/>
-                <a:cs typeface="Malgun Gothic" pitchFamily="34" charset="-120"/>
-              </a:rPr>
-              <a:t>→ 1개월차 수치와 직접 비교하지 않음</a:t>
-            </a:r>
-            <a:endParaRPr lang="en-US" sz="930" dirty="0"/>
-          </a:p>
-        </p:txBody>
-      </p:sp>
-      <p:sp>
-        <p:nvSpPr>
-          <p:cNvPr id="34" name="Shape 31"/>
           <p:cNvSpPr/>
           <p:nvPr/>
         </p:nvSpPr>
@@ -19730,7 +20171,7 @@
       </p:sp>
       <p:sp>
         <p:nvSpPr>
-          <p:cNvPr id="35" name="Shape 32"/>
+          <p:cNvPr id="33" name="Shape 30"/>
           <p:cNvSpPr/>
           <p:nvPr/>
         </p:nvSpPr>
@@ -19755,7 +20196,7 @@
       </p:sp>
       <p:sp>
         <p:nvSpPr>
-          <p:cNvPr id="36" name="Text 33"/>
+          <p:cNvPr id="34" name="Text 31"/>
           <p:cNvSpPr txBox="1"/>
           <p:nvPr/>
         </p:nvSpPr>
@@ -19786,7 +20227,7 @@
                 <a:ea typeface="Malgun Gothic" pitchFamily="34" charset="-122"/>
                 <a:cs typeface="Malgun Gothic" pitchFamily="34" charset="-120"/>
               </a:rPr>
-              <a:t>통과별 핀 분리</a:t>
+              <a:t>후보 11개</a:t>
             </a:r>
             <a:endParaRPr lang="en-US" sz="1050" dirty="0"/>
           </a:p>
@@ -19794,7 +20235,7 @@
       </p:sp>
       <p:sp>
         <p:nvSpPr>
-          <p:cNvPr id="37" name="Text 34"/>
+          <p:cNvPr id="35" name="Text 32"/>
           <p:cNvSpPr txBox="1"/>
           <p:nvPr/>
         </p:nvSpPr>
@@ -19825,7 +20266,7 @@
                 <a:ea typeface="Malgun Gothic" pitchFamily="34" charset="-122"/>
                 <a:cs typeface="Malgun Gothic" pitchFamily="34" charset="-120"/>
               </a:rPr>
-              <a:t>1·2차 통과 유량 차이를 반영 — 후보 9 → 11개</a:t>
+              <a:t>유로 형상 7 + 통과별 핀 두께 · 개수 4</a:t>
             </a:r>
             <a:endParaRPr lang="en-US" sz="950" dirty="0"/>
           </a:p>
@@ -19833,7 +20274,7 @@
       </p:sp>
       <p:sp>
         <p:nvSpPr>
-          <p:cNvPr id="38" name="Shape 35"/>
+          <p:cNvPr id="36" name="Shape 33"/>
           <p:cNvSpPr/>
           <p:nvPr/>
         </p:nvSpPr>
@@ -19858,7 +20299,7 @@
       </p:sp>
       <p:sp>
         <p:nvSpPr>
-          <p:cNvPr id="39" name="Text 36"/>
+          <p:cNvPr id="37" name="Text 34"/>
           <p:cNvSpPr txBox="1"/>
           <p:nvPr/>
         </p:nvSpPr>
@@ -19889,7 +20330,7 @@
                 <a:ea typeface="Malgun Gothic" pitchFamily="34" charset="-122"/>
                 <a:cs typeface="Malgun Gothic" pitchFamily="34" charset="-120"/>
               </a:rPr>
-              <a:t>설계공간 재조정</a:t>
+              <a:t>핀 통과별 독립</a:t>
             </a:r>
             <a:endParaRPr lang="en-US" sz="1050" dirty="0"/>
           </a:p>
@@ -19897,7 +20338,7 @@
       </p:sp>
       <p:sp>
         <p:nvSpPr>
-          <p:cNvPr id="40" name="Text 37"/>
+          <p:cNvPr id="38" name="Text 35"/>
           <p:cNvSpPr txBox="1"/>
           <p:nvPr/>
         </p:nvSpPr>
@@ -19928,7 +20369,7 @@
                 <a:ea typeface="Malgun Gothic" pitchFamily="34" charset="-122"/>
                 <a:cs typeface="Malgun Gothic" pitchFamily="34" charset="-120"/>
               </a:rPr>
-              <a:t>1개월차 데이터 근거로 범위 축소 · 확장</a:t>
+              <a:t>1·2차 통과 유량 차이를 설계에 반영</a:t>
             </a:r>
             <a:endParaRPr lang="en-US" sz="950" dirty="0"/>
           </a:p>
@@ -19936,7 +20377,7 @@
       </p:sp>
       <p:sp>
         <p:nvSpPr>
-          <p:cNvPr id="41" name="Shape 38"/>
+          <p:cNvPr id="39" name="Shape 36"/>
           <p:cNvSpPr/>
           <p:nvPr/>
         </p:nvSpPr>
@@ -19961,7 +20402,7 @@
       </p:sp>
       <p:sp>
         <p:nvSpPr>
-          <p:cNvPr id="42" name="Text 39"/>
+          <p:cNvPr id="40" name="Text 37"/>
           <p:cNvSpPr txBox="1"/>
           <p:nvPr/>
         </p:nvSpPr>
@@ -19992,7 +20433,7 @@
                 <a:ea typeface="Malgun Gothic" pitchFamily="34" charset="-122"/>
                 <a:cs typeface="Malgun Gothic" pitchFamily="34" charset="-120"/>
               </a:rPr>
-              <a:t>해석 조건 갱신</a:t>
+              <a:t>11차원 설계공간</a:t>
             </a:r>
             <a:endParaRPr lang="en-US" sz="1050" dirty="0"/>
           </a:p>
@@ -20000,7 +20441,7 @@
       </p:sp>
       <p:sp>
         <p:nvSpPr>
-          <p:cNvPr id="43" name="Text 40"/>
+          <p:cNvPr id="41" name="Text 38"/>
           <p:cNvSpPr txBox="1"/>
           <p:nvPr/>
         </p:nvSpPr>
@@ -20031,7 +20472,7 @@
                 <a:ea typeface="Malgun Gothic" pitchFamily="34" charset="-122"/>
                 <a:cs typeface="Malgun Gothic" pitchFamily="34" charset="-120"/>
               </a:rPr>
-              <a:t>실제 발열 배치와 출구 조건 반영</a:t>
+              <a:t>바로 대리모델을 만들기엔 차원이 큼 → 선별 필요</a:t>
             </a:r>
             <a:endParaRPr lang="en-US" sz="950" dirty="0"/>
           </a:p>
@@ -44538,7 +44979,7 @@
                 <a:ea typeface="Malgun Gothic" pitchFamily="34" charset="-122"/>
                 <a:cs typeface="Malgun Gothic" pitchFamily="34" charset="-120"/>
               </a:rPr>
-              <a:t>코드 구성 갱신</a:t>
+              <a:t>코드 구성</a:t>
             </a:r>
             <a:endParaRPr lang="en-US" sz="2200" dirty="0"/>
           </a:p>
@@ -47449,7 +47890,7 @@
                 <a:ea typeface="Malgun Gothic" pitchFamily="34" charset="-122"/>
                 <a:cs typeface="Malgun Gothic" pitchFamily="34" charset="-120"/>
               </a:rPr>
-              <a:t>기존 모듈 재사용</a:t>
+              <a:t>자동해석 모듈 그대로 활용</a:t>
             </a:r>
             <a:endParaRPr lang="en-US" sz="1050" dirty="0"/>
           </a:p>
@@ -47488,7 +47929,7 @@
                 <a:ea typeface="Malgun Gothic" pitchFamily="34" charset="-122"/>
                 <a:cs typeface="Malgun Gothic" pitchFamily="34" charset="-120"/>
               </a:rPr>
-              <a:t>형상 · 해석 · 결과 모듈은 변수 수만 확장</a:t>
+              <a:t>형상 · 해석 · 결과 모듈 위에 선별 · 학습 단계 추가</a:t>
             </a:r>
             <a:endParaRPr lang="en-US" sz="950" dirty="0"/>
           </a:p>

--- a/2개월차_변수선별_및_대리모델구축.pptx
+++ b/2개월차_변수선별_및_대리모델구축.pptx
@@ -2787,7 +2787,7 @@
                     </a:solidFill>
                     <a:latin typeface="Arial"/>
                   </a:rPr>
-                  <a:t>실제 해석</a:t>
+                  <a:t>실측</a:t>
                 </a:r>
               </a:p>
             </c:rich>
@@ -4074,7 +4074,7 @@
                     </a:solidFill>
                     <a:latin typeface="Arial"/>
                   </a:rPr>
-                  <a:t>실제 해석</a:t>
+                  <a:t>실측</a:t>
                 </a:r>
               </a:p>
             </c:rich>
@@ -5361,7 +5361,7 @@
                     </a:solidFill>
                     <a:latin typeface="Arial"/>
                   </a:rPr>
-                  <a:t>실제 해석</a:t>
+                  <a:t>실측</a:t>
                 </a:r>
               </a:p>
             </c:rich>
@@ -6648,7 +6648,7 @@
                     </a:solidFill>
                     <a:latin typeface="Arial"/>
                   </a:rPr>
-                  <a:t>실제 해석</a:t>
+                  <a:t>실측</a:t>
                 </a:r>
               </a:p>
             </c:rich>
@@ -7935,7 +7935,7 @@
                     </a:solidFill>
                     <a:latin typeface="Arial"/>
                   </a:rPr>
-                  <a:t>실제 해석</a:t>
+                  <a:t>실측</a:t>
                 </a:r>
               </a:p>
             </c:rich>
@@ -9222,7 +9222,7 @@
                     </a:solidFill>
                     <a:latin typeface="Arial"/>
                   </a:rPr>
-                  <a:t>실제 해석</a:t>
+                  <a:t>실측</a:t>
                 </a:r>
               </a:p>
             </c:rich>
@@ -10509,7 +10509,7 @@
                     </a:solidFill>
                     <a:latin typeface="Arial"/>
                   </a:rPr>
-                  <a:t>실제 해석</a:t>
+                  <a:t>실측</a:t>
                 </a:r>
               </a:p>
             </c:rich>
@@ -11142,7 +11142,7 @@
           <a:p>
             <a:r>
               <a:rPr lang="en-US" dirty="0"/>
-              <a:t>모델이 처음 보는 설계도 맞히는지 확인했다. 80점 중 8점을 빼고 학습한 모델로 뺀 8점을 예측하는 것을 10번 반복했다. 점이 빨간 대각선에 가까울수록 예측이 실제 해석과 같다는 뜻이다. R²는 1에 가까울수록 정확한데, 7개 지표 모두 0.89 이상이고 2차 균일도가 0.893으로 가장 낮다.</a:t>
+              <a:t>10-fold 교차검증으로 정확도를 확인했다. 80점을 10묶음으로 나눠 한 묶음씩 빼고 학습한 모델로 빠진 묶음을 예측했다. 즉 모델이 처음 보는 설계를 얼마나 맞히는지 본 것이다. 점이 빨간 대각선에 가까울수록 정확하다. 결정계수 R²는 1에 가까울수록 정확한데, 응답 7개 모두 0.89 이상이고 2차 균일도가 0.893으로 가장 낮다.</a:t>
             </a:r>
             <a:endParaRPr lang="en-US" dirty="0"/>
           </a:p>
@@ -11230,7 +11230,7 @@
           <a:p>
             <a:r>
               <a:rPr lang="en-US" dirty="0"/>
-              <a:t>왼쪽은 지표마다 가장 영향이 큰 변수를 DSD 29회 결과와 머신러닝 모델(80점 학습)에서 각각 뽑아 비교한 것이다. 방법도 데이터도 다른데 7개 중 6개가 같았고, 중량은 핀 변수 4개가 비슷하게 영향을 줘서 순위 차이에 의미가 없다. 오른쪽은 머신러닝으로만 볼 수 있는 부분으로, 변수끼리 얽혀서 생기는 효과의 비율이다. 온도나 분기비는 거의 변수 하나씩의 효과로 설명되지만, 1차·2차 균일도는 13~19%가 변수끼리 얽혀서 생긴다. 예를 들어 분기 입구 두께는 2차 균일도에 혼자서는 7% 정도지만, 다른 변수와 얽히면 18%까지 영향을 준다. 그래서 균일도는 변수를 하나씩 조정해서는 최적점을 찾기 어렵고, 모델로 함께 탐색해야 한다.</a:t>
+              <a:t>왼쪽은 응답마다 1순위 변수를 DSD 분산 기여율(29회)과 GPR 기반 Sobol 주효과 지수 S1(80점 학습)에서 각각 뽑아 비교한 것이다. 방법도 데이터도 다른데 7개 중 6개가 같았고, 중량은 핀 변수 4개가 비슷하게 영향을 줘서 순위 차이에 의미가 없다. 오른쪽은 DSD로는 분리할 수 없는 교호작용의 비율로, 1에서 주효과 지수의 합을 뺀 값이다. 온도나 분기비는 거의 주효과로 설명되지만, 1차·2차 균일도는 13~19%가 교호작용이다. 예를 들어 분기 입구 두께는 2차 균일도에 주효과 지수 7% 정도지만, 교호작용까지 포함한 총효과 지수는 18%다. 그래서 균일도는 변수를 하나씩 조정해서는 최적점을 찾기 어렵고, 대리모델 기반으로 함께 탐색해야 한다.</a:t>
             </a:r>
             <a:endParaRPr lang="en-US" dirty="0"/>
           </a:p>
@@ -11318,7 +11318,7 @@
           <a:p>
             <a:r>
               <a:rPr lang="en-US" dirty="0"/>
-              <a:t>가장 정확도가 낮은 지표는 2차 균일도다. 값 자체가 0에 가깝고, 분기 뒤 구간이라 변수끼리 얽혀서 생기는 효과가 7개 지표 중 가장 크다. 80점만으로는 이런 복잡한 변화를 충분히 담지 못했다. 차월에는 모델이 자신 없는 곳, 즉 예측 범위가 넓은 곳을 골라 해석을 추가하는 적응 샘플링으로 이 부분을 보강하고, 그 위에서 여러 지표를 함께 만족하는 최적 설계를 찾는다.</a:t>
+              <a:t>가장 정확도가 낮은 응답은 2차 균일도다. 값 자체가 0에 가깝고, 분기 이후 구간이라 교호작용이 응답 중 가장 크다. 80점만으로는 이 영역을 충분히 덮지 못했다. 차월에는 대리모델의 불확실성이 큰 지점을 골라 해석을 추가하는 적응 샘플링으로 이 부분을 보강하고, 그 위에서 다목적 최적화로 파레토 최적해를 찾는다.</a:t>
             </a:r>
             <a:endParaRPr lang="en-US" dirty="0"/>
           </a:p>
@@ -11494,7 +11494,7 @@
           <a:p>
             <a:r>
               <a:rPr lang="en-US" dirty="0"/>
-              <a:t>2개월차 전체 흐름이다. 후보 변수 11개를 정하고, DSD라는 선별 실험 29회로 영향 있는 변수 8개를 골랐다. 그 8개로 해석 80점을 돌려 머신러닝 모델(GPR)을 학습시켰고, 처음 보는 설계도 잘 맞히는지 검증했다. 두 단계로 나눈 이유는 역할이 다르기 때문이다. DSD는 적은 해석으로 '영향이 있나 없나'를 빠르게 거르는 데 강하지만, 변수끼리 얽혀서 내는 효과(교호작용)는 정확히 나누지 못한다. 그 부분은 머신러닝 모델이 맡는다.</a:t>
+              <a:t>2개월차 전체 흐름이다. 후보 설계변수 11개를 정의하고, 확정적 선별 설계(DSD) 29회로 활성 변수 8개를 선별했다. 활성 변수로 최적라틴방격법(OLHD) 80점을 해석해 가우시안 프로세스 회귀(GPR) 대리모델을 학습시켰고, 교차검증으로 처음 보는 설계도 잘 맞히는지 확인했다. 2단계로 나눈 이유는 역할이 다르기 때문이다. DSD는 적은 해석으로 주효과(변수 하나만의 효과)를 판정하는 데 강하지만, 교호작용(변수끼리 얽힌 효과)의 크기는 정확히 분리하지 못한다. 그 부분은 GPR이 맡는다.</a:t>
             </a:r>
             <a:endParaRPr lang="en-US" dirty="0"/>
           </a:p>
@@ -11670,7 +11670,7 @@
           <a:p>
             <a:r>
               <a:rPr lang="en-US" dirty="0"/>
-              <a:t>후보 11개를 바로 학습에 넣지 않고, 먼저 DSD라는 선별 실험 29회로 영향 있는 변수를 골랐다. DSD는 여러 변수를 한꺼번에 바꾸면서도 변수마다 효과를 따로 계산할 수 있게 짠 실험표다. 아무 치수와도 연결하지 않은 가짜 변수 3개를 넣어, 효과가 0이어야 할 칸에서 우연히 나오는 크기를 기준선으로 삼았다. 판정 기준은 결과를 보기 전에 정했다. 다만 DSD는 변수끼리 얽혀서 내는 효과까지는 정확히 나누지 못하므로, 그 부분은 다음 단계의 머신러닝 모델로 확인한다.</a:t>
+              <a:t>후보 11개를 바로 대리모델 실험에 넣지 않고, 먼저 확정적 선별 설계(DSD) 29회로 영향 있는 변수를 선별했다. 실험표는 변수 하나만 중간값에 두고 나머지를 상·하한에 두는 행 14개와 그 거울상 14개, 중심점 1개로 구성된다. 거울상 쌍 덕분에 주효과(변수 하나만의 효과)가 교호작용·곡률과 섞이지 않는다. 가짜 인자 3열은 어떤 치수와도 연결하지 않아 효과가 0이어야 하므로 판정의 기준선이 된다. 판정 규칙은 결과를 보기 전에 고정했다. 다만 교호작용의 크기는 DSD로 정확히 분리할 수 없어, 다음 단계의 GPR 대리모델로 확인한다.</a:t>
             </a:r>
             <a:endParaRPr lang="en-US" dirty="0"/>
           </a:p>
@@ -11758,7 +11758,7 @@
           <a:p>
             <a:r>
               <a:rPr lang="en-US" dirty="0"/>
-              <a:t>표의 숫자는 성능 지표가 변한 양 중 그 변수 때문인 비율이다. 11개 중 8개는 남기고, 입구 각도·중간 각도·출구 유로 두께 3개는 어떤 지표에서도 기준을 넘지 못해 고정했다. 눈여겨볼 점은 1차 핀 개수가 1차 균일도를, 2차 핀 개수가 2차 균일도를 각각 좌우한다는 것이다. 핀을 1차·2차로 나눈 판단이 데이터로 뒷받침된다.</a:t>
+              <a:t>표의 숫자는 분산 기여율, 즉 응답 변동 중 그 변수가 설명하는 비율이다. 11개 중 8개가 활성, 입구 각도·중간 각도·출구 유로 두께 3개는 어떤 응답에서도 기준을 넘지 못해 고정했다. 눈여겨볼 점은 1차 핀 개수가 1차 균일도를, 2차 핀 개수가 2차 균일도를 각각 좌우한다는 것이다. 핀을 1차·2차로 나눈 판단이 데이터로 뒷받침된다.</a:t>
             </a:r>
             <a:endParaRPr lang="en-US" dirty="0"/>
           </a:p>
@@ -11846,7 +11846,7 @@
           <a:p>
             <a:r>
               <a:rPr lang="en-US" dirty="0"/>
-              <a:t>남긴 변수 8개로 해석 80점을 돌렸다. 해석점은 OLHD라는 방법으로 배치했는데, 각 변수의 범위를 80칸으로 나눠 칸마다 한 번씩만 쓰게 해서 적은 점으로도 범위를 빈틈없이 채우는 방법이다. 핀 개수가 가장 중요한 변수로 나왔기 때문에 개수를 10~24개 전 범위에 고르게 먼저 두고, 두께는 그 개수에서 만들 수 있는 범위로 맞췄다.</a:t>
+              <a:t>활성 변수 8개로 최적라틴방격법(OLHD) 80점을 해석했다. OLHD는 각 변수의 범위를 80구간으로 나눠 구간마다 한 점씩 쓰고, 점 사이 최소 거리가 최대가 되도록 배치해 적은 점으로도 설계공간을 고르게 채우는 실험계획법이다. 핀 개수가 가장 중요한 변수로 나왔기 때문에 개수를 10~24개 전 범위에 고르게 먼저 두고, 두께는 그 개수에서 만들 수 있는 범위로 맞췄다.</a:t>
             </a:r>
             <a:endParaRPr lang="en-US" dirty="0"/>
           </a:p>
@@ -11934,7 +11934,7 @@
           <a:p>
             <a:r>
               <a:rPr lang="en-US" dirty="0"/>
-              <a:t>GPR은 해석 결과를 학습해서, 해석하지 않은 설계의 성능을 예측하는 머신러닝 모델이다. 다른 모델과 달리 예측값과 함께 '얼마나 믿을 수 있는지'를 범위로 알려준다. 해석한 점 근처는 범위가 좁고, 해석점 사이가 먼 곳은 넓어진다. 이 범위가 넓은 곳은 정보가 부족한 곳이라, 차월에 어디를 추가로 해석할지 정하는 데 쓴다.</a:t>
+              <a:t>가우시안 프로세스 회귀(GPR)는 해석 결과를 학습해 해석하지 않은 설계의 성능을 예측하는 대리모델이다. 다른 회귀 모델과 달리 예측값과 함께 불확실성(신뢰구간)을 준다. 실험점이 촘촘한 곳은 불확실성이 작고, 실험점 사이가 먼 곳은 커진다. 불확실성이 큰 곳은 정보가 부족한 곳이라, 차월 적응 샘플링에서 어디를 추가로 해석할지 정하는 데 쓴다.</a:t>
             </a:r>
             <a:endParaRPr lang="en-US" dirty="0"/>
           </a:p>
@@ -12022,7 +12022,7 @@
           <a:p>
             <a:r>
               <a:rPr lang="en-US" dirty="0"/>
-              <a:t>자동해석 구조에 선별 실험표를 만드는 단계(DSD.py)와, 선별 판정·예측 모델 학습 단계(DSD_analysis.py, ML.py)를 추가했다. 형상 만들기, 해석, 결과 저장 모듈은 그대로 쓴다. 선별이 끝나면 프로그램이 멈추고, 사람이 판정 결과를 확인한 뒤 학습 단계로 넘어간다.</a:t>
+              <a:t>자동해석 구조에 선별 실험표 생성(DSD.py)과 선별 판정·대리모델 학습(DSD_analysis.py, ML.py)을 추가했다. 형상 빌드, 해석, 결과 저장 모듈은 그대로 활용한다. 선별이 끝나면 프로그램이 멈추고 판정 결과를 사람이 확인한 뒤 2단계로 넘어간다.</a:t>
             </a:r>
             <a:endParaRPr lang="en-US" dirty="0"/>
           </a:p>
@@ -12905,7 +12905,7 @@
                 <a:ea typeface="Malgun Gothic" pitchFamily="34" charset="-122"/>
                 <a:cs typeface="Malgun Gothic" pitchFamily="34" charset="-120"/>
               </a:rPr>
-              <a:t>예측 정확도 검증  —  처음 보는 설계도 맞히나</a:t>
+              <a:t>예측값 · 실측값 비교  —  10-fold 교차검증</a:t>
             </a:r>
             <a:endParaRPr lang="en-US" sz="2200" dirty="0"/>
           </a:p>
@@ -13965,7 +13965,7 @@
                 <a:ea typeface="Malgun Gothic" pitchFamily="34" charset="-122"/>
                 <a:cs typeface="Malgun Gothic" pitchFamily="34" charset="-120"/>
               </a:rPr>
-              <a:t>예측 정확도  R²</a:t>
+              <a:t>교차검증 R²  (결정계수)</a:t>
             </a:r>
             <a:endParaRPr lang="en-US" sz="1000" dirty="0"/>
           </a:p>
@@ -14049,7 +14049,7 @@
                 <a:ea typeface="Malgun Gothic" pitchFamily="34" charset="-122"/>
                 <a:cs typeface="Malgun Gothic" pitchFamily="34" charset="-120"/>
               </a:rPr>
-              <a:t>1에 가까울수록 정확 — 0.9면 성능 변화의 90%를 맞힘</a:t>
+              <a:t>1에 가까울수록 정확 — 0.9 = 응답 변동의 90%를 설명</a:t>
             </a:r>
             <a:endParaRPr lang="en-US" sz="900" dirty="0"/>
           </a:p>
@@ -14072,7 +14072,7 @@
                 <a:ea typeface="Malgun Gothic" pitchFamily="34" charset="-122"/>
                 <a:cs typeface="Malgun Gothic" pitchFamily="34" charset="-120"/>
               </a:rPr>
-              <a:t>검증 방법: 80점 중 8점을 빼고 학습 → 뺀 8점을 예측, 10번 반복</a:t>
+              <a:t>10-fold: 80점을 10묶음으로 나눠 한 묶음씩 빼고 학습 → 뺀 묶음을 예측</a:t>
             </a:r>
             <a:endParaRPr lang="en-US" sz="900" dirty="0"/>
           </a:p>
@@ -14134,7 +14134,7 @@
                 <a:ea typeface="Malgun Gothic" pitchFamily="34" charset="-122"/>
                 <a:cs typeface="Malgun Gothic" pitchFamily="34" charset="-120"/>
               </a:rPr>
-              <a:t>점 = 설계 1개  ·  빨간 선 = 예측이 실제 해석과 정확히 같은 경우 (선 위에 있을수록 정확)</a:t>
+              <a:t>점 = 설계 1개  ·  빨간 선 = 예측값 = 실측값 (선에 가까울수록 정확)</a:t>
             </a:r>
             <a:endParaRPr lang="en-US" sz="850" dirty="0"/>
           </a:p>
@@ -14308,7 +14308,7 @@
                 <a:ea typeface="Malgun Gothic" pitchFamily="34" charset="-122"/>
                 <a:cs typeface="Malgun Gothic" pitchFamily="34" charset="-120"/>
               </a:rPr>
-              <a:t>변수 영향도 및 교호작용  —  무엇이 성능을 좌우하나</a:t>
+              <a:t>변수별 민감도 및 교호작용  —  Sobol 지수</a:t>
             </a:r>
             <a:endParaRPr lang="en-US" sz="2200" dirty="0"/>
           </a:p>
@@ -14406,7 +14406,7 @@
                 <a:ea typeface="Malgun Gothic" pitchFamily="34" charset="-122"/>
                 <a:cs typeface="Malgun Gothic" pitchFamily="34" charset="-120"/>
               </a:rPr>
-              <a:t>지표별 영향 1순위  —  DSD vs 머신러닝</a:t>
+              <a:t>응답별 1순위 변수  —  DSD vs GPR</a:t>
             </a:r>
             <a:endParaRPr lang="en-US" sz="1300" dirty="0"/>
           </a:p>
@@ -14435,10 +14435,10 @@
             <a:tbl>
               <a:tblPr/>
               <a:tblGrid>
-                <a:gridCol w="1097280"/>
+                <a:gridCol w="960120"/>
                 <a:gridCol w="1508760"/>
-                <a:gridCol w="1508760"/>
-                <a:gridCol w="731520"/>
+                <a:gridCol w="1737360"/>
+                <a:gridCol w="640080"/>
               </a:tblGrid>
               <a:tr h="329184">
                 <a:tc>
@@ -14458,7 +14458,7 @@
                           <a:ea typeface="Malgun Gothic" pitchFamily="34" charset="-122"/>
                           <a:cs typeface="Malgun Gothic" pitchFamily="34" charset="-120"/>
                         </a:rPr>
-                        <a:t>지표</a:t>
+                        <a:t>응답</a:t>
                       </a:r>
                       <a:endParaRPr lang="en-US" sz="950" dirty="0">
                         <a:latin typeface="Malgun Gothic" charset="0"/>
@@ -14508,7 +14508,7 @@
                           <a:ea typeface="Malgun Gothic" pitchFamily="34" charset="-122"/>
                           <a:cs typeface="Malgun Gothic" pitchFamily="34" charset="-120"/>
                         </a:rPr>
-                        <a:t>DSD (29회)</a:t>
+                        <a:t>DSD 기여율 (29회)</a:t>
                       </a:r>
                       <a:endParaRPr lang="en-US" sz="950" dirty="0">
                         <a:latin typeface="Malgun Gothic" charset="0"/>
@@ -14558,7 +14558,7 @@
                           <a:ea typeface="Malgun Gothic" pitchFamily="34" charset="-122"/>
                           <a:cs typeface="Malgun Gothic" pitchFamily="34" charset="-120"/>
                         </a:rPr>
-                        <a:t>머신러닝 (80점)</a:t>
+                        <a:t>GPR Sobol S1 (80점)</a:t>
                       </a:r>
                       <a:endParaRPr lang="en-US" sz="950" dirty="0">
                         <a:latin typeface="Malgun Gothic" charset="0"/>
@@ -16062,7 +16062,7 @@
                 <a:ea typeface="Malgun Gothic" pitchFamily="34" charset="-122"/>
                 <a:cs typeface="Malgun Gothic" pitchFamily="34" charset="-120"/>
               </a:rPr>
-              <a:t>   지표에서 1순위 일치 — 방법이 달라도 같은 결론</a:t>
+              <a:t>   응답에서 1순위 일치 — 서로 다른 방법 · 데이터로 같은 결론</a:t>
             </a:r>
             <a:endParaRPr lang="en-US" sz="1800" dirty="0"/>
           </a:p>
@@ -16160,7 +16160,7 @@
                 <a:ea typeface="Malgun Gothic" pitchFamily="34" charset="-122"/>
                 <a:cs typeface="Malgun Gothic" pitchFamily="34" charset="-120"/>
               </a:rPr>
-              <a:t>변수끼리 얽힌 효과 (교호작용) 비율</a:t>
+              <a:t>교호작용 비율  —  1 − ΣS1</a:t>
             </a:r>
             <a:endParaRPr lang="en-US" sz="1300" dirty="0"/>
           </a:p>
@@ -16202,7 +16202,7 @@
                 <a:ea typeface="Malgun Gothic" pitchFamily="34" charset="-122"/>
                 <a:cs typeface="Malgun Gothic" pitchFamily="34" charset="-120"/>
               </a:rPr>
-              <a:t>성능 변화 중 변수끼리 함께 바뀔 때 생기는 부분 — 머신러닝으로 계산</a:t>
+              <a:t>응답 변동 중 주효과(S1)로 설명되지 않는 부분 = 변수끼리 얽힌 효과</a:t>
             </a:r>
             <a:endParaRPr lang="en-US" sz="860" dirty="0"/>
           </a:p>
@@ -17167,7 +17167,7 @@
                 <a:ea typeface="Malgun Gothic" pitchFamily="34" charset="-122"/>
                 <a:cs typeface="Malgun Gothic" pitchFamily="34" charset="-120"/>
               </a:rPr>
-              <a:t>예) 2차 균일도 — 분기 입구 두께는 혼자서 7%, 다른 변수와 얽혀서 총 18%</a:t>
+              <a:t>예) 2차 균일도 — 분기 입구 두께: 주효과 지수 S1 7% → 총효과 지수 ST 18%</a:t>
             </a:r>
             <a:endParaRPr lang="en-US" sz="920" dirty="0"/>
           </a:p>
@@ -17187,7 +17187,7 @@
                 <a:ea typeface="Malgun Gothic" pitchFamily="34" charset="-122"/>
                 <a:cs typeface="Malgun Gothic" pitchFamily="34" charset="-120"/>
               </a:rPr>
-              <a:t>균일도는 변수를 하나씩 바꿔서는 최적점을 찾기 어려움 → 모델로 함께 탐색</a:t>
+              <a:t>균일도는 변수별 개별 조정으로 최적점 탐색 곤란 → 대리모델 기반 최적화</a:t>
             </a:r>
             <a:endParaRPr lang="en-US" sz="920" dirty="0"/>
           </a:p>
@@ -17324,7 +17324,7 @@
                 <a:ea typeface="Malgun Gothic" pitchFamily="34" charset="-122"/>
                 <a:cs typeface="Malgun Gothic" pitchFamily="34" charset="-120"/>
               </a:rPr>
-              <a:t>1 · 2차 핀 개수가 지표 5개에서 영향 1순위</a:t>
+              <a:t>1 · 2차 핀 개수가 응답 5개에서 1순위</a:t>
             </a:r>
             <a:endParaRPr lang="en-US" sz="950" dirty="0"/>
           </a:p>
@@ -17388,7 +17388,7 @@
                 <a:ea typeface="Malgun Gothic" pitchFamily="34" charset="-122"/>
                 <a:cs typeface="Malgun Gothic" pitchFamily="34" charset="-120"/>
               </a:rPr>
-              <a:t>DSD와 머신러닝 결론 일치</a:t>
+              <a:t>DSD와 GPR 결론 일치</a:t>
             </a:r>
             <a:endParaRPr lang="en-US" sz="1050" dirty="0"/>
           </a:p>
@@ -17491,7 +17491,7 @@
                 <a:ea typeface="Malgun Gothic" pitchFamily="34" charset="-122"/>
                 <a:cs typeface="Malgun Gothic" pitchFamily="34" charset="-120"/>
               </a:rPr>
-              <a:t>균일도는 변수끼리 얽힘</a:t>
+              <a:t>균일도는 교호작용이 큼</a:t>
             </a:r>
             <a:endParaRPr lang="en-US" sz="1050" dirty="0"/>
           </a:p>
@@ -17530,7 +17530,7 @@
                 <a:ea typeface="Malgun Gothic" pitchFamily="34" charset="-122"/>
                 <a:cs typeface="Malgun Gothic" pitchFamily="34" charset="-120"/>
               </a:rPr>
-              <a:t>교호작용 13 ~ 19% → DSD로는 못 보는 부분을 모델로 확인</a:t>
+              <a:t>13 ~ 19% → DSD로는 분리 못 하는 부분을 GPR로 확인</a:t>
             </a:r>
             <a:endParaRPr lang="en-US" sz="950" dirty="0"/>
           </a:p>
@@ -17802,7 +17802,7 @@
                 <a:ea typeface="Malgun Gothic" pitchFamily="34" charset="-122"/>
                 <a:cs typeface="Malgun Gothic" pitchFamily="34" charset="-120"/>
               </a:rPr>
-              <a:t>정확도가 가장 낮은 지표  —  2차 균일도</a:t>
+              <a:t>정확도가 가장 낮은 응답  —  2차 균일도</a:t>
             </a:r>
             <a:endParaRPr lang="en-US" sz="1300" dirty="0"/>
           </a:p>
@@ -17927,7 +17927,7 @@
                 <a:ea typeface="Malgun Gothic" pitchFamily="34" charset="-122"/>
                 <a:cs typeface="Malgun Gothic" pitchFamily="34" charset="-120"/>
               </a:rPr>
-              <a:t>2차 통과 유로마다 유량이 고른 정도</a:t>
+              <a:t>2차 통과 유로 유량의 표준편차</a:t>
             </a:r>
             <a:endParaRPr lang="en-US" sz="1000" dirty="0"/>
           </a:p>
@@ -17947,7 +17947,7 @@
                 <a:ea typeface="Malgun Gothic" pitchFamily="34" charset="-122"/>
                 <a:cs typeface="Malgun Gothic" pitchFamily="34" charset="-120"/>
               </a:rPr>
-              <a:t>7개 지표 중 예측 정확도가 가장 낮음</a:t>
+              <a:t>응답 7개 중 예측 정확도가 가장 낮음</a:t>
             </a:r>
             <a:endParaRPr lang="en-US" sz="1000" dirty="0"/>
           </a:p>
@@ -18056,7 +18056,7 @@
                 <a:ea typeface="Malgun Gothic" pitchFamily="34" charset="-122"/>
                 <a:cs typeface="Malgun Gothic" pitchFamily="34" charset="-120"/>
               </a:rPr>
-              <a:t>분기 뒤 구간이라 여러 변수가 얽혀 작용 — 교호작용 19%로 7개 지표 중 최대</a:t>
+              <a:t>분기 이후 구간이라 여러 변수가 함께 작용 — 교호작용 19%로 응답 중 최대</a:t>
             </a:r>
             <a:endParaRPr lang="en-US" sz="950" dirty="0"/>
           </a:p>
@@ -18080,7 +18080,7 @@
                 <a:ea typeface="Malgun Gothic" pitchFamily="34" charset="-122"/>
                 <a:cs typeface="Malgun Gothic" pitchFamily="34" charset="-120"/>
               </a:rPr>
-              <a:t>80점만으로는 이런 복잡한 변화를 다 담기에 부족</a:t>
+              <a:t>80점만으로는 이 영역의 변화를 충분히 덮지 못함</a:t>
             </a:r>
             <a:endParaRPr lang="en-US" sz="950" dirty="0"/>
           </a:p>
@@ -18320,7 +18320,7 @@
                 <a:ea typeface="Malgun Gothic" pitchFamily="34" charset="-122"/>
                 <a:cs typeface="Malgun Gothic" pitchFamily="34" charset="-120"/>
               </a:rPr>
-              <a:t>모델이 자신 없는 곳(예측 범위가 넓은 곳)을 골라 해석을 추가</a:t>
+              <a:t>불확실성이 큰 지점을 골라 해석을 추가해 정확도 보강</a:t>
             </a:r>
             <a:endParaRPr lang="en-US" sz="950" dirty="0"/>
           </a:p>
@@ -18462,7 +18462,7 @@
                 <a:ea typeface="Malgun Gothic" pitchFamily="34" charset="-122"/>
                 <a:cs typeface="Malgun Gothic" pitchFamily="34" charset="-120"/>
               </a:rPr>
-              <a:t>예측 모델 위에서 여러 지표를 함께 만족하는 최적 설계 탐색</a:t>
+              <a:t>대리모델 위에서 파레토 최적해 탐색</a:t>
             </a:r>
             <a:endParaRPr lang="en-US" sz="950" dirty="0"/>
           </a:p>
@@ -18748,7 +18748,7 @@
                 <a:ea typeface="Malgun Gothic" pitchFamily="34" charset="-122"/>
                 <a:cs typeface="Malgun Gothic" pitchFamily="34" charset="-120"/>
               </a:rPr>
-              <a:t>영향 있는 변수 골라내기 (DSD 29회)</a:t>
+              <a:t>변수 선별 (DSD 29회)</a:t>
             </a:r>
             <a:endParaRPr lang="en-US" sz="1000" dirty="0"/>
           </a:p>
@@ -18826,7 +18826,7 @@
                 <a:ea typeface="Malgun Gothic" pitchFamily="34" charset="-122"/>
                 <a:cs typeface="Malgun Gothic" pitchFamily="34" charset="-120"/>
               </a:rPr>
-              <a:t>학습용 해석 (OLHD)</a:t>
+              <a:t>활성 변수 실험계획 (OLHD)</a:t>
             </a:r>
             <a:endParaRPr lang="en-US" sz="1000" dirty="0"/>
           </a:p>
@@ -18904,7 +18904,7 @@
                 <a:ea typeface="Malgun Gothic" pitchFamily="34" charset="-122"/>
                 <a:cs typeface="Malgun Gothic" pitchFamily="34" charset="-120"/>
               </a:rPr>
-              <a:t>예측 모델 정확도 R²</a:t>
+              <a:t>대리모델 교차검증 R²</a:t>
             </a:r>
             <a:endParaRPr lang="en-US" sz="1000" dirty="0"/>
           </a:p>
@@ -19157,7 +19157,7 @@
                 <a:ea typeface="Malgun Gothic" pitchFamily="34" charset="-122"/>
                 <a:cs typeface="Malgun Gothic" pitchFamily="34" charset="-120"/>
               </a:rPr>
-              <a:t>1.  후보 설계변수 정하기</a:t>
+              <a:t>1.  후보 설계변수 정의</a:t>
             </a:r>
             <a:endParaRPr lang="en-US" sz="1100" dirty="0"/>
           </a:p>
@@ -19177,7 +19177,7 @@
                 <a:ea typeface="Malgun Gothic" pitchFamily="34" charset="-122"/>
                 <a:cs typeface="Malgun Gothic" pitchFamily="34" charset="-120"/>
               </a:rPr>
-              <a:t>2.  영향 있는 변수 골라내기 (DSD)</a:t>
+              <a:t>2.  선별 실험(DSD) 설계</a:t>
             </a:r>
             <a:endParaRPr lang="en-US" sz="1100" dirty="0"/>
           </a:p>
@@ -19197,7 +19197,7 @@
                 <a:ea typeface="Malgun Gothic" pitchFamily="34" charset="-122"/>
                 <a:cs typeface="Malgun Gothic" pitchFamily="34" charset="-120"/>
               </a:rPr>
-              <a:t>3.  선별 결과  —  11개 중 8개</a:t>
+              <a:t>3.  선별 결과 및 활성 변수 확정</a:t>
             </a:r>
             <a:endParaRPr lang="en-US" sz="1100" dirty="0"/>
           </a:p>
@@ -19379,7 +19379,7 @@
                 <a:ea typeface="Malgun Gothic" pitchFamily="34" charset="-122"/>
                 <a:cs typeface="Malgun Gothic" pitchFamily="34" charset="-120"/>
               </a:rPr>
-              <a:t>1.  학습용 해석점 배치 (OLHD)</a:t>
+              <a:t>1.  활성 변수 실험계획(OLHD)</a:t>
             </a:r>
             <a:endParaRPr lang="en-US" sz="1100" dirty="0"/>
           </a:p>
@@ -19399,7 +19399,7 @@
                 <a:ea typeface="Malgun Gothic" pitchFamily="34" charset="-122"/>
                 <a:cs typeface="Malgun Gothic" pitchFamily="34" charset="-120"/>
               </a:rPr>
-              <a:t>2.  예측 모델 (GPR)</a:t>
+              <a:t>2.  가우시안 프로세스 회귀(GPR)</a:t>
             </a:r>
             <a:endParaRPr lang="en-US" sz="1100" dirty="0"/>
           </a:p>
@@ -19601,7 +19601,7 @@
                 <a:ea typeface="Malgun Gothic" pitchFamily="34" charset="-122"/>
                 <a:cs typeface="Malgun Gothic" pitchFamily="34" charset="-120"/>
               </a:rPr>
-              <a:t>1.  예측 정확도 검증</a:t>
+              <a:t>1.  예측값 · 실측값 비교 (교차검증)</a:t>
             </a:r>
             <a:endParaRPr lang="en-US" sz="1100" dirty="0"/>
           </a:p>
@@ -19621,7 +19621,7 @@
                 <a:ea typeface="Malgun Gothic" pitchFamily="34" charset="-122"/>
                 <a:cs typeface="Malgun Gothic" pitchFamily="34" charset="-120"/>
               </a:rPr>
-              <a:t>2.  변수 영향도 및 교호작용</a:t>
+              <a:t>2.  변수별 민감도(Sobol) 및 교호작용</a:t>
             </a:r>
             <a:endParaRPr lang="en-US" sz="1100" dirty="0"/>
           </a:p>
@@ -19815,7 +19815,7 @@
                 <a:ea typeface="Malgun Gothic" pitchFamily="34" charset="-122"/>
                 <a:cs typeface="Malgun Gothic" pitchFamily="34" charset="-120"/>
               </a:rPr>
-              <a:t>후보 변수 11개에서 성능 예측 모델까지</a:t>
+              <a:t>후보 설계변수 11개에서 대리모델까지</a:t>
             </a:r>
             <a:endParaRPr lang="en-US" sz="2200" dirty="0"/>
           </a:p>
@@ -19952,7 +19952,7 @@
                 <a:ea typeface="Malgun Gothic" pitchFamily="34" charset="-122"/>
                 <a:cs typeface="Malgun Gothic" pitchFamily="34" charset="-120"/>
               </a:rPr>
-              <a:t>후보 변수 정하기</a:t>
+              <a:t>후보 설계변수 정의</a:t>
             </a:r>
             <a:endParaRPr lang="en-US" sz="1000" dirty="0"/>
           </a:p>
@@ -20021,7 +20021,7 @@
                 <a:ea typeface="Malgun Gothic" pitchFamily="34" charset="-122"/>
                 <a:cs typeface="Malgun Gothic" pitchFamily="34" charset="-120"/>
               </a:rPr>
-              <a:t>설계 검토</a:t>
+              <a:t>설계공간 정의</a:t>
             </a:r>
             <a:endParaRPr lang="en-US" sz="850" dirty="0"/>
           </a:p>
@@ -20103,7 +20103,7 @@
                 <a:ea typeface="Malgun Gothic" pitchFamily="34" charset="-122"/>
                 <a:cs typeface="Malgun Gothic" pitchFamily="34" charset="-120"/>
               </a:rPr>
-              <a:t>(1차 · 2차 통과 따로)</a:t>
+              <a:t>(1차 · 2차 통과별 독립)</a:t>
             </a:r>
             <a:endParaRPr lang="en-US" sz="900" dirty="0"/>
           </a:p>
@@ -20341,7 +20341,7 @@
                 <a:ea typeface="Malgun Gothic" pitchFamily="34" charset="-122"/>
                 <a:cs typeface="Malgun Gothic" pitchFamily="34" charset="-120"/>
               </a:rPr>
-              <a:t>영향 있는 변수 고르기</a:t>
+              <a:t>변수 선별</a:t>
             </a:r>
             <a:endParaRPr lang="en-US" sz="1000" dirty="0"/>
           </a:p>
@@ -20410,7 +20410,7 @@
                 <a:ea typeface="Malgun Gothic" pitchFamily="34" charset="-122"/>
                 <a:cs typeface="Malgun Gothic" pitchFamily="34" charset="-120"/>
               </a:rPr>
-              <a:t>DSD  (선별 실험)</a:t>
+              <a:t>DSD  (확정적 선별 설계)</a:t>
             </a:r>
             <a:endParaRPr lang="en-US" sz="850" dirty="0"/>
           </a:p>
@@ -20472,7 +20472,7 @@
                 <a:ea typeface="Malgun Gothic" pitchFamily="34" charset="-122"/>
                 <a:cs typeface="Malgun Gothic" pitchFamily="34" charset="-120"/>
               </a:rPr>
-              <a:t>'영향이 있나 없나'만</a:t>
+              <a:t>영향 있는 변수만</a:t>
             </a:r>
             <a:endParaRPr lang="en-US" sz="900" dirty="0"/>
           </a:p>
@@ -20554,7 +20554,7 @@
                 <a:ea typeface="Malgun Gothic" pitchFamily="34" charset="-122"/>
                 <a:cs typeface="Malgun Gothic" pitchFamily="34" charset="-120"/>
               </a:rPr>
-              <a:t>29회 → 8개</a:t>
+              <a:t>29회 → 활성 8개</a:t>
             </a:r>
             <a:endParaRPr lang="en-US" sz="1400" dirty="0"/>
           </a:p>
@@ -20730,7 +20730,7 @@
                 <a:ea typeface="Malgun Gothic" pitchFamily="34" charset="-122"/>
                 <a:cs typeface="Malgun Gothic" pitchFamily="34" charset="-120"/>
               </a:rPr>
-              <a:t>학습용 해석</a:t>
+              <a:t>활성 변수 실험계획</a:t>
             </a:r>
             <a:endParaRPr lang="en-US" sz="1000" dirty="0"/>
           </a:p>
@@ -20841,7 +20841,7 @@
                 <a:ea typeface="Malgun Gothic" pitchFamily="34" charset="-122"/>
                 <a:cs typeface="Malgun Gothic" pitchFamily="34" charset="-120"/>
               </a:rPr>
-              <a:t>설계 범위를</a:t>
+              <a:t>설계공간을</a:t>
             </a:r>
             <a:endParaRPr lang="en-US" sz="900" dirty="0"/>
           </a:p>
@@ -20861,7 +20861,7 @@
                 <a:ea typeface="Malgun Gothic" pitchFamily="34" charset="-122"/>
                 <a:cs typeface="Malgun Gothic" pitchFamily="34" charset="-120"/>
               </a:rPr>
-              <a:t>빈틈없이 고르게 채우도록</a:t>
+              <a:t>빈틈없이 고르게</a:t>
             </a:r>
             <a:endParaRPr lang="en-US" sz="900" dirty="0"/>
           </a:p>
@@ -20881,7 +20881,7 @@
                 <a:ea typeface="Malgun Gothic" pitchFamily="34" charset="-122"/>
                 <a:cs typeface="Malgun Gothic" pitchFamily="34" charset="-120"/>
               </a:rPr>
-              <a:t>해석점을 배치</a:t>
+              <a:t>채우도록 실험점 배치</a:t>
             </a:r>
             <a:endParaRPr lang="en-US" sz="900" dirty="0"/>
           </a:p>
@@ -21119,7 +21119,7 @@
                 <a:ea typeface="Malgun Gothic" pitchFamily="34" charset="-122"/>
                 <a:cs typeface="Malgun Gothic" pitchFamily="34" charset="-120"/>
               </a:rPr>
-              <a:t>예측 모델 만들기</a:t>
+              <a:t>대리모델 구축</a:t>
             </a:r>
             <a:endParaRPr lang="en-US" sz="1000" dirty="0"/>
           </a:p>
@@ -21188,7 +21188,7 @@
                 <a:ea typeface="Malgun Gothic" pitchFamily="34" charset="-122"/>
                 <a:cs typeface="Malgun Gothic" pitchFamily="34" charset="-120"/>
               </a:rPr>
-              <a:t>GPR  (머신러닝)</a:t>
+              <a:t>GPR  (가우시안 프로세스 회귀)</a:t>
             </a:r>
             <a:endParaRPr lang="en-US" sz="850" dirty="0"/>
           </a:p>
@@ -21332,7 +21332,7 @@
                 <a:ea typeface="Malgun Gothic" pitchFamily="34" charset="-122"/>
                 <a:cs typeface="Malgun Gothic" pitchFamily="34" charset="-120"/>
               </a:rPr>
-              <a:t>지표별 모델 7개</a:t>
+              <a:t>응답별 모델 7개</a:t>
             </a:r>
             <a:endParaRPr lang="en-US" sz="1400" dirty="0"/>
           </a:p>
@@ -21508,7 +21508,7 @@
                 <a:ea typeface="Malgun Gothic" pitchFamily="34" charset="-122"/>
                 <a:cs typeface="Malgun Gothic" pitchFamily="34" charset="-120"/>
               </a:rPr>
-              <a:t>정확도 · 영향도 확인</a:t>
+              <a:t>정확도 · 민감도 분석</a:t>
             </a:r>
             <a:endParaRPr lang="en-US" sz="1000" dirty="0"/>
           </a:p>
@@ -21577,7 +21577,7 @@
                 <a:ea typeface="Malgun Gothic" pitchFamily="34" charset="-122"/>
                 <a:cs typeface="Malgun Gothic" pitchFamily="34" charset="-120"/>
               </a:rPr>
-              <a:t>교차검증 · 민감도</a:t>
+              <a:t>교차검증 · Sobol 지수</a:t>
             </a:r>
             <a:endParaRPr lang="en-US" sz="850" dirty="0"/>
           </a:p>
@@ -21819,7 +21819,7 @@
                 <a:ea typeface="Malgun Gothic" pitchFamily="34" charset="-122"/>
                 <a:cs typeface="Malgun Gothic" pitchFamily="34" charset="-120"/>
               </a:rPr>
-              <a:t>성능 지표 7개  —  이 자료에서 보는 결과값</a:t>
+              <a:t>응답 7개  —  목적함수 5 + 제약조건 2</a:t>
             </a:r>
             <a:endParaRPr lang="en-US" sz="1300" dirty="0"/>
           </a:p>
@@ -21870,7 +21870,7 @@
                           <a:ea typeface="Malgun Gothic" pitchFamily="34" charset="-122"/>
                           <a:cs typeface="Malgun Gothic" pitchFamily="34" charset="-120"/>
                         </a:rPr>
-                        <a:t>지표</a:t>
+                        <a:t>응답</a:t>
                       </a:r>
                       <a:endParaRPr lang="en-US" sz="900" dirty="0">
                         <a:latin typeface="Malgun Gothic" charset="0"/>
@@ -21920,7 +21920,7 @@
                           <a:ea typeface="Malgun Gothic" pitchFamily="34" charset="-122"/>
                           <a:cs typeface="Malgun Gothic" pitchFamily="34" charset="-120"/>
                         </a:rPr>
-                        <a:t>뜻</a:t>
+                        <a:t>의미</a:t>
                       </a:r>
                       <a:endParaRPr lang="en-US" sz="900" dirty="0">
                         <a:latin typeface="Malgun Gothic" charset="0"/>
@@ -21970,7 +21970,7 @@
                           <a:ea typeface="Malgun Gothic" pitchFamily="34" charset="-122"/>
                           <a:cs typeface="Malgun Gothic" pitchFamily="34" charset="-120"/>
                         </a:rPr>
-                        <a:t>좋은 방향</a:t>
+                        <a:t>구분</a:t>
                       </a:r>
                       <a:endParaRPr lang="en-US" sz="900" dirty="0">
                         <a:latin typeface="Malgun Gothic" charset="0"/>
@@ -22069,7 +22069,7 @@
                           <a:ea typeface="Malgun Gothic" pitchFamily="34" charset="-122"/>
                           <a:cs typeface="Malgun Gothic" pitchFamily="34" charset="-120"/>
                         </a:rPr>
-                        <a:t>냉각유를 밀어 넣는 데 필요한 압력</a:t>
+                        <a:t>입구 · 출구 사이 압력 차이 (펌프 부담)</a:t>
                       </a:r>
                       <a:endParaRPr lang="en-US" sz="900" dirty="0">
                         <a:latin typeface="Malgun Gothic" charset="0"/>
@@ -22116,7 +22116,7 @@
                           <a:ea typeface="Malgun Gothic" pitchFamily="34" charset="-122"/>
                           <a:cs typeface="Malgun Gothic" pitchFamily="34" charset="-120"/>
                         </a:rPr>
-                        <a:t>낮을수록</a:t>
+                        <a:t>목적함수 ↓</a:t>
                       </a:r>
                       <a:endParaRPr lang="en-US" sz="900" dirty="0">
                         <a:latin typeface="Malgun Gothic" charset="0"/>
@@ -22212,7 +22212,7 @@
                           <a:ea typeface="Malgun Gothic" pitchFamily="34" charset="-122"/>
                           <a:cs typeface="Malgun Gothic" pitchFamily="34" charset="-120"/>
                         </a:rPr>
-                        <a:t>발열 부품 중 가장 뜨거운 곳의 온도</a:t>
+                        <a:t>발열원 중 가장 높은 온도</a:t>
                       </a:r>
                       <a:endParaRPr lang="en-US" sz="900" dirty="0">
                         <a:latin typeface="Malgun Gothic" charset="0"/>
@@ -22259,7 +22259,7 @@
                           <a:ea typeface="Malgun Gothic" pitchFamily="34" charset="-122"/>
                           <a:cs typeface="Malgun Gothic" pitchFamily="34" charset="-120"/>
                         </a:rPr>
-                        <a:t>낮을수록</a:t>
+                        <a:t>목적함수 ↓</a:t>
                       </a:r>
                       <a:endParaRPr lang="en-US" sz="900" dirty="0">
                         <a:latin typeface="Malgun Gothic" charset="0"/>
@@ -22355,7 +22355,7 @@
                           <a:ea typeface="Malgun Gothic" pitchFamily="34" charset="-122"/>
                           <a:cs typeface="Malgun Gothic" pitchFamily="34" charset="-120"/>
                         </a:rPr>
-                        <a:t>발열 부품끼리의 온도 차이</a:t>
+                        <a:t>발열원 간 평균 온도의 표준편차</a:t>
                       </a:r>
                       <a:endParaRPr lang="en-US" sz="900" dirty="0">
                         <a:latin typeface="Malgun Gothic" charset="0"/>
@@ -22402,7 +22402,7 @@
                           <a:ea typeface="Malgun Gothic" pitchFamily="34" charset="-122"/>
                           <a:cs typeface="Malgun Gothic" pitchFamily="34" charset="-120"/>
                         </a:rPr>
-                        <a:t>작을수록</a:t>
+                        <a:t>목적함수 ↓</a:t>
                       </a:r>
                       <a:endParaRPr lang="en-US" sz="900" dirty="0">
                         <a:latin typeface="Malgun Gothic" charset="0"/>
@@ -22498,7 +22498,7 @@
                           <a:ea typeface="Malgun Gothic" pitchFamily="34" charset="-122"/>
                           <a:cs typeface="Malgun Gothic" pitchFamily="34" charset="-120"/>
                         </a:rPr>
-                        <a:t>1차 통과 유로마다 유량이 고른 정도</a:t>
+                        <a:t>1차 통과 유로별 유량의 표준편차</a:t>
                       </a:r>
                       <a:endParaRPr lang="en-US" sz="900" dirty="0">
                         <a:latin typeface="Malgun Gothic" charset="0"/>
@@ -22545,7 +22545,7 @@
                           <a:ea typeface="Malgun Gothic" pitchFamily="34" charset="-122"/>
                           <a:cs typeface="Malgun Gothic" pitchFamily="34" charset="-120"/>
                         </a:rPr>
-                        <a:t>작을수록</a:t>
+                        <a:t>목적함수 ↓</a:t>
                       </a:r>
                       <a:endParaRPr lang="en-US" sz="900" dirty="0">
                         <a:latin typeface="Malgun Gothic" charset="0"/>
@@ -22641,7 +22641,7 @@
                           <a:ea typeface="Malgun Gothic" pitchFamily="34" charset="-122"/>
                           <a:cs typeface="Malgun Gothic" pitchFamily="34" charset="-120"/>
                         </a:rPr>
-                        <a:t>2차 통과 유로마다 유량이 고른 정도</a:t>
+                        <a:t>2차 통과 유로별 유량의 표준편차</a:t>
                       </a:r>
                       <a:endParaRPr lang="en-US" sz="900" dirty="0">
                         <a:latin typeface="Malgun Gothic" charset="0"/>
@@ -22688,7 +22688,7 @@
                           <a:ea typeface="Malgun Gothic" pitchFamily="34" charset="-122"/>
                           <a:cs typeface="Malgun Gothic" pitchFamily="34" charset="-120"/>
                         </a:rPr>
-                        <a:t>작을수록</a:t>
+                        <a:t>목적함수 ↓</a:t>
                       </a:r>
                       <a:endParaRPr lang="en-US" sz="900" dirty="0">
                         <a:latin typeface="Malgun Gothic" charset="0"/>
@@ -22831,7 +22831,7 @@
                           <a:ea typeface="Malgun Gothic" pitchFamily="34" charset="-122"/>
                           <a:cs typeface="Malgun Gothic" pitchFamily="34" charset="-120"/>
                         </a:rPr>
-                        <a:t>필요량 확보</a:t>
+                        <a:t>제약조건</a:t>
                       </a:r>
                       <a:endParaRPr lang="en-US" sz="900" dirty="0">
                         <a:latin typeface="Malgun Gothic" charset="0"/>
@@ -22974,7 +22974,7 @@
                           <a:ea typeface="Malgun Gothic" pitchFamily="34" charset="-122"/>
                           <a:cs typeface="Malgun Gothic" pitchFamily="34" charset="-120"/>
                         </a:rPr>
-                        <a:t>제한 이하</a:t>
+                        <a:t>제약조건</a:t>
                       </a:r>
                       <a:endParaRPr lang="en-US" sz="900" dirty="0">
                         <a:latin typeface="Malgun Gothic" charset="0"/>
@@ -23101,7 +23101,7 @@
                 <a:ea typeface="Malgun Gothic" pitchFamily="34" charset="-122"/>
                 <a:cs typeface="Malgun Gothic" pitchFamily="34" charset="-120"/>
               </a:rPr>
-              <a:t>왜 '골라내기 → 머신러닝' 두 단계인가</a:t>
+              <a:t>왜 'DSD → GPR' 2단계인가</a:t>
             </a:r>
             <a:endParaRPr lang="en-US" sz="1300" dirty="0"/>
           </a:p>
@@ -23239,7 +23239,7 @@
                 <a:ea typeface="Malgun Gothic" pitchFamily="34" charset="-122"/>
                 <a:cs typeface="Malgun Gothic" pitchFamily="34" charset="-120"/>
               </a:rPr>
-              <a:t>각 변수의 '혼자 내는 효과'를 29회로 빠르게 판정</a:t>
+              <a:t>주효과(변수 하나만의 효과)를 29회로 판정</a:t>
             </a:r>
             <a:endParaRPr lang="en-US" sz="930" dirty="0"/>
           </a:p>
@@ -23259,7 +23259,7 @@
                 <a:ea typeface="Malgun Gothic" pitchFamily="34" charset="-122"/>
                 <a:cs typeface="Malgun Gothic" pitchFamily="34" charset="-120"/>
               </a:rPr>
-              <a:t>→ 영향 없는 변수 3개를 고정해 해석 횟수 절약</a:t>
+              <a:t>→ 비활성 변수 3개를 고정해 해석 횟수 절약</a:t>
             </a:r>
             <a:endParaRPr lang="en-US" sz="930" dirty="0"/>
           </a:p>
@@ -23355,7 +23355,7 @@
                 <a:ea typeface="Malgun Gothic" pitchFamily="34" charset="-122"/>
                 <a:cs typeface="Malgun Gothic" pitchFamily="34" charset="-120"/>
               </a:rPr>
-              <a:t>머신러닝</a:t>
+              <a:t>GPR</a:t>
             </a:r>
             <a:endParaRPr lang="en-US" sz="950" dirty="0"/>
           </a:p>
@@ -23397,7 +23397,7 @@
                 <a:ea typeface="Malgun Gothic" pitchFamily="34" charset="-122"/>
                 <a:cs typeface="Malgun Gothic" pitchFamily="34" charset="-120"/>
               </a:rPr>
-              <a:t>변수끼리 얽혀서 내는 효과(교호작용)까지 학습</a:t>
+              <a:t>교호작용(변수끼리 얽힌 효과)까지 학습</a:t>
             </a:r>
             <a:endParaRPr lang="en-US" sz="930" dirty="0"/>
           </a:p>
@@ -23417,7 +23417,7 @@
                 <a:ea typeface="Malgun Gothic" pitchFamily="34" charset="-122"/>
                 <a:cs typeface="Malgun Gothic" pitchFamily="34" charset="-120"/>
               </a:rPr>
-              <a:t>→ 정밀한 예측 · 변수 영향도 분석</a:t>
+              <a:t>→ 정밀 예측 · Sobol 민감도 분석</a:t>
             </a:r>
             <a:endParaRPr lang="en-US" sz="930" dirty="0"/>
           </a:p>
@@ -23697,7 +23697,7 @@
                 <a:ea typeface="Malgun Gothic" pitchFamily="34" charset="-122"/>
                 <a:cs typeface="Malgun Gothic" pitchFamily="34" charset="-120"/>
               </a:rPr>
-              <a:t>후보 설계변수 정하기</a:t>
+              <a:t>후보 설계변수 정의</a:t>
             </a:r>
             <a:endParaRPr lang="en-US" sz="2200" dirty="0"/>
           </a:p>
@@ -24387,7 +24387,7 @@
                 <a:ea typeface="Malgun Gothic" pitchFamily="34" charset="-122"/>
                 <a:cs typeface="Malgun Gothic" pitchFamily="34" charset="-120"/>
               </a:rPr>
-              <a:t>→  핀 두께 · 개수를 1차 · 2차 따로 정하는 변수로 분리</a:t>
+              <a:t>→  핀 두께 · 개수를 1차 · 2차 통과별 독립 변수로 분리</a:t>
             </a:r>
             <a:endParaRPr lang="en-US" sz="1150" dirty="0"/>
           </a:p>
@@ -26003,7 +26003,7 @@
                 <a:ea typeface="Malgun Gothic" pitchFamily="34" charset="-122"/>
                 <a:cs typeface="Malgun Gothic" pitchFamily="34" charset="-120"/>
               </a:rPr>
-              <a:t>핀 사이 간격은 두께 · 개수로 자동으로 정해짐 — 최소 2.0 mm (제작 한계 2.5 mm는 최적화 단계에서 적용)</a:t>
+              <a:t>핀 갭(핀 사이 간격)은 두께 · 개수로 정해지는 종속값 — 최소 2.0 mm (제작 한계 2.5 mm는 최적화 단계 제약으로 적용)</a:t>
             </a:r>
             <a:endParaRPr lang="en-US" sz="860" dirty="0"/>
           </a:p>
@@ -26307,7 +26307,7 @@
                 <a:ea typeface="Malgun Gothic" pitchFamily="34" charset="-122"/>
                 <a:cs typeface="Malgun Gothic" pitchFamily="34" charset="-120"/>
               </a:rPr>
-              <a:t>변수가 많음</a:t>
+              <a:t>11차원 설계공간</a:t>
             </a:r>
             <a:endParaRPr lang="en-US" sz="1050" dirty="0"/>
           </a:p>
@@ -26346,7 +26346,7 @@
                 <a:ea typeface="Malgun Gothic" pitchFamily="34" charset="-122"/>
                 <a:cs typeface="Malgun Gothic" pitchFamily="34" charset="-120"/>
               </a:rPr>
-              <a:t>11개를 다 학습하면 해석이 너무 많이 필요 → 먼저 골라냄</a:t>
+              <a:t>변수가 많을수록 필요한 해석 수 급증 → 변수 선별 먼저</a:t>
             </a:r>
             <a:endParaRPr lang="en-US" sz="950" dirty="0"/>
           </a:p>
@@ -26520,7 +26520,7 @@
                 <a:ea typeface="Malgun Gothic" pitchFamily="34" charset="-122"/>
                 <a:cs typeface="Malgun Gothic" pitchFamily="34" charset="-120"/>
               </a:rPr>
-              <a:t>영향 있는 변수 골라내기  —  선별 실험 (DSD)</a:t>
+              <a:t>선별 실험 설계  —  DSD (확정적 선별 설계)</a:t>
             </a:r>
             <a:endParaRPr lang="en-US" sz="2200" dirty="0"/>
           </a:p>
@@ -26618,7 +26618,7 @@
                 <a:ea typeface="Malgun Gothic" pitchFamily="34" charset="-122"/>
                 <a:cs typeface="Malgun Gothic" pitchFamily="34" charset="-120"/>
               </a:rPr>
-              <a:t>왜 먼저 골라내나</a:t>
+              <a:t>왜 선별부터 하는가</a:t>
             </a:r>
             <a:endParaRPr lang="en-US" sz="1300" dirty="0"/>
           </a:p>
@@ -26721,7 +26721,7 @@
                 <a:ea typeface="Malgun Gothic" pitchFamily="34" charset="-122"/>
                 <a:cs typeface="Malgun Gothic" pitchFamily="34" charset="-120"/>
               </a:rPr>
-              <a:t>해석 횟수 절약</a:t>
+              <a:t>대리모델 차원 축소</a:t>
             </a:r>
             <a:endParaRPr lang="en-US" sz="1050" dirty="0"/>
           </a:p>
@@ -26760,7 +26760,7 @@
                 <a:ea typeface="Malgun Gothic" pitchFamily="34" charset="-122"/>
                 <a:cs typeface="Malgun Gothic" pitchFamily="34" charset="-120"/>
               </a:rPr>
-              <a:t>변수가 늘수록 학습에 필요한 해석이 크게 늘어남 → 영향 없는 변수는 미리 뺌</a:t>
+              <a:t>변수가 늘수록 학습에 필요한 해석이 크게 늘어남 → 영향 없는 변수는 미리 고정</a:t>
             </a:r>
             <a:endParaRPr lang="en-US" sz="930" dirty="0"/>
           </a:p>
@@ -26863,7 +26863,7 @@
                 <a:ea typeface="Malgun Gothic" pitchFamily="34" charset="-122"/>
                 <a:cs typeface="Malgun Gothic" pitchFamily="34" charset="-120"/>
               </a:rPr>
-              <a:t>감이 아닌 규칙으로 판단</a:t>
+              <a:t>통계 판정으로 고정</a:t>
             </a:r>
             <a:endParaRPr lang="en-US" sz="1050" dirty="0"/>
           </a:p>
@@ -26902,7 +26902,7 @@
                 <a:ea typeface="Malgun Gothic" pitchFamily="34" charset="-122"/>
                 <a:cs typeface="Malgun Gothic" pitchFamily="34" charset="-120"/>
               </a:rPr>
-              <a:t>미리 정한 기준을 통과하지 못한 변수만 고정</a:t>
+              <a:t>감이 아니라 사전에 정한 규칙으로 고정 여부 결정</a:t>
             </a:r>
             <a:endParaRPr lang="en-US" sz="930" dirty="0"/>
           </a:p>
@@ -27005,7 +27005,7 @@
                 <a:ea typeface="Malgun Gothic" pitchFamily="34" charset="-122"/>
                 <a:cs typeface="Malgun Gothic" pitchFamily="34" charset="-120"/>
               </a:rPr>
-              <a:t>중요 변수 미리 파악</a:t>
+              <a:t>지배 변수 사전 파악</a:t>
             </a:r>
             <a:endParaRPr lang="en-US" sz="1050" dirty="0"/>
           </a:p>
@@ -27083,7 +27083,7 @@
                 <a:ea typeface="Malgun Gothic" pitchFamily="34" charset="-122"/>
                 <a:cs typeface="Malgun Gothic" pitchFamily="34" charset="-120"/>
               </a:rPr>
-              <a:t>판정 기준  —  해석 전에 미리 정함</a:t>
+              <a:t>판정 규칙  —  실험 전에 고정</a:t>
             </a:r>
             <a:endParaRPr lang="en-US" sz="1100" dirty="0"/>
           </a:p>
@@ -27134,7 +27134,7 @@
                           <a:ea typeface="Malgun Gothic" pitchFamily="34" charset="-122"/>
                           <a:cs typeface="Malgun Gothic" pitchFamily="34" charset="-120"/>
                         </a:rPr>
-                        <a:t>질문</a:t>
+                        <a:t>조건</a:t>
                       </a:r>
                       <a:endParaRPr lang="en-US" sz="900" dirty="0">
                         <a:latin typeface="Malgun Gothic" charset="0"/>
@@ -27234,7 +27234,7 @@
                           <a:ea typeface="Malgun Gothic" pitchFamily="34" charset="-122"/>
                           <a:cs typeface="Malgun Gothic" pitchFamily="34" charset="-120"/>
                         </a:rPr>
-                        <a:t>쉬운 뜻</a:t>
+                        <a:t>의미</a:t>
                       </a:r>
                       <a:endParaRPr lang="en-US" sz="900" dirty="0">
                         <a:latin typeface="Malgun Gothic" charset="0"/>
@@ -27286,7 +27286,7 @@
                           <a:ea typeface="Malgun Gothic" pitchFamily="34" charset="-122"/>
                           <a:cs typeface="Malgun Gothic" pitchFamily="34" charset="-120"/>
                         </a:rPr>
-                        <a:t>우연이 아닌가?</a:t>
+                        <a:t>통계적 유의성</a:t>
                       </a:r>
                       <a:endParaRPr lang="en-US" sz="900" dirty="0">
                         <a:latin typeface="Malgun Gothic" charset="0"/>
@@ -27380,7 +27380,7 @@
                           <a:ea typeface="Malgun Gothic" pitchFamily="34" charset="-122"/>
                           <a:cs typeface="Malgun Gothic" pitchFamily="34" charset="-120"/>
                         </a:rPr>
-                        <a:t>아무 치수와도 연결 안 한 '가짜 변수'보다 확실히 큰가</a:t>
+                        <a:t>가짜 인자(효과 0 기준선)보다 확실히 큰 효과인가</a:t>
                       </a:r>
                       <a:endParaRPr lang="en-US" sz="900" dirty="0">
                         <a:latin typeface="Malgun Gothic" charset="0"/>
@@ -27429,7 +27429,7 @@
                           <a:ea typeface="Malgun Gothic" pitchFamily="34" charset="-122"/>
                           <a:cs typeface="Malgun Gothic" pitchFamily="34" charset="-120"/>
                         </a:rPr>
-                        <a:t>의미 있는 크기인가?</a:t>
+                        <a:t>분산 기여율</a:t>
                       </a:r>
                       <a:endParaRPr lang="en-US" sz="900" dirty="0">
                         <a:latin typeface="Malgun Gothic" charset="0"/>
@@ -27476,7 +27476,7 @@
                           <a:ea typeface="Malgun Gothic" pitchFamily="34" charset="-122"/>
                           <a:cs typeface="Malgun Gothic" pitchFamily="34" charset="-120"/>
                         </a:rPr>
-                        <a:t>영향 ≥ 2%</a:t>
+                        <a:t>≥ 2%</a:t>
                       </a:r>
                       <a:endParaRPr lang="en-US" sz="900" dirty="0">
                         <a:latin typeface="Malgun Gothic" charset="0"/>
@@ -27523,7 +27523,7 @@
                           <a:ea typeface="Malgun Gothic" pitchFamily="34" charset="-122"/>
                           <a:cs typeface="Malgun Gothic" pitchFamily="34" charset="-120"/>
                         </a:rPr>
-                        <a:t>성능 변화의 2% 이상을 설명하는가</a:t>
+                        <a:t>응답 변동의 2% 이상을 설명하는가</a:t>
                       </a:r>
                       <a:endParaRPr lang="en-US" sz="900" dirty="0">
                         <a:latin typeface="Malgun Gothic" charset="0"/>
@@ -27621,7 +27621,7 @@
                 <a:ea typeface="Malgun Gothic" pitchFamily="34" charset="-122"/>
                 <a:cs typeface="Malgun Gothic" pitchFamily="34" charset="-120"/>
               </a:rPr>
-              <a:t>두 질문 모두 '예'여야 영향 있음</a:t>
+              <a:t>두 조건을 모두 만족해야 '영향 있음'</a:t>
             </a:r>
             <a:endParaRPr lang="en-US" sz="950" dirty="0"/>
           </a:p>
@@ -27641,7 +27641,7 @@
                 <a:ea typeface="Malgun Gothic" pitchFamily="34" charset="-122"/>
                 <a:cs typeface="Malgun Gothic" pitchFamily="34" charset="-120"/>
               </a:rPr>
-              <a:t>성능 지표 7개 어디에서도 영향이 없으면 → 그 변수는 고정</a:t>
+              <a:t>응답 7개 어디에서도 영향이 없으면 → 비활성 변수로 고정</a:t>
             </a:r>
             <a:endParaRPr lang="en-US" sz="950" dirty="0"/>
           </a:p>
@@ -27661,7 +27661,7 @@
                 <a:ea typeface="Malgun Gothic" pitchFamily="34" charset="-122"/>
                 <a:cs typeface="Malgun Gothic" pitchFamily="34" charset="-120"/>
               </a:rPr>
-              <a:t>결과를 보고 기준을 바꾸지 않도록 해석 전에 확정</a:t>
+              <a:t>결과를 본 뒤 기준을 바꾸지 않도록 실험 전에 확정</a:t>
             </a:r>
             <a:endParaRPr lang="en-US" sz="950" dirty="0"/>
           </a:p>
@@ -27759,7 +27759,7 @@
                 <a:ea typeface="Malgun Gothic" pitchFamily="34" charset="-122"/>
                 <a:cs typeface="Malgun Gothic" pitchFamily="34" charset="-120"/>
               </a:rPr>
-              <a:t>실험표  —  해석 29회</a:t>
+              <a:t>실험표 구조  —  29회 × 14열</a:t>
             </a:r>
             <a:endParaRPr lang="en-US" sz="1300" dirty="0"/>
           </a:p>
@@ -27837,7 +27837,7 @@
                 <a:ea typeface="Malgun Gothic" pitchFamily="34" charset="-122"/>
                 <a:cs typeface="Malgun Gothic" pitchFamily="34" charset="-120"/>
               </a:rPr>
-              <a:t>가짜 변수 3개</a:t>
+              <a:t>가짜 인자 3개</a:t>
             </a:r>
             <a:endParaRPr lang="en-US" sz="900" dirty="0"/>
           </a:p>
@@ -38157,7 +38157,7 @@
                 <a:ea typeface="Malgun Gothic" pitchFamily="34" charset="-122"/>
                 <a:cs typeface="Malgun Gothic" pitchFamily="34" charset="-120"/>
               </a:rPr>
-              <a:t>뒤집은 짝 14회</a:t>
+              <a:t>거울상 14회</a:t>
             </a:r>
             <a:endParaRPr lang="en-US" sz="850" dirty="0"/>
           </a:p>
@@ -38219,7 +38219,7 @@
                 <a:ea typeface="Malgun Gothic" pitchFamily="34" charset="-122"/>
                 <a:cs typeface="Malgun Gothic" pitchFamily="34" charset="-120"/>
               </a:rPr>
-              <a:t>모두 중간 1회</a:t>
+              <a:t>중심점 1회</a:t>
             </a:r>
             <a:endParaRPr lang="en-US" sz="850" dirty="0"/>
           </a:p>
@@ -38283,7 +38283,7 @@
                 <a:ea typeface="Malgun Gothic" pitchFamily="34" charset="-122"/>
                 <a:cs typeface="Malgun Gothic" pitchFamily="34" charset="-120"/>
               </a:rPr>
-              <a:t>범위 아래 끝</a:t>
+              <a:t>하한</a:t>
             </a:r>
             <a:endParaRPr lang="en-US" sz="850" dirty="0"/>
           </a:p>
@@ -38297,7 +38297,7 @@
         </p:nvSpPr>
         <p:spPr>
           <a:xfrm>
-            <a:off x="8686800" y="4915814"/>
+            <a:off x="8503920" y="4915814"/>
             <a:ext cx="182880" cy="128016"/>
           </a:xfrm>
           <a:prstGeom prst="rect">
@@ -38322,7 +38322,7 @@
         </p:nvSpPr>
         <p:spPr>
           <a:xfrm>
-            <a:off x="8924544" y="4870094"/>
+            <a:off x="8741664" y="4870094"/>
             <a:ext cx="868680" cy="219456"/>
           </a:xfrm>
           <a:prstGeom prst="rect">
@@ -38361,7 +38361,7 @@
         </p:nvSpPr>
         <p:spPr>
           <a:xfrm>
-            <a:off x="9509760" y="4915814"/>
+            <a:off x="9464040" y="4915814"/>
             <a:ext cx="182880" cy="128016"/>
           </a:xfrm>
           <a:prstGeom prst="rect">
@@ -38386,7 +38386,7 @@
         </p:nvSpPr>
         <p:spPr>
           <a:xfrm>
-            <a:off x="9747504" y="4870094"/>
+            <a:off x="9701784" y="4870094"/>
             <a:ext cx="868680" cy="219456"/>
           </a:xfrm>
           <a:prstGeom prst="rect">
@@ -38411,7 +38411,7 @@
                 <a:ea typeface="Malgun Gothic" pitchFamily="34" charset="-122"/>
                 <a:cs typeface="Malgun Gothic" pitchFamily="34" charset="-120"/>
               </a:rPr>
-              <a:t>위 끝</a:t>
+              <a:t>상한</a:t>
             </a:r>
             <a:endParaRPr lang="en-US" sz="850" dirty="0"/>
           </a:p>
@@ -38457,7 +38457,7 @@
                 <a:ea typeface="Malgun Gothic" pitchFamily="34" charset="-122"/>
                 <a:cs typeface="Malgun Gothic" pitchFamily="34" charset="-120"/>
               </a:rPr>
-              <a:t>한 줄 = 해석 1회, 칸 색 = 그 변수를 범위의 어디에 둘지</a:t>
+              <a:t>3수준: 각 행마다 변수 1개만 중간값 → 곡률(중간값이 나은지)까지 확인</a:t>
             </a:r>
             <a:endParaRPr lang="en-US" sz="860" dirty="0"/>
           </a:p>
@@ -38481,7 +38481,7 @@
                 <a:ea typeface="Malgun Gothic" pitchFamily="34" charset="-122"/>
                 <a:cs typeface="Malgun Gothic" pitchFamily="34" charset="-120"/>
               </a:rPr>
-              <a:t>여러 변수를 한꺼번에 바꿔도 변수마다 효과를 따로 계산할 수 있게 짠 표</a:t>
+              <a:t>거울상(부호를 뒤집은 쌍): 주효과가 교호작용 · 곡률과 섞이지 않음</a:t>
             </a:r>
             <a:endParaRPr lang="en-US" sz="860" dirty="0"/>
           </a:p>
@@ -38505,7 +38505,7 @@
                 <a:ea typeface="Malgun Gothic" pitchFamily="34" charset="-122"/>
                 <a:cs typeface="Malgun Gothic" pitchFamily="34" charset="-120"/>
               </a:rPr>
-              <a:t>가짜 변수: 효과가 0이어야 정상 → '우연히 생기는 크기'의 기준선</a:t>
+              <a:t>가짜 인자: 어떤 치수와도 연결 안 한 빈 열 → 효과 0의 기준선</a:t>
             </a:r>
             <a:endParaRPr lang="en-US" sz="860" dirty="0"/>
           </a:p>
@@ -38529,7 +38529,7 @@
                 <a:ea typeface="Malgun Gothic" pitchFamily="34" charset="-122"/>
                 <a:cs typeface="Malgun Gothic" pitchFamily="34" charset="-120"/>
               </a:rPr>
-              <a:t>한계: 변수끼리 얽힌 효과(교호작용)는 정확히 못 나눔 → 02 머신러닝에서 확인</a:t>
+              <a:t>한계: 교호작용의 크기는 정확히 분리 불가 → 02 GPR 대리모델에서 확인</a:t>
             </a:r>
             <a:endParaRPr lang="en-US" sz="860" dirty="0"/>
           </a:p>
@@ -38703,7 +38703,7 @@
                 <a:ea typeface="Malgun Gothic" pitchFamily="34" charset="-122"/>
                 <a:cs typeface="Malgun Gothic" pitchFamily="34" charset="-120"/>
               </a:rPr>
-              <a:t>선별 결과  —  11개 중 8개</a:t>
+              <a:t>선별 결과 및 활성 변수 확정</a:t>
             </a:r>
             <a:endParaRPr lang="en-US" sz="2200" dirty="0"/>
           </a:p>
@@ -38801,7 +38801,7 @@
                 <a:ea typeface="Malgun Gothic" pitchFamily="34" charset="-122"/>
                 <a:cs typeface="Malgun Gothic" pitchFamily="34" charset="-120"/>
               </a:rPr>
-              <a:t>변수별 영향 크기 (%)  —  DSD 29회</a:t>
+              <a:t>변수별 분산 기여율 (%)  —  DSD 29회</a:t>
             </a:r>
             <a:endParaRPr lang="en-US" sz="1300" dirty="0"/>
           </a:p>
@@ -38840,7 +38840,7 @@
                 <a:ea typeface="Malgun Gothic" pitchFamily="34" charset="-122"/>
                 <a:cs typeface="Malgun Gothic" pitchFamily="34" charset="-120"/>
               </a:rPr>
-              <a:t>영향 크기 = 성능 지표가 변한 양 중 그 변수 때문인 비율</a:t>
+              <a:t>분산 기여율 = 응답 변동 중 그 변수가 설명하는 비율</a:t>
             </a:r>
             <a:endParaRPr lang="en-US" sz="900" dirty="0"/>
           </a:p>
@@ -40055,7 +40055,7 @@
                           <a:ea typeface="Malgun Gothic" pitchFamily="34" charset="-122"/>
                           <a:cs typeface="Malgun Gothic" pitchFamily="34" charset="-120"/>
                         </a:rPr>
-                        <a:t>남김</a:t>
+                        <a:t>활성</a:t>
                       </a:r>
                       <a:endParaRPr lang="en-US" sz="950" dirty="0">
                         <a:latin typeface="Malgun Gothic" charset="0"/>
@@ -41280,7 +41280,7 @@
                           <a:ea typeface="Malgun Gothic" pitchFamily="34" charset="-122"/>
                           <a:cs typeface="Malgun Gothic" pitchFamily="34" charset="-120"/>
                         </a:rPr>
-                        <a:t>남김</a:t>
+                        <a:t>활성</a:t>
                       </a:r>
                       <a:endParaRPr lang="en-US" sz="950" dirty="0">
                         <a:latin typeface="Malgun Gothic" charset="0"/>
@@ -41891,7 +41891,7 @@
                           <a:ea typeface="Malgun Gothic" pitchFamily="34" charset="-122"/>
                           <a:cs typeface="Malgun Gothic" pitchFamily="34" charset="-120"/>
                         </a:rPr>
-                        <a:t>남김</a:t>
+                        <a:t>활성</a:t>
                       </a:r>
                       <a:endParaRPr lang="en-US" sz="950" dirty="0">
                         <a:latin typeface="Malgun Gothic" charset="0"/>
@@ -43116,7 +43116,7 @@
                           <a:ea typeface="Malgun Gothic" pitchFamily="34" charset="-122"/>
                           <a:cs typeface="Malgun Gothic" pitchFamily="34" charset="-120"/>
                         </a:rPr>
-                        <a:t>남김</a:t>
+                        <a:t>활성</a:t>
                       </a:r>
                       <a:endParaRPr lang="en-US" sz="950" dirty="0">
                         <a:latin typeface="Malgun Gothic" charset="0"/>
@@ -44341,7 +44341,7 @@
                           <a:ea typeface="Malgun Gothic" pitchFamily="34" charset="-122"/>
                           <a:cs typeface="Malgun Gothic" pitchFamily="34" charset="-120"/>
                         </a:rPr>
-                        <a:t>남김</a:t>
+                        <a:t>활성</a:t>
                       </a:r>
                       <a:endParaRPr lang="en-US" sz="950" dirty="0">
                         <a:latin typeface="Malgun Gothic" charset="0"/>
@@ -44952,7 +44952,7 @@
                           <a:ea typeface="Malgun Gothic" pitchFamily="34" charset="-122"/>
                           <a:cs typeface="Malgun Gothic" pitchFamily="34" charset="-120"/>
                         </a:rPr>
-                        <a:t>남김</a:t>
+                        <a:t>활성</a:t>
                       </a:r>
                       <a:endParaRPr lang="en-US" sz="950" dirty="0">
                         <a:latin typeface="Malgun Gothic" charset="0"/>
@@ -45563,7 +45563,7 @@
                           <a:ea typeface="Malgun Gothic" pitchFamily="34" charset="-122"/>
                           <a:cs typeface="Malgun Gothic" pitchFamily="34" charset="-120"/>
                         </a:rPr>
-                        <a:t>남김</a:t>
+                        <a:t>활성</a:t>
                       </a:r>
                       <a:endParaRPr lang="en-US" sz="950" dirty="0">
                         <a:latin typeface="Malgun Gothic" charset="0"/>
@@ -46174,7 +46174,7 @@
                           <a:ea typeface="Malgun Gothic" pitchFamily="34" charset="-122"/>
                           <a:cs typeface="Malgun Gothic" pitchFamily="34" charset="-120"/>
                         </a:rPr>
-                        <a:t>남김</a:t>
+                        <a:t>활성</a:t>
                       </a:r>
                       <a:endParaRPr lang="en-US" sz="950" dirty="0">
                         <a:latin typeface="Malgun Gothic" charset="0"/>
@@ -46260,7 +46260,7 @@
                 <a:ea typeface="Malgun Gothic" pitchFamily="34" charset="-122"/>
                 <a:cs typeface="Malgun Gothic" pitchFamily="34" charset="-120"/>
               </a:rPr>
-              <a:t>색 칸 = 영향 있음 (두 기준 모두 통과)  ·  회색 숫자 = 영향 없음  ·  고정값: 차압이 낮아지는 쪽 끝값, 판단 근거가 없으면 범위 중앙</a:t>
+              <a:t>색 칸 = 영향 인정 (p ≤ 0.05 그리고 기여율 ≥ 2%)  ·  회색 숫자 = 영향 없음  ·  고정값: 주효과가 유의한 목적함수(차압)가 유리한 끝값, 없으면 범위 중앙</a:t>
             </a:r>
             <a:endParaRPr lang="en-US" sz="880" dirty="0"/>
           </a:p>
@@ -46777,7 +46777,7 @@
                 <a:ea typeface="Malgun Gothic" pitchFamily="34" charset="-122"/>
                 <a:cs typeface="Malgun Gothic" pitchFamily="34" charset="-120"/>
               </a:rPr>
-              <a:t>학습용 해석점 배치  —  OLHD</a:t>
+              <a:t>활성 변수 실험계획  —  OLHD (최적라틴방격법)</a:t>
             </a:r>
             <a:endParaRPr lang="en-US" sz="2200" dirty="0"/>
           </a:p>
@@ -46875,7 +46875,7 @@
                 <a:ea typeface="Malgun Gothic" pitchFamily="34" charset="-122"/>
                 <a:cs typeface="Malgun Gothic" pitchFamily="34" charset="-120"/>
               </a:rPr>
-              <a:t>해석점 분포  —  80점</a:t>
+              <a:t>실험점 분포  —  80점</a:t>
             </a:r>
             <a:endParaRPr lang="en-US" sz="1300" dirty="0"/>
           </a:p>
@@ -47031,7 +47031,7 @@
                 <a:ea typeface="Malgun Gothic" pitchFamily="34" charset="-122"/>
                 <a:cs typeface="Malgun Gothic" pitchFamily="34" charset="-120"/>
               </a:rPr>
-              <a:t>왼쪽: 핀이 많으면 핀 사이 간격 때문에 두껍게 만들 수 없음 → 만들 수 있는 영역 안에만 점이 찍힘</a:t>
+              <a:t>왼쪽: 핀 갭 제약(핀이 많을수록 두께 상한이 낮아짐) 영역 안에만 분포</a:t>
             </a:r>
             <a:endParaRPr lang="en-US" sz="900" dirty="0"/>
           </a:p>
@@ -47055,7 +47055,7 @@
                 <a:ea typeface="Malgun Gothic" pitchFamily="34" charset="-122"/>
                 <a:cs typeface="Malgun Gothic" pitchFamily="34" charset="-120"/>
               </a:rPr>
-              <a:t>오른쪽: 이런 제약이 없는 변수끼리는 범위 전체에 고르게 퍼짐</a:t>
+              <a:t>오른쪽: 제약이 없는 변수 쌍은 설계공간 전체에 고르게 분포</a:t>
             </a:r>
             <a:endParaRPr lang="en-US" sz="900" dirty="0"/>
           </a:p>
@@ -47153,7 +47153,7 @@
                 <a:ea typeface="Malgun Gothic" pitchFamily="34" charset="-122"/>
                 <a:cs typeface="Malgun Gothic" pitchFamily="34" charset="-120"/>
               </a:rPr>
-              <a:t>해석 계획 요약</a:t>
+              <a:t>실험계획 요약</a:t>
             </a:r>
             <a:endParaRPr lang="en-US" sz="1300" dirty="0"/>
           </a:p>
@@ -47258,7 +47258,7 @@
                 <a:ea typeface="Malgun Gothic" pitchFamily="34" charset="-122"/>
                 <a:cs typeface="Malgun Gothic" pitchFamily="34" charset="-120"/>
               </a:rPr>
-              <a:t>남긴 변수</a:t>
+              <a:t>활성 변수</a:t>
             </a:r>
             <a:endParaRPr lang="en-US" sz="900" dirty="0"/>
           </a:p>
@@ -47363,7 +47363,7 @@
                 <a:ea typeface="Malgun Gothic" pitchFamily="34" charset="-122"/>
                 <a:cs typeface="Malgun Gothic" pitchFamily="34" charset="-120"/>
               </a:rPr>
-              <a:t>해석점 (변수당 10점)</a:t>
+              <a:t>실험점 (10 × 8)</a:t>
             </a:r>
             <a:endParaRPr lang="en-US" sz="900" dirty="0"/>
           </a:p>
@@ -47620,7 +47620,7 @@
                           <a:ea typeface="Malgun Gothic" pitchFamily="34" charset="-122"/>
                           <a:cs typeface="Malgun Gothic" pitchFamily="34" charset="-120"/>
                         </a:rPr>
-                        <a:t>남긴 변수</a:t>
+                        <a:t>활성 변수</a:t>
                       </a:r>
                       <a:endParaRPr lang="en-US" sz="950" dirty="0">
                         <a:latin typeface="Malgun Gothic" charset="0"/>
@@ -47833,7 +47833,7 @@
                           <a:ea typeface="Malgun Gothic" pitchFamily="34" charset="-122"/>
                           <a:cs typeface="Malgun Gothic" pitchFamily="34" charset="-120"/>
                         </a:rPr>
-                        <a:t>OLHD란?</a:t>
+                        <a:t>실험계획법</a:t>
                       </a:r>
                       <a:endParaRPr lang="en-US" sz="950" dirty="0">
                         <a:latin typeface="Malgun Gothic" charset="0"/>
@@ -47880,7 +47880,7 @@
                           <a:ea typeface="Malgun Gothic" pitchFamily="34" charset="-122"/>
                           <a:cs typeface="Malgun Gothic" pitchFamily="34" charset="-120"/>
                         </a:rPr>
-                        <a:t>각 변수 범위를 80칸으로 나눠 칸마다 한 번씩만 쓰도록</a:t>
+                        <a:t>최적라틴방격법(OLHD) — 각 변수 범위를 80구간으로 나눠</a:t>
                       </a:r>
                       <a:endParaRPr lang="en-US" sz="950" dirty="0">
                         <a:latin typeface="Malgun Gothic" charset="0"/>
@@ -47901,7 +47901,7 @@
                           <a:ea typeface="Malgun Gothic" pitchFamily="34" charset="-122"/>
                           <a:cs typeface="Malgun Gothic" pitchFamily="34" charset="-120"/>
                         </a:rPr>
-                        <a:t>배치 → 적은 점으로 범위를 빈틈없이 채움</a:t>
+                        <a:t>구간마다 한 점씩 + 점 간 최소 거리 최대화 → 균일 분포</a:t>
                       </a:r>
                       <a:endParaRPr lang="en-US" sz="950" dirty="0">
                         <a:latin typeface="Malgun Gothic" charset="0"/>
@@ -48222,7 +48222,7 @@
                 <a:ea typeface="Malgun Gothic" pitchFamily="34" charset="-122"/>
                 <a:cs typeface="Malgun Gothic" pitchFamily="34" charset="-120"/>
               </a:rPr>
-              <a:t>예측 모델  —  가우시안 프로세스 회귀 (GPR)</a:t>
+              <a:t>대리모델  —  가우시안 프로세스 회귀 (GPR)</a:t>
             </a:r>
             <a:endParaRPr lang="en-US" sz="2200" dirty="0"/>
           </a:p>
@@ -48320,7 +48320,7 @@
                 <a:ea typeface="Malgun Gothic" pitchFamily="34" charset="-122"/>
                 <a:cs typeface="Malgun Gothic" pitchFamily="34" charset="-120"/>
               </a:rPr>
-              <a:t>어떻게 예측하나  —  예측값과 '얼마나 믿을지'를 함께</a:t>
+              <a:t>개념  —  예측값과 불확실성을 함께 제공</a:t>
             </a:r>
             <a:endParaRPr lang="en-US" sz="1300" dirty="0"/>
           </a:p>
@@ -49335,7 +49335,7 @@
                 <a:ea typeface="Malgun Gothic" pitchFamily="34" charset="-122"/>
                 <a:cs typeface="Malgun Gothic" pitchFamily="34" charset="-120"/>
               </a:rPr>
-              <a:t>해석한 점에서 멀수록</a:t>
+              <a:t>실험점 사이가 멀수록</a:t>
             </a:r>
             <a:endParaRPr lang="en-US" sz="850" dirty="0"/>
           </a:p>
@@ -49355,7 +49355,7 @@
                 <a:ea typeface="Malgun Gothic" pitchFamily="34" charset="-122"/>
                 <a:cs typeface="Malgun Gothic" pitchFamily="34" charset="-120"/>
               </a:rPr>
-              <a:t>예측 범위가 넓어짐</a:t>
+              <a:t>불확실성이 커짐</a:t>
             </a:r>
             <a:endParaRPr lang="en-US" sz="850" dirty="0"/>
           </a:p>
@@ -49520,7 +49520,7 @@
                 <a:ea typeface="Malgun Gothic" pitchFamily="34" charset="-122"/>
                 <a:cs typeface="Malgun Gothic" pitchFamily="34" charset="-120"/>
               </a:rPr>
-              <a:t>예측값</a:t>
+              <a:t>예측 평균</a:t>
             </a:r>
             <a:endParaRPr lang="en-US" sz="850" dirty="0"/>
           </a:p>
@@ -49588,7 +49588,7 @@
                 <a:ea typeface="Malgun Gothic" pitchFamily="34" charset="-122"/>
                 <a:cs typeface="Malgun Gothic" pitchFamily="34" charset="-120"/>
               </a:rPr>
-              <a:t>예측 범위 (약 95%)</a:t>
+              <a:t>불확실성 (±2σ, 약 95%)</a:t>
             </a:r>
             <a:endParaRPr lang="en-US" sz="850" dirty="0"/>
           </a:p>
@@ -49839,7 +49839,7 @@
                 <a:ea typeface="Malgun Gothic" pitchFamily="34" charset="-122"/>
                 <a:cs typeface="Malgun Gothic" pitchFamily="34" charset="-120"/>
               </a:rPr>
-              <a:t>예측 + 믿을 정도</a:t>
+              <a:t>예측값 + 불확실성</a:t>
             </a:r>
             <a:endParaRPr lang="en-US" sz="1000" dirty="0"/>
           </a:p>
@@ -49878,7 +49878,7 @@
                 <a:ea typeface="Malgun Gothic" pitchFamily="34" charset="-122"/>
                 <a:cs typeface="Malgun Gothic" pitchFamily="34" charset="-120"/>
               </a:rPr>
-              <a:t>예측값과 함께 오차 범위를 알려줌</a:t>
+              <a:t>예측과 함께 신뢰구간을 제공</a:t>
             </a:r>
             <a:endParaRPr lang="en-US" sz="930" dirty="0"/>
           </a:p>
@@ -49981,7 +49981,7 @@
                 <a:ea typeface="Malgun Gothic" pitchFamily="34" charset="-122"/>
                 <a:cs typeface="Malgun Gothic" pitchFamily="34" charset="-120"/>
               </a:rPr>
-              <a:t>해석 수십 ~ 수백 점이면 충분</a:t>
+              <a:t>해석 수십 ~ 수백 점 규모에 적합</a:t>
             </a:r>
             <a:endParaRPr lang="en-US" sz="930" dirty="0"/>
           </a:p>
@@ -50045,7 +50045,7 @@
                 <a:ea typeface="Malgun Gothic" pitchFamily="34" charset="-122"/>
                 <a:cs typeface="Malgun Gothic" pitchFamily="34" charset="-120"/>
               </a:rPr>
-              <a:t>변수 영향도 계산</a:t>
+              <a:t>민감도 해석</a:t>
             </a:r>
             <a:endParaRPr lang="en-US" sz="1000" dirty="0"/>
           </a:p>
@@ -50084,7 +50084,7 @@
                 <a:ea typeface="Malgun Gothic" pitchFamily="34" charset="-122"/>
                 <a:cs typeface="Malgun Gothic" pitchFamily="34" charset="-120"/>
               </a:rPr>
-              <a:t>학습된 모델로 변수별 영향 · 교호작용 계산 (03)</a:t>
+              <a:t>학습된 모델로 Sobol 지수 · 교호작용 산출 (03)</a:t>
             </a:r>
             <a:endParaRPr lang="en-US" sz="930" dirty="0"/>
           </a:p>
@@ -50148,7 +50148,7 @@
                 <a:ea typeface="Malgun Gothic" pitchFamily="34" charset="-122"/>
                 <a:cs typeface="Malgun Gothic" pitchFamily="34" charset="-120"/>
               </a:rPr>
-              <a:t>다음 해석 위치 선정</a:t>
+              <a:t>추가 해석 위치 선정</a:t>
             </a:r>
             <a:endParaRPr lang="en-US" sz="1000" dirty="0"/>
           </a:p>
@@ -50187,7 +50187,7 @@
                 <a:ea typeface="Malgun Gothic" pitchFamily="34" charset="-122"/>
                 <a:cs typeface="Malgun Gothic" pitchFamily="34" charset="-120"/>
               </a:rPr>
-              <a:t>예측 범위가 넓은 곳 = 정보 부족 → 다음 해석 후보 (차월)</a:t>
+              <a:t>불확실성이 큰 곳을 다음 해석 후보로 (차월)</a:t>
             </a:r>
             <a:endParaRPr lang="en-US" sz="930" dirty="0"/>
           </a:p>
@@ -50425,7 +50425,7 @@
                           <a:ea typeface="Malgun Gothic" pitchFamily="34" charset="-122"/>
                           <a:cs typeface="Malgun Gothic" pitchFamily="34" charset="-120"/>
                         </a:rPr>
-                        <a:t>남긴 변수 8개</a:t>
+                        <a:t>활성 변수 8개 (0 ~ 1 정규화)</a:t>
                       </a:r>
                       <a:endParaRPr lang="en-US" sz="950" dirty="0">
                         <a:latin typeface="Malgun Gothic" charset="0"/>
@@ -50521,7 +50521,28 @@
                           <a:ea typeface="Malgun Gothic" pitchFamily="34" charset="-122"/>
                           <a:cs typeface="Malgun Gothic" pitchFamily="34" charset="-120"/>
                         </a:rPr>
-                        <a:t>성능 지표 7개 → 지표마다 모델 1개</a:t>
+                        <a:t>응답 7개 → 응답별 모델 1개</a:t>
+                      </a:r>
+                      <a:endParaRPr lang="en-US" sz="950" dirty="0">
+                        <a:latin typeface="Malgun Gothic" charset="0"/>
+                        <a:ea typeface="Malgun Gothic" charset="0"/>
+                        <a:cs typeface="Malgun Gothic" charset="0"/>
+                      </a:endParaRPr>
+                    </a:p>
+                    <a:p>
+                      <a:pPr indent="0" marL="0">
+                        <a:buNone/>
+                      </a:pPr>
+                      <a:r>
+                        <a:rPr lang="en-US" sz="950" dirty="0">
+                          <a:solidFill>
+                            <a:srgbClr val="1C2733"/>
+                          </a:solidFill>
+                          <a:latin typeface="Malgun Gothic" pitchFamily="34" charset="0"/>
+                          <a:ea typeface="Malgun Gothic" pitchFamily="34" charset="-122"/>
+                          <a:cs typeface="Malgun Gothic" pitchFamily="34" charset="-120"/>
+                        </a:rPr>
+                        <a:t>(목적함수 5 + 제약조건 2)</a:t>
                       </a:r>
                       <a:endParaRPr lang="en-US" sz="950" dirty="0">
                         <a:latin typeface="Malgun Gothic" charset="0"/>
@@ -50570,7 +50591,7 @@
                           <a:ea typeface="Malgun Gothic" pitchFamily="34" charset="-122"/>
                           <a:cs typeface="Malgun Gothic" pitchFamily="34" charset="-120"/>
                         </a:rPr>
-                        <a:t>모델 설정</a:t>
+                        <a:t>커널</a:t>
                       </a:r>
                       <a:endParaRPr lang="en-US" sz="950" dirty="0">
                         <a:latin typeface="Malgun Gothic" charset="0"/>
@@ -50617,7 +50638,7 @@
                           <a:ea typeface="Malgun Gothic" pitchFamily="34" charset="-122"/>
                           <a:cs typeface="Malgun Gothic" pitchFamily="34" charset="-120"/>
                         </a:rPr>
-                        <a:t>성능이 매끄럽게 변한다고 가정하고,</a:t>
+                        <a:t>Matern(ν = 2.5) + ARD(변수별 길이척도)</a:t>
                       </a:r>
                       <a:endParaRPr lang="en-US" sz="950" dirty="0">
                         <a:latin typeface="Malgun Gothic" charset="0"/>
@@ -50638,7 +50659,7 @@
                           <a:ea typeface="Malgun Gothic" pitchFamily="34" charset="-122"/>
                           <a:cs typeface="Malgun Gothic" pitchFamily="34" charset="-120"/>
                         </a:rPr>
-                        <a:t>변수마다 영향 범위를 따로 학습</a:t>
+                        <a:t>— 매끄러운 응답 가정, 변수마다 민감도 따로 학습</a:t>
                       </a:r>
                       <a:endParaRPr lang="en-US" sz="950" dirty="0">
                         <a:latin typeface="Malgun Gothic" charset="0"/>
@@ -50734,7 +50755,7 @@
                           <a:ea typeface="Malgun Gothic" pitchFamily="34" charset="-122"/>
                           <a:cs typeface="Malgun Gothic" pitchFamily="34" charset="-120"/>
                         </a:rPr>
-                        <a:t>차압은 값 범위가 넓어 로그로 바꿔 학습</a:t>
+                        <a:t>차압은 로그 변환 (값의 범위가 넓음)</a:t>
                       </a:r>
                       <a:endParaRPr lang="en-US" sz="950" dirty="0">
                         <a:latin typeface="Malgun Gothic" charset="0"/>
@@ -51115,7 +51136,7 @@
                 <a:ea typeface="Malgun Gothic" pitchFamily="34" charset="-122"/>
                 <a:cs typeface="Malgun Gothic" pitchFamily="34" charset="-120"/>
               </a:rPr>
-              <a:t>     전체 진행 관리  —  선별 29회 → 결과 확인 → 학습용 80점, 해석점마다 아래 단계를 차례로 실행</a:t>
+              <a:t>     단계 관리  —  선별 29회 → 판정 확인 → 실험계획 80점, 실험점마다 아래 단계를 순서대로 호출</a:t>
             </a:r>
             <a:endParaRPr lang="en-US" sz="1250" dirty="0"/>
           </a:p>
@@ -51342,7 +51363,7 @@
                 <a:ea typeface="Malgun Gothic" pitchFamily="34" charset="-122"/>
                 <a:cs typeface="Malgun Gothic" pitchFamily="34" charset="-120"/>
               </a:rPr>
-              <a:t>해석점 만들기</a:t>
+              <a:t>실험점 생성</a:t>
             </a:r>
             <a:endParaRPr lang="en-US" sz="1050" dirty="0"/>
           </a:p>
@@ -51446,7 +51467,7 @@
                 <a:ea typeface="Malgun Gothic" pitchFamily="34" charset="-122"/>
                 <a:cs typeface="Malgun Gothic" pitchFamily="34" charset="-120"/>
               </a:rPr>
-              <a:t>학습용 80점</a:t>
+              <a:t>활성 변수 80점</a:t>
             </a:r>
             <a:endParaRPr lang="en-US" sz="850" dirty="0"/>
           </a:p>
@@ -51673,7 +51694,7 @@
                 <a:ea typeface="Malgun Gothic" pitchFamily="34" charset="-122"/>
                 <a:cs typeface="Malgun Gothic" pitchFamily="34" charset="-120"/>
               </a:rPr>
-              <a:t>형상 만들기</a:t>
+              <a:t>형상 빌드</a:t>
             </a:r>
             <a:endParaRPr lang="en-US" sz="1050" dirty="0"/>
           </a:p>
@@ -51757,7 +51778,7 @@
                 <a:ea typeface="Malgun Gothic" pitchFamily="34" charset="-122"/>
                 <a:cs typeface="Malgun Gothic" pitchFamily="34" charset="-120"/>
               </a:rPr>
-              <a:t>치수 11개 입력</a:t>
+              <a:t>전역변수 11개 갱신</a:t>
             </a:r>
             <a:endParaRPr lang="en-US" sz="850" dirty="0"/>
           </a:p>
@@ -51777,7 +51798,7 @@
                 <a:ea typeface="Malgun Gothic" pitchFamily="34" charset="-122"/>
                 <a:cs typeface="Malgun Gothic" pitchFamily="34" charset="-120"/>
               </a:rPr>
-              <a:t>→ 형상 재생성 · STEP</a:t>
+              <a:t>→ 리빌드 · STEP</a:t>
             </a:r>
             <a:endParaRPr lang="en-US" sz="850" dirty="0"/>
           </a:p>
@@ -52287,7 +52308,7 @@
                 <a:ea typeface="Malgun Gothic" pitchFamily="34" charset="-122"/>
                 <a:cs typeface="Malgun Gothic" pitchFamily="34" charset="-120"/>
               </a:rPr>
-              <a:t>성능 지표 7개 계산</a:t>
+              <a:t>응답 7개 산출</a:t>
             </a:r>
             <a:endParaRPr lang="en-US" sz="850" dirty="0"/>
           </a:p>
@@ -52592,7 +52613,7 @@
                 <a:ea typeface="Malgun Gothic" pitchFamily="34" charset="-122"/>
                 <a:cs typeface="Malgun Gothic" pitchFamily="34" charset="-120"/>
               </a:rPr>
-              <a:t>예측 모델 7개 학습</a:t>
+              <a:t>GPR 모델 7개</a:t>
             </a:r>
             <a:endParaRPr lang="en-US" sz="850" dirty="0"/>
           </a:p>
@@ -53350,7 +53371,7 @@
                 <a:ea typeface="Malgun Gothic" pitchFamily="34" charset="-122"/>
                 <a:cs typeface="Malgun Gothic" pitchFamily="34" charset="-120"/>
               </a:rPr>
-              <a:t>결과 데이터</a:t>
+              <a:t>결과 데이터셋</a:t>
             </a:r>
             <a:endParaRPr lang="en-US" sz="880" dirty="0"/>
           </a:p>
@@ -53440,7 +53461,7 @@
                 <a:ea typeface="Malgun Gothic" pitchFamily="34" charset="-122"/>
                 <a:cs typeface="Malgun Gothic" pitchFamily="34" charset="-120"/>
               </a:rPr>
-              <a:t>남길 변수 · 예측 모델</a:t>
+              <a:t>활성 변수 · 대리모델</a:t>
             </a:r>
             <a:endParaRPr lang="en-US" sz="880" dirty="0"/>
           </a:p>
@@ -53516,7 +53537,7 @@
                 <a:ea typeface="Malgun Gothic" pitchFamily="34" charset="-122"/>
                 <a:cs typeface="Malgun Gothic" pitchFamily="34" charset="-120"/>
               </a:rPr>
-              <a:t>   파일 경로를 한 곳에서 관리      </a:t>
+              <a:t>   경로 일원화      </a:t>
             </a:r>
             <a:pPr indent="0" marL="0">
               <a:buNone/>
@@ -53544,7 +53565,7 @@
                 <a:ea typeface="Malgun Gothic" pitchFamily="34" charset="-122"/>
                 <a:cs typeface="Malgun Gothic" pitchFamily="34" charset="-120"/>
               </a:rPr>
-              <a:t>   성능 지표 목록을 한 곳에서 관리</a:t>
+              <a:t>   목적함수 · 제약조건 목록 일원화</a:t>
             </a:r>
             <a:endParaRPr lang="en-US" sz="930" dirty="0"/>
           </a:p>
@@ -53681,7 +53702,7 @@
                 <a:ea typeface="Malgun Gothic" pitchFamily="34" charset="-122"/>
                 <a:cs typeface="Malgun Gothic" pitchFamily="34" charset="-120"/>
               </a:rPr>
-              <a:t>선별이 끝나면 결과를 사람이 확인한 뒤 학습 단계로</a:t>
+              <a:t>선별이 끝나면 판정을 확인한 뒤 2단계로 진행</a:t>
             </a:r>
             <a:endParaRPr lang="en-US" sz="950" dirty="0"/>
           </a:p>
@@ -53745,7 +53766,7 @@
                 <a:ea typeface="Malgun Gothic" pitchFamily="34" charset="-122"/>
                 <a:cs typeface="Malgun Gothic" pitchFamily="34" charset="-120"/>
               </a:rPr>
-              <a:t>판정 기준을 코드에 고정</a:t>
+              <a:t>판정 규칙 코드화</a:t>
             </a:r>
             <a:endParaRPr lang="en-US" sz="1050" dirty="0"/>
           </a:p>
@@ -53784,7 +53805,7 @@
                 <a:ea typeface="Malgun Gothic" pitchFamily="34" charset="-122"/>
                 <a:cs typeface="Malgun Gothic" pitchFamily="34" charset="-120"/>
               </a:rPr>
-              <a:t>결과를 보고 기준을 바꿀 수 없게 미리 적어 둠</a:t>
+              <a:t>사전 고정 규칙을 코드에 명시 — 임의 변경 차단</a:t>
             </a:r>
             <a:endParaRPr lang="en-US" sz="950" dirty="0"/>
           </a:p>
@@ -53848,7 +53869,7 @@
                 <a:ea typeface="Malgun Gothic" pitchFamily="34" charset="-122"/>
                 <a:cs typeface="Malgun Gothic" pitchFamily="34" charset="-120"/>
               </a:rPr>
-              <a:t>기존 모듈 그대로 활용</a:t>
+              <a:t>자동해석 모듈 그대로 활용</a:t>
             </a:r>
             <a:endParaRPr lang="en-US" sz="1050" dirty="0"/>
           </a:p>
@@ -53887,7 +53908,7 @@
                 <a:ea typeface="Malgun Gothic" pitchFamily="34" charset="-122"/>
                 <a:cs typeface="Malgun Gothic" pitchFamily="34" charset="-120"/>
               </a:rPr>
-              <a:t>형상 · 해석 · 결과 모듈 위에 선별 · 학습 단계만 추가</a:t>
+              <a:t>형상 · 해석 · 결과 모듈 위에 선별 · 학습 단계 추가</a:t>
             </a:r>
             <a:endParaRPr lang="en-US" sz="950" dirty="0"/>
           </a:p>

--- a/2개월차_변수선별_및_대리모델구축.pptx
+++ b/2개월차_변수선별_및_대리모델구축.pptx
@@ -11670,7 +11670,7 @@
           <a:p>
             <a:r>
               <a:rPr lang="en-US" dirty="0"/>
-              <a:t>DSD(확정적 선별 설계)는 Jones와 Nachtsheim이 2011년에 제안한 3수준 선별 설계로, 변수 m개를 약 2m+1회 해석으로 선별한다. 회의 행렬 C(대각은 0, 나머지는 ±1이고 열끼리 직교)를 기본 14회로 쓰고, 부호를 모두 뒤집은 거울상 14회와 모든 변수가 중간값인 중심점 1회를 더해 29회가 된다. 3수준 완전요인은 17만 회가 넘고, 2수준인 Plackett-Burman은 12회로 끝나지만 곡률을 못 보고 주효과에 교호작용이 섞인다. DSD는 거울상 쌍에서 주효과는 부호가 뒤집히고 교호작용·곡률은 부호가 그대로라, 쌍의 차이에는 주효과만, 평균에는 교호작용·곡률만 남는다. 그래서 주효과 판정이 교호작용에 오염되지 않는다. 다만 교호작용끼리는 부분적으로 섞여 크기를 정확히 나눌 수 없으므로, 그 부분은 GPR 대리모델로 확인한다. 가짜 인자 3열은 어떤 치수와도 연결하지 않아 효과가 0이어야 하므로 판정의 기준선이 되고, 판정 규칙은 결과를 보기 전에 고정했다.</a:t>
+              <a:t>DSD(확정적 선별 설계)는 Jones와 Nachtsheim이 2011년에 제안한 3수준 선별 설계로, 변수 m개를 2m+1회 해석으로 주효과와 곡률을 판정한다. 회의 행렬 C(대각은 0, 나머지는 ±1이고 열끼리 직교)를 기본 14회로 쓰고, 부호를 모두 뒤집은 거울상 14회와 모든 변수가 중간값인 중심점 1회를 더해 29회가 된다. 행마다 변수 1개만 중간값이라 곡률까지 볼 수 있고, 주효과 열끼리는 직교라 각 변수의 효과를 독립적으로 추정한다. 거울상 쌍에서 주효과는 부호가 뒤집히고 교호작용·곡률은 부호가 그대로라, 쌍의 차이에는 주효과만, 평균에는 교호작용·곡률만 남는다. 그래서 주효과가 교호작용·곡률과 섞이지 않는다. 다만 2인자 교호작용끼리는 서로 일부 섞인다. 가짜 인자 3열은 어떤 치수와도 연결하지 않아 효과가 0이어야 하므로 판정의 기준선이 되고, 판정 규칙은 결과를 보기 전에 고정했다.</a:t>
             </a:r>
             <a:endParaRPr lang="en-US" dirty="0"/>
           </a:p>
@@ -26632,12 +26632,12 @@
         </p:nvSpPr>
         <p:spPr>
           <a:xfrm>
-            <a:off x="813816" y="1810512"/>
-            <a:ext cx="4846320" cy="786384"/>
+            <a:off x="813816" y="1792224"/>
+            <a:ext cx="4846320" cy="969264"/>
           </a:xfrm>
           <a:prstGeom prst="roundRect">
             <a:avLst>
-              <a:gd name="adj" fmla="val 6977"/>
+              <a:gd name="adj" fmla="val 5660"/>
             </a:avLst>
           </a:prstGeom>
           <a:solidFill>
@@ -26659,8 +26659,8 @@
         </p:nvSpPr>
         <p:spPr>
           <a:xfrm>
-            <a:off x="960120" y="1810512"/>
-            <a:ext cx="4572000" cy="786384"/>
+            <a:off x="960120" y="1792224"/>
+            <a:ext cx="4572000" cy="969264"/>
           </a:xfrm>
           <a:prstGeom prst="rect">
             <a:avLst/>
@@ -26679,7 +26679,7 @@
               <a:buNone/>
             </a:pPr>
             <a:r>
-              <a:rPr lang="en-US" sz="920" b="1" dirty="0">
+              <a:rPr lang="en-US" sz="900" b="1" dirty="0">
                 <a:solidFill>
                   <a:srgbClr val="16305B"/>
                 </a:solidFill>
@@ -26689,7 +26689,7 @@
               </a:rPr>
               <a:t>Definitive Screening Design  —  Jones &amp; Nachtsheim (2011)</a:t>
             </a:r>
-            <a:endParaRPr lang="en-US" sz="920" dirty="0"/>
+            <a:endParaRPr lang="en-US" sz="900" dirty="0"/>
           </a:p>
           <a:p>
             <a:pPr indent="0" marL="0">
@@ -26699,7 +26699,7 @@
               <a:buNone/>
             </a:pPr>
             <a:r>
-              <a:rPr lang="en-US" sz="920" dirty="0">
+              <a:rPr lang="en-US" sz="900" dirty="0">
                 <a:solidFill>
                   <a:srgbClr val="1C2733"/>
                 </a:solidFill>
@@ -26707,9 +26707,9 @@
                 <a:ea typeface="Malgun Gothic" pitchFamily="34" charset="-122"/>
                 <a:cs typeface="Malgun Gothic" pitchFamily="34" charset="-120"/>
               </a:rPr>
-              <a:t>3수준 선별 설계: 변수 m개를 약 2m + 1회 해석으로 주효과 · 곡률 판정</a:t>
+              <a:t>3수준 선별 설계 — 변수 m개를 2m + 1회 해석으로 주효과 · 곡률 판정</a:t>
             </a:r>
-            <a:endParaRPr lang="en-US" sz="920" dirty="0"/>
+            <a:endParaRPr lang="en-US" sz="900" dirty="0"/>
           </a:p>
           <a:p>
             <a:pPr indent="0" marL="0">
@@ -26719,17 +26719,37 @@
               <a:buNone/>
             </a:pPr>
             <a:r>
-              <a:rPr lang="en-US" sz="920" dirty="0">
+              <a:rPr lang="en-US" sz="900" dirty="0">
                 <a:solidFill>
-                  <a:srgbClr val="6B7A8F"/>
+                  <a:srgbClr val="1C2733"/>
                 </a:solidFill>
                 <a:latin typeface="Malgun Gothic" pitchFamily="34" charset="0"/>
                 <a:ea typeface="Malgun Gothic" pitchFamily="34" charset="-122"/>
                 <a:cs typeface="Malgun Gothic" pitchFamily="34" charset="-120"/>
               </a:rPr>
-              <a:t>구성: 회의 행렬 C (대각 0, 나머지 ±1, 열끼리 직교) → [ C ; −C ; 0 ]</a:t>
+              <a:t>구성 [ C ; −C ; 0 ]  —  C: 회의 행렬 (대각 0, 나머지 ±1, 열끼리 직교)</a:t>
             </a:r>
-            <a:endParaRPr lang="en-US" sz="920" dirty="0"/>
+            <a:endParaRPr lang="en-US" sz="900" dirty="0"/>
+          </a:p>
+          <a:p>
+            <a:pPr indent="0" marL="0">
+              <a:lnSpc>
+                <a:spcPct val="120000"/>
+              </a:lnSpc>
+              <a:buNone/>
+            </a:pPr>
+            <a:r>
+              <a:rPr lang="en-US" sz="900" dirty="0">
+                <a:solidFill>
+                  <a:srgbClr val="1C2733"/>
+                </a:solidFill>
+                <a:latin typeface="Malgun Gothic" pitchFamily="34" charset="0"/>
+                <a:ea typeface="Malgun Gothic" pitchFamily="34" charset="-122"/>
+                <a:cs typeface="Malgun Gothic" pitchFamily="34" charset="-120"/>
+              </a:rPr>
+              <a:t>−C: 부호를 모두 뒤집은 거울상  ·  0: 모든 변수 중간값 (중심점)</a:t>
+            </a:r>
+            <a:endParaRPr lang="en-US" sz="900" dirty="0"/>
           </a:p>
         </p:txBody>
       </p:sp>
@@ -26741,7 +26761,7 @@
         </p:nvSpPr>
         <p:spPr>
           <a:xfrm>
-            <a:off x="813816" y="2706624"/>
+            <a:off x="813816" y="2871216"/>
             <a:ext cx="4846320" cy="237744"/>
           </a:xfrm>
           <a:prstGeom prst="rect">
@@ -26766,7 +26786,7 @@
                 <a:ea typeface="Malgun Gothic" pitchFamily="34" charset="-122"/>
                 <a:cs typeface="Malgun Gothic" pitchFamily="34" charset="-120"/>
               </a:rPr>
-              <a:t>선별 설계 비교  —  변수 11개 기준</a:t>
+              <a:t>DSD의 특징</a:t>
             </a:r>
             <a:endParaRPr lang="en-US" sz="1050" dirty="0"/>
           </a:p>
@@ -26787,7 +26807,7 @@
           </p:nvPr>
         </p:nvGraphicFramePr>
         <p:xfrm>
-          <a:off x="813816" y="2980944"/>
+          <a:off x="813816" y="3127248"/>
           <a:ext cx="4846320" cy="914400"/>
         </p:xfrm>
         <a:graphic>
@@ -26795,12 +26815,10 @@
             <a:tbl>
               <a:tblPr/>
               <a:tblGrid>
-                <a:gridCol w="1325880"/>
-                <a:gridCol w="1463040"/>
-                <a:gridCol w="731520"/>
-                <a:gridCol w="1325880"/>
+                <a:gridCol w="1691640"/>
+                <a:gridCol w="3154680"/>
               </a:tblGrid>
-              <a:tr h="274320">
+              <a:tr h="265176">
                 <a:tc>
                   <a:txBody>
                     <a:bodyPr/>
@@ -26818,7 +26836,7 @@
                           <a:ea typeface="Malgun Gothic" pitchFamily="34" charset="-122"/>
                           <a:cs typeface="Malgun Gothic" pitchFamily="34" charset="-120"/>
                         </a:rPr>
-                        <a:t>설계</a:t>
+                        <a:t>항목</a:t>
                       </a:r>
                       <a:endParaRPr lang="en-US" sz="900" dirty="0">
                         <a:latin typeface="Malgun Gothic" charset="0"/>
@@ -26868,7 +26886,7 @@
                           <a:ea typeface="Malgun Gothic" pitchFamily="34" charset="-122"/>
                           <a:cs typeface="Malgun Gothic" pitchFamily="34" charset="-120"/>
                         </a:rPr>
-                        <a:t>해석 횟수</a:t>
+                        <a:t>의미</a:t>
                       </a:r>
                       <a:endParaRPr lang="en-US" sz="900" dirty="0">
                         <a:latin typeface="Malgun Gothic" charset="0"/>
@@ -26901,56 +26919,8 @@
                     </a:solidFill>
                   </a:tcPr>
                 </a:tc>
-                <a:tc>
-                  <a:txBody>
-                    <a:bodyPr/>
-                    <a:lstStyle/>
-                    <a:p>
-                      <a:pPr algn="ctr" indent="0" marL="0">
-                        <a:buNone/>
-                      </a:pPr>
-                      <a:r>
-                        <a:rPr lang="en-US" sz="900" b="1" dirty="0">
-                          <a:solidFill>
-                            <a:srgbClr val="16305B"/>
-                          </a:solidFill>
-                          <a:latin typeface="Malgun Gothic" pitchFamily="34" charset="0"/>
-                          <a:ea typeface="Malgun Gothic" pitchFamily="34" charset="-122"/>
-                          <a:cs typeface="Malgun Gothic" pitchFamily="34" charset="-120"/>
-                        </a:rPr>
-                        <a:t>곡률</a:t>
-                      </a:r>
-                      <a:endParaRPr lang="en-US" sz="900" dirty="0">
-                        <a:latin typeface="Malgun Gothic" charset="0"/>
-                        <a:ea typeface="Malgun Gothic" charset="0"/>
-                        <a:cs typeface="Malgun Gothic" charset="0"/>
-                      </a:endParaRPr>
-                    </a:p>
-                  </a:txBody>
-                  <a:tcPr marL="50800" marR="50800" marT="25400" marB="25400" anchor="ctr">
-                    <a:lnL w="0" cap="flat" cmpd="sng" algn="ctr">
-                      <a:noFill/>
-                    </a:lnL>
-                    <a:lnR w="0" cap="flat" cmpd="sng" algn="ctr">
-                      <a:noFill/>
-                    </a:lnR>
-                    <a:lnT w="0" cap="flat" cmpd="sng" algn="ctr">
-                      <a:noFill/>
-                    </a:lnT>
-                    <a:lnB w="6350" cap="flat" cmpd="sng" algn="ctr">
-                      <a:solidFill>
-                        <a:srgbClr val="DDE3EB"/>
-                      </a:solidFill>
-                      <a:prstDash val="solid"/>
-                      <a:round/>
-                      <a:headEnd type="none" w="med" len="med"/>
-                      <a:tailEnd type="none" w="med" len="med"/>
-                    </a:lnB>
-                    <a:solidFill>
-                      <a:srgbClr val="EEF2F7"/>
-                    </a:solidFill>
-                  </a:tcPr>
-                </a:tc>
+              </a:tr>
+              <a:tr h="265176">
                 <a:tc>
                   <a:txBody>
                     <a:bodyPr/>
@@ -26968,59 +26938,7 @@
                           <a:ea typeface="Malgun Gothic" pitchFamily="34" charset="-122"/>
                           <a:cs typeface="Malgun Gothic" pitchFamily="34" charset="-120"/>
                         </a:rPr>
-                        <a:t>주효과 – 교호작용</a:t>
-                      </a:r>
-                      <a:endParaRPr lang="en-US" sz="900" dirty="0">
-                        <a:latin typeface="Malgun Gothic" charset="0"/>
-                        <a:ea typeface="Malgun Gothic" charset="0"/>
-                        <a:cs typeface="Malgun Gothic" charset="0"/>
-                      </a:endParaRPr>
-                    </a:p>
-                  </a:txBody>
-                  <a:tcPr marL="50800" marR="50800" marT="25400" marB="25400" anchor="ctr">
-                    <a:lnL w="0" cap="flat" cmpd="sng" algn="ctr">
-                      <a:noFill/>
-                    </a:lnL>
-                    <a:lnR w="0" cap="flat" cmpd="sng" algn="ctr">
-                      <a:noFill/>
-                    </a:lnR>
-                    <a:lnT w="0" cap="flat" cmpd="sng" algn="ctr">
-                      <a:noFill/>
-                    </a:lnT>
-                    <a:lnB w="6350" cap="flat" cmpd="sng" algn="ctr">
-                      <a:solidFill>
-                        <a:srgbClr val="DDE3EB"/>
-                      </a:solidFill>
-                      <a:prstDash val="solid"/>
-                      <a:round/>
-                      <a:headEnd type="none" w="med" len="med"/>
-                      <a:tailEnd type="none" w="med" len="med"/>
-                    </a:lnB>
-                    <a:solidFill>
-                      <a:srgbClr val="EEF2F7"/>
-                    </a:solidFill>
-                  </a:tcPr>
-                </a:tc>
-              </a:tr>
-              <a:tr h="274320">
-                <a:tc>
-                  <a:txBody>
-                    <a:bodyPr/>
-                    <a:lstStyle/>
-                    <a:p>
-                      <a:pPr indent="0" marL="0">
-                        <a:buNone/>
-                      </a:pPr>
-                      <a:r>
-                        <a:rPr lang="en-US" sz="900" dirty="0">
-                          <a:solidFill>
-                            <a:srgbClr val="1C2733"/>
-                          </a:solidFill>
-                          <a:latin typeface="Malgun Gothic" pitchFamily="34" charset="0"/>
-                          <a:ea typeface="Malgun Gothic" pitchFamily="34" charset="-122"/>
-                          <a:cs typeface="Malgun Gothic" pitchFamily="34" charset="-120"/>
-                        </a:rPr>
-                        <a:t>3수준 완전요인</a:t>
+                        <a:t>3수준 (−1, 0, +1)</a:t>
                       </a:r>
                       <a:endParaRPr lang="en-US" sz="900" dirty="0">
                         <a:latin typeface="Malgun Gothic" charset="0"/>
@@ -27067,7 +26985,7 @@
                           <a:ea typeface="Malgun Gothic" pitchFamily="34" charset="-122"/>
                           <a:cs typeface="Malgun Gothic" pitchFamily="34" charset="-120"/>
                         </a:rPr>
-                        <a:t>177,147회 (약 5.7년)</a:t>
+                        <a:t>행마다 변수 1개만 중간값 → 곡률(2차 효과) 추정</a:t>
                       </a:r>
                       <a:endParaRPr lang="en-US" sz="900" dirty="0">
                         <a:latin typeface="Malgun Gothic" charset="0"/>
@@ -27097,24 +27015,26 @@
                     </a:lnB>
                   </a:tcPr>
                 </a:tc>
+              </a:tr>
+              <a:tr h="265176">
                 <a:tc>
                   <a:txBody>
                     <a:bodyPr/>
                     <a:lstStyle/>
                     <a:p>
-                      <a:pPr algn="ctr" indent="0" marL="0">
+                      <a:pPr indent="0" marL="0">
                         <a:buNone/>
                       </a:pPr>
                       <a:r>
-                        <a:rPr lang="en-US" sz="900" dirty="0">
+                        <a:rPr lang="en-US" sz="900" b="1" dirty="0">
                           <a:solidFill>
-                            <a:srgbClr val="1C2733"/>
+                            <a:srgbClr val="16305B"/>
                           </a:solidFill>
                           <a:latin typeface="Malgun Gothic" pitchFamily="34" charset="0"/>
                           <a:ea typeface="Malgun Gothic" pitchFamily="34" charset="-122"/>
                           <a:cs typeface="Malgun Gothic" pitchFamily="34" charset="-120"/>
                         </a:rPr>
-                        <a:t>○</a:t>
+                        <a:t>주효과끼리 직교</a:t>
                       </a:r>
                       <a:endParaRPr lang="en-US" sz="900" dirty="0">
                         <a:latin typeface="Malgun Gothic" charset="0"/>
@@ -27161,7 +27081,7 @@
                           <a:ea typeface="Malgun Gothic" pitchFamily="34" charset="-122"/>
                           <a:cs typeface="Malgun Gothic" pitchFamily="34" charset="-120"/>
                         </a:rPr>
-                        <a:t>섞이지 않음</a:t>
+                        <a:t>각 변수의 주효과를 서로 독립적으로 추정</a:t>
                       </a:r>
                       <a:endParaRPr lang="en-US" sz="900" dirty="0">
                         <a:latin typeface="Malgun Gothic" charset="0"/>
@@ -27192,7 +27112,7 @@
                   </a:tcPr>
                 </a:tc>
               </a:tr>
-              <a:tr h="274320">
+              <a:tr h="265176">
                 <a:tc>
                   <a:txBody>
                     <a:bodyPr/>
@@ -27202,15 +27122,15 @@
                         <a:buNone/>
                       </a:pPr>
                       <a:r>
-                        <a:rPr lang="en-US" sz="900" dirty="0">
+                        <a:rPr lang="en-US" sz="900" b="1" dirty="0">
                           <a:solidFill>
-                            <a:srgbClr val="1C2733"/>
+                            <a:srgbClr val="16305B"/>
                           </a:solidFill>
                           <a:latin typeface="Malgun Gothic" pitchFamily="34" charset="0"/>
                           <a:ea typeface="Malgun Gothic" pitchFamily="34" charset="-122"/>
                           <a:cs typeface="Malgun Gothic" pitchFamily="34" charset="-120"/>
                         </a:rPr>
-                        <a:t>Plackett-Burman</a:t>
+                        <a:t>주효과 ⊥ 교호작용 · 곡률</a:t>
                       </a:r>
                       <a:endParaRPr lang="en-US" sz="900" dirty="0">
                         <a:latin typeface="Malgun Gothic" charset="0"/>
@@ -27257,7 +27177,7 @@
                           <a:ea typeface="Malgun Gothic" pitchFamily="34" charset="-122"/>
                           <a:cs typeface="Malgun Gothic" pitchFamily="34" charset="-120"/>
                         </a:rPr>
-                        <a:t>12회</a:t>
+                        <a:t>거울상 구조로 주효과가 교호작용 · 곡률과 섞이지 않음</a:t>
                       </a:r>
                       <a:endParaRPr lang="en-US" sz="900" dirty="0">
                         <a:latin typeface="Malgun Gothic" charset="0"/>
@@ -27287,24 +27207,26 @@
                     </a:lnB>
                   </a:tcPr>
                 </a:tc>
+              </a:tr>
+              <a:tr h="265176">
                 <a:tc>
                   <a:txBody>
                     <a:bodyPr/>
                     <a:lstStyle/>
                     <a:p>
-                      <a:pPr algn="ctr" indent="0" marL="0">
+                      <a:pPr indent="0" marL="0">
                         <a:buNone/>
                       </a:pPr>
                       <a:r>
-                        <a:rPr lang="en-US" sz="900" dirty="0">
+                        <a:rPr lang="en-US" sz="900" b="1" dirty="0">
                           <a:solidFill>
-                            <a:srgbClr val="1C2733"/>
+                            <a:srgbClr val="16305B"/>
                           </a:solidFill>
                           <a:latin typeface="Malgun Gothic" pitchFamily="34" charset="0"/>
                           <a:ea typeface="Malgun Gothic" pitchFamily="34" charset="-122"/>
                           <a:cs typeface="Malgun Gothic" pitchFamily="34" charset="-120"/>
                         </a:rPr>
-                        <a:t>✕ (2수준)</a:t>
+                        <a:t>교호작용끼리 부분 교락</a:t>
                       </a:r>
                       <a:endParaRPr lang="en-US" sz="900" dirty="0">
                         <a:latin typeface="Malgun Gothic" charset="0"/>
@@ -27351,7 +27273,7 @@
                           <a:ea typeface="Malgun Gothic" pitchFamily="34" charset="-122"/>
                           <a:cs typeface="Malgun Gothic" pitchFamily="34" charset="-120"/>
                         </a:rPr>
-                        <a:t>부분적으로 섞임</a:t>
+                        <a:t>2인자 교호작용끼리는 서로 일부 섞임</a:t>
                       </a:r>
                       <a:endParaRPr lang="en-US" sz="900" dirty="0">
                         <a:latin typeface="Malgun Gothic" charset="0"/>
@@ -27382,208 +27304,6 @@
                   </a:tcPr>
                 </a:tc>
               </a:tr>
-              <a:tr h="274320">
-                <a:tc>
-                  <a:txBody>
-                    <a:bodyPr/>
-                    <a:lstStyle/>
-                    <a:p>
-                      <a:pPr indent="0" marL="0">
-                        <a:buNone/>
-                      </a:pPr>
-                      <a:r>
-                        <a:rPr lang="en-US" sz="900" b="1" dirty="0">
-                          <a:solidFill>
-                            <a:srgbClr val="16305B"/>
-                          </a:solidFill>
-                          <a:latin typeface="Malgun Gothic" pitchFamily="34" charset="0"/>
-                          <a:ea typeface="Malgun Gothic" pitchFamily="34" charset="-122"/>
-                          <a:cs typeface="Malgun Gothic" pitchFamily="34" charset="-120"/>
-                        </a:rPr>
-                        <a:t>DSD (본 과제)</a:t>
-                      </a:r>
-                      <a:endParaRPr lang="en-US" sz="900" dirty="0">
-                        <a:latin typeface="Malgun Gothic" charset="0"/>
-                        <a:ea typeface="Malgun Gothic" charset="0"/>
-                        <a:cs typeface="Malgun Gothic" charset="0"/>
-                      </a:endParaRPr>
-                    </a:p>
-                  </a:txBody>
-                  <a:tcPr marL="50800" marR="50800" marT="25400" marB="25400" anchor="ctr">
-                    <a:lnL w="0" cap="flat" cmpd="sng" algn="ctr">
-                      <a:noFill/>
-                    </a:lnL>
-                    <a:lnR w="0" cap="flat" cmpd="sng" algn="ctr">
-                      <a:noFill/>
-                    </a:lnR>
-                    <a:lnT w="0" cap="flat" cmpd="sng" algn="ctr">
-                      <a:noFill/>
-                    </a:lnT>
-                    <a:lnB w="6350" cap="flat" cmpd="sng" algn="ctr">
-                      <a:solidFill>
-                        <a:srgbClr val="DDE3EB"/>
-                      </a:solidFill>
-                      <a:prstDash val="solid"/>
-                      <a:round/>
-                      <a:headEnd type="none" w="med" len="med"/>
-                      <a:tailEnd type="none" w="med" len="med"/>
-                    </a:lnB>
-                    <a:solidFill>
-                      <a:srgbClr val="E8F6FA"/>
-                    </a:solidFill>
-                  </a:tcPr>
-                </a:tc>
-                <a:tc>
-                  <a:txBody>
-                    <a:bodyPr/>
-                    <a:lstStyle/>
-                    <a:p>
-                      <a:pPr indent="0" marL="0">
-                        <a:buNone/>
-                      </a:pPr>
-                      <a:r>
-                        <a:rPr lang="en-US" sz="900" b="1" dirty="0">
-                          <a:solidFill>
-                            <a:srgbClr val="16305B"/>
-                          </a:solidFill>
-                          <a:latin typeface="Malgun Gothic" pitchFamily="34" charset="0"/>
-                          <a:ea typeface="Malgun Gothic" pitchFamily="34" charset="-122"/>
-                          <a:cs typeface="Malgun Gothic" pitchFamily="34" charset="-120"/>
-                        </a:rPr>
-                        <a:t>29회 (약 8시간)</a:t>
-                      </a:r>
-                      <a:endParaRPr lang="en-US" sz="900" dirty="0">
-                        <a:latin typeface="Malgun Gothic" charset="0"/>
-                        <a:ea typeface="Malgun Gothic" charset="0"/>
-                        <a:cs typeface="Malgun Gothic" charset="0"/>
-                      </a:endParaRPr>
-                    </a:p>
-                  </a:txBody>
-                  <a:tcPr marL="50800" marR="50800" marT="25400" marB="25400" anchor="ctr">
-                    <a:lnL w="0" cap="flat" cmpd="sng" algn="ctr">
-                      <a:noFill/>
-                    </a:lnL>
-                    <a:lnR w="0" cap="flat" cmpd="sng" algn="ctr">
-                      <a:noFill/>
-                    </a:lnR>
-                    <a:lnT w="0" cap="flat" cmpd="sng" algn="ctr">
-                      <a:noFill/>
-                    </a:lnT>
-                    <a:lnB w="6350" cap="flat" cmpd="sng" algn="ctr">
-                      <a:solidFill>
-                        <a:srgbClr val="DDE3EB"/>
-                      </a:solidFill>
-                      <a:prstDash val="solid"/>
-                      <a:round/>
-                      <a:headEnd type="none" w="med" len="med"/>
-                      <a:tailEnd type="none" w="med" len="med"/>
-                    </a:lnB>
-                    <a:solidFill>
-                      <a:srgbClr val="E8F6FA"/>
-                    </a:solidFill>
-                  </a:tcPr>
-                </a:tc>
-                <a:tc>
-                  <a:txBody>
-                    <a:bodyPr/>
-                    <a:lstStyle/>
-                    <a:p>
-                      <a:pPr algn="ctr" indent="0" marL="0">
-                        <a:buNone/>
-                      </a:pPr>
-                      <a:r>
-                        <a:rPr lang="en-US" sz="900" b="1" dirty="0">
-                          <a:solidFill>
-                            <a:srgbClr val="16305B"/>
-                          </a:solidFill>
-                          <a:latin typeface="Malgun Gothic" pitchFamily="34" charset="0"/>
-                          <a:ea typeface="Malgun Gothic" pitchFamily="34" charset="-122"/>
-                          <a:cs typeface="Malgun Gothic" pitchFamily="34" charset="-120"/>
-                        </a:rPr>
-                        <a:t>○</a:t>
-                      </a:r>
-                      <a:endParaRPr lang="en-US" sz="900" dirty="0">
-                        <a:latin typeface="Malgun Gothic" charset="0"/>
-                        <a:ea typeface="Malgun Gothic" charset="0"/>
-                        <a:cs typeface="Malgun Gothic" charset="0"/>
-                      </a:endParaRPr>
-                    </a:p>
-                  </a:txBody>
-                  <a:tcPr marL="50800" marR="50800" marT="25400" marB="25400" anchor="ctr">
-                    <a:lnL w="0" cap="flat" cmpd="sng" algn="ctr">
-                      <a:noFill/>
-                    </a:lnL>
-                    <a:lnR w="0" cap="flat" cmpd="sng" algn="ctr">
-                      <a:noFill/>
-                    </a:lnR>
-                    <a:lnT w="0" cap="flat" cmpd="sng" algn="ctr">
-                      <a:noFill/>
-                    </a:lnT>
-                    <a:lnB w="6350" cap="flat" cmpd="sng" algn="ctr">
-                      <a:solidFill>
-                        <a:srgbClr val="DDE3EB"/>
-                      </a:solidFill>
-                      <a:prstDash val="solid"/>
-                      <a:round/>
-                      <a:headEnd type="none" w="med" len="med"/>
-                      <a:tailEnd type="none" w="med" len="med"/>
-                    </a:lnB>
-                    <a:solidFill>
-                      <a:srgbClr val="E8F6FA"/>
-                    </a:solidFill>
-                  </a:tcPr>
-                </a:tc>
-                <a:tc>
-                  <a:txBody>
-                    <a:bodyPr/>
-                    <a:lstStyle/>
-                    <a:p>
-                      <a:pPr indent="0" marL="0">
-                        <a:buNone/>
-                      </a:pPr>
-                      <a:r>
-                        <a:rPr lang="en-US" sz="900" b="1" dirty="0">
-                          <a:solidFill>
-                            <a:srgbClr val="16305B"/>
-                          </a:solidFill>
-                          <a:latin typeface="Malgun Gothic" pitchFamily="34" charset="0"/>
-                          <a:ea typeface="Malgun Gothic" pitchFamily="34" charset="-122"/>
-                          <a:cs typeface="Malgun Gothic" pitchFamily="34" charset="-120"/>
-                        </a:rPr>
-                        <a:t>섞이지 않음</a:t>
-                      </a:r>
-                      <a:endParaRPr lang="en-US" sz="900" dirty="0">
-                        <a:latin typeface="Malgun Gothic" charset="0"/>
-                        <a:ea typeface="Malgun Gothic" charset="0"/>
-                        <a:cs typeface="Malgun Gothic" charset="0"/>
-                      </a:endParaRPr>
-                    </a:p>
-                  </a:txBody>
-                  <a:tcPr marL="50800" marR="50800" marT="25400" marB="25400" anchor="ctr">
-                    <a:lnL w="0" cap="flat" cmpd="sng" algn="ctr">
-                      <a:noFill/>
-                    </a:lnL>
-                    <a:lnR w="0" cap="flat" cmpd="sng" algn="ctr">
-                      <a:noFill/>
-                    </a:lnR>
-                    <a:lnT w="0" cap="flat" cmpd="sng" algn="ctr">
-                      <a:noFill/>
-                    </a:lnT>
-                    <a:lnB w="6350" cap="flat" cmpd="sng" algn="ctr">
-                      <a:solidFill>
-                        <a:srgbClr val="DDE3EB"/>
-                      </a:solidFill>
-                      <a:prstDash val="solid"/>
-                      <a:round/>
-                      <a:headEnd type="none" w="med" len="med"/>
-                      <a:tailEnd type="none" w="med" len="med"/>
-                    </a:lnB>
-                    <a:solidFill>
-                      <a:srgbClr val="E8F6FA"/>
-                    </a:solidFill>
-                  </a:tcPr>
-                </a:tc>
-              </a:tr>
             </a:tbl>
           </a:graphicData>
         </a:graphic>
@@ -27596,46 +27316,7 @@
         </p:nvSpPr>
         <p:spPr>
           <a:xfrm>
-            <a:off x="813816" y="4114800"/>
-            <a:ext cx="4846320" cy="201168"/>
-          </a:xfrm>
-          <a:prstGeom prst="rect">
-            <a:avLst/>
-          </a:prstGeom>
-          <a:noFill/>
-          <a:ln/>
-        </p:spPr>
-        <p:txBody>
-          <a:bodyPr wrap="square" lIns="0" tIns="0" rIns="0" bIns="0" rtlCol="0" anchor="ctr"/>
-          <a:lstStyle/>
-          <a:p>
-            <a:pPr indent="0" marL="0">
-              <a:buNone/>
-            </a:pPr>
-            <a:r>
-              <a:rPr lang="en-US" sz="800" i="1" dirty="0">
-                <a:solidFill>
-                  <a:srgbClr val="6B7A8F"/>
-                </a:solidFill>
-                <a:latin typeface="Malgun Gothic" pitchFamily="34" charset="0"/>
-                <a:ea typeface="Malgun Gothic" pitchFamily="34" charset="-122"/>
-                <a:cs typeface="Malgun Gothic" pitchFamily="34" charset="-120"/>
-              </a:rPr>
-              <a:t>해석 1회 약 17분 기준  ·  DSD 29회 = 실제 변수 11열 + 가짜 인자 3열 (최소 25회)</a:t>
-            </a:r>
-            <a:endParaRPr lang="en-US" sz="800" dirty="0"/>
-          </a:p>
-        </p:txBody>
-      </p:sp>
-      <p:sp>
-        <p:nvSpPr>
-          <p:cNvPr id="14" name="Text 11"/>
-          <p:cNvSpPr txBox="1"/>
-          <p:nvPr/>
-        </p:nvSpPr>
-        <p:spPr>
-          <a:xfrm>
-            <a:off x="813816" y="4389120"/>
+            <a:off x="813816" y="4572000"/>
             <a:ext cx="4846320" cy="237744"/>
           </a:xfrm>
           <a:prstGeom prst="rect">
@@ -27681,7 +27362,7 @@
           </p:nvPr>
         </p:nvGraphicFramePr>
         <p:xfrm>
-          <a:off x="813816" y="4663440"/>
+          <a:off x="813816" y="4828032"/>
           <a:ext cx="4846320" cy="914400"/>
         </p:xfrm>
         <a:graphic>
@@ -27695,7 +27376,7 @@
                 <a:gridCol w="1097280"/>
                 <a:gridCol w="914400"/>
               </a:tblGrid>
-              <a:tr h="237744">
+              <a:tr h="228600">
                 <a:tc>
                   <a:txBody>
                     <a:bodyPr/>
@@ -27936,7 +27617,7 @@
                   </a:tcPr>
                 </a:tc>
               </a:tr>
-              <a:tr h="237744">
+              <a:tr h="228600">
                 <a:tc>
                   <a:txBody>
                     <a:bodyPr/>
@@ -28173,7 +27854,7 @@
                   </a:tcPr>
                 </a:tc>
               </a:tr>
-              <a:tr h="237744">
+              <a:tr h="228600">
                 <a:tc>
                   <a:txBody>
                     <a:bodyPr/>
@@ -28410,7 +28091,7 @@
                   </a:tcPr>
                 </a:tc>
               </a:tr>
-              <a:tr h="237744">
+              <a:tr h="228600">
                 <a:tc>
                   <a:txBody>
                     <a:bodyPr/>
@@ -28668,14 +28349,14 @@
       </p:graphicFrame>
       <p:sp>
         <p:nvSpPr>
-          <p:cNvPr id="16" name="Text 12"/>
+          <p:cNvPr id="15" name="Text 11"/>
           <p:cNvSpPr txBox="1"/>
           <p:nvPr/>
         </p:nvSpPr>
         <p:spPr>
           <a:xfrm>
-            <a:off x="813816" y="5669280"/>
-            <a:ext cx="4846320" cy="457200"/>
+            <a:off x="813816" y="5815584"/>
+            <a:ext cx="4846320" cy="274320"/>
           </a:xfrm>
           <a:prstGeom prst="rect">
             <a:avLst/>
@@ -28688,13 +28369,10 @@
           <a:lstStyle/>
           <a:p>
             <a:pPr indent="0" marL="0">
-              <a:lnSpc>
-                <a:spcPct val="120000"/>
-              </a:lnSpc>
               <a:buNone/>
             </a:pPr>
             <a:r>
-              <a:rPr lang="en-US" sz="880" b="1" dirty="0">
+              <a:rPr lang="en-US" sz="900" b="1" dirty="0">
                 <a:solidFill>
                   <a:srgbClr val="16305B"/>
                 </a:solidFill>
@@ -28704,33 +28382,13 @@
               </a:rPr>
               <a:t>→ 쌍의 차이에는 주효과만, 쌍의 평균에는 교호작용 · 곡률만 남음 (서로 직교)</a:t>
             </a:r>
-            <a:endParaRPr lang="en-US" sz="880" dirty="0"/>
-          </a:p>
-          <a:p>
-            <a:pPr indent="0" marL="0">
-              <a:lnSpc>
-                <a:spcPct val="120000"/>
-              </a:lnSpc>
-              <a:buNone/>
-            </a:pPr>
-            <a:r>
-              <a:rPr lang="en-US" sz="880" dirty="0">
-                <a:solidFill>
-                  <a:srgbClr val="0088A6"/>
-                </a:solidFill>
-                <a:latin typeface="Malgun Gothic" pitchFamily="34" charset="0"/>
-                <a:ea typeface="Malgun Gothic" pitchFamily="34" charset="-122"/>
-                <a:cs typeface="Malgun Gothic" pitchFamily="34" charset="-120"/>
-              </a:rPr>
-              <a:t>단, 교호작용끼리는 부분 교락 → 교호작용의 크기는 02 GPR에서 확인</a:t>
-            </a:r>
-            <a:endParaRPr lang="en-US" sz="880" dirty="0"/>
+            <a:endParaRPr lang="en-US" sz="900" dirty="0"/>
           </a:p>
         </p:txBody>
       </p:sp>
       <p:sp>
         <p:nvSpPr>
-          <p:cNvPr id="17" name="Shape 13"/>
+          <p:cNvPr id="16" name="Shape 12"/>
           <p:cNvSpPr/>
           <p:nvPr/>
         </p:nvSpPr>
@@ -28764,7 +28422,7 @@
       </p:sp>
       <p:sp>
         <p:nvSpPr>
-          <p:cNvPr id="18" name="Shape 14"/>
+          <p:cNvPr id="17" name="Shape 13"/>
           <p:cNvSpPr/>
           <p:nvPr/>
         </p:nvSpPr>
@@ -28789,7 +28447,7 @@
       </p:sp>
       <p:sp>
         <p:nvSpPr>
-          <p:cNvPr id="19" name="Text 15"/>
+          <p:cNvPr id="18" name="Text 14"/>
           <p:cNvSpPr txBox="1"/>
           <p:nvPr/>
         </p:nvSpPr>
@@ -28828,7 +28486,7 @@
       </p:sp>
       <p:sp>
         <p:nvSpPr>
-          <p:cNvPr id="20" name="Text 16"/>
+          <p:cNvPr id="19" name="Text 15"/>
           <p:cNvSpPr txBox="1"/>
           <p:nvPr/>
         </p:nvSpPr>
@@ -28867,7 +28525,7 @@
       </p:sp>
       <p:sp>
         <p:nvSpPr>
-          <p:cNvPr id="21" name="Text 17"/>
+          <p:cNvPr id="20" name="Text 16"/>
           <p:cNvSpPr txBox="1"/>
           <p:nvPr/>
         </p:nvSpPr>
@@ -28906,7 +28564,7 @@
       </p:sp>
       <p:sp>
         <p:nvSpPr>
-          <p:cNvPr id="22" name="Shape 18"/>
+          <p:cNvPr id="21" name="Shape 17"/>
           <p:cNvSpPr/>
           <p:nvPr/>
         </p:nvSpPr>
@@ -28929,7 +28587,7 @@
       </p:sp>
       <p:sp>
         <p:nvSpPr>
-          <p:cNvPr id="23" name="Shape 19"/>
+          <p:cNvPr id="22" name="Shape 18"/>
           <p:cNvSpPr/>
           <p:nvPr/>
         </p:nvSpPr>
@@ -28952,7 +28610,7 @@
       </p:sp>
       <p:sp>
         <p:nvSpPr>
-          <p:cNvPr id="24" name="Shape 20"/>
+          <p:cNvPr id="23" name="Shape 19"/>
           <p:cNvSpPr/>
           <p:nvPr/>
         </p:nvSpPr>
@@ -28977,7 +28635,7 @@
       </p:sp>
       <p:sp>
         <p:nvSpPr>
-          <p:cNvPr id="25" name="Shape 21"/>
+          <p:cNvPr id="24" name="Shape 20"/>
           <p:cNvSpPr/>
           <p:nvPr/>
         </p:nvSpPr>
@@ -29002,7 +28660,7 @@
       </p:sp>
       <p:sp>
         <p:nvSpPr>
-          <p:cNvPr id="26" name="Shape 22"/>
+          <p:cNvPr id="25" name="Shape 21"/>
           <p:cNvSpPr/>
           <p:nvPr/>
         </p:nvSpPr>
@@ -29027,7 +28685,7 @@
       </p:sp>
       <p:sp>
         <p:nvSpPr>
-          <p:cNvPr id="27" name="Shape 23"/>
+          <p:cNvPr id="26" name="Shape 22"/>
           <p:cNvSpPr/>
           <p:nvPr/>
         </p:nvSpPr>
@@ -29052,7 +28710,7 @@
       </p:sp>
       <p:sp>
         <p:nvSpPr>
-          <p:cNvPr id="28" name="Shape 24"/>
+          <p:cNvPr id="27" name="Shape 23"/>
           <p:cNvSpPr/>
           <p:nvPr/>
         </p:nvSpPr>
@@ -29077,7 +28735,7 @@
       </p:sp>
       <p:sp>
         <p:nvSpPr>
-          <p:cNvPr id="29" name="Shape 25"/>
+          <p:cNvPr id="28" name="Shape 24"/>
           <p:cNvSpPr/>
           <p:nvPr/>
         </p:nvSpPr>
@@ -29102,7 +28760,7 @@
       </p:sp>
       <p:sp>
         <p:nvSpPr>
-          <p:cNvPr id="30" name="Shape 26"/>
+          <p:cNvPr id="29" name="Shape 25"/>
           <p:cNvSpPr/>
           <p:nvPr/>
         </p:nvSpPr>
@@ -29127,7 +28785,7 @@
       </p:sp>
       <p:sp>
         <p:nvSpPr>
-          <p:cNvPr id="31" name="Shape 27"/>
+          <p:cNvPr id="30" name="Shape 26"/>
           <p:cNvSpPr/>
           <p:nvPr/>
         </p:nvSpPr>
@@ -29152,7 +28810,7 @@
       </p:sp>
       <p:sp>
         <p:nvSpPr>
-          <p:cNvPr id="32" name="Shape 28"/>
+          <p:cNvPr id="31" name="Shape 27"/>
           <p:cNvSpPr/>
           <p:nvPr/>
         </p:nvSpPr>
@@ -29177,7 +28835,7 @@
       </p:sp>
       <p:sp>
         <p:nvSpPr>
-          <p:cNvPr id="33" name="Shape 29"/>
+          <p:cNvPr id="32" name="Shape 28"/>
           <p:cNvSpPr/>
           <p:nvPr/>
         </p:nvSpPr>
@@ -29202,7 +28860,7 @@
       </p:sp>
       <p:sp>
         <p:nvSpPr>
-          <p:cNvPr id="34" name="Shape 30"/>
+          <p:cNvPr id="33" name="Shape 29"/>
           <p:cNvSpPr/>
           <p:nvPr/>
         </p:nvSpPr>
@@ -29227,7 +28885,7 @@
       </p:sp>
       <p:sp>
         <p:nvSpPr>
-          <p:cNvPr id="35" name="Shape 31"/>
+          <p:cNvPr id="34" name="Shape 30"/>
           <p:cNvSpPr/>
           <p:nvPr/>
         </p:nvSpPr>
@@ -29252,7 +28910,7 @@
       </p:sp>
       <p:sp>
         <p:nvSpPr>
-          <p:cNvPr id="36" name="Shape 32"/>
+          <p:cNvPr id="35" name="Shape 31"/>
           <p:cNvSpPr/>
           <p:nvPr/>
         </p:nvSpPr>
@@ -29277,7 +28935,7 @@
       </p:sp>
       <p:sp>
         <p:nvSpPr>
-          <p:cNvPr id="37" name="Shape 33"/>
+          <p:cNvPr id="36" name="Shape 32"/>
           <p:cNvSpPr/>
           <p:nvPr/>
         </p:nvSpPr>
@@ -29302,7 +28960,7 @@
       </p:sp>
       <p:sp>
         <p:nvSpPr>
-          <p:cNvPr id="38" name="Shape 34"/>
+          <p:cNvPr id="37" name="Shape 33"/>
           <p:cNvSpPr/>
           <p:nvPr/>
         </p:nvSpPr>
@@ -29327,7 +28985,7 @@
       </p:sp>
       <p:sp>
         <p:nvSpPr>
-          <p:cNvPr id="39" name="Shape 35"/>
+          <p:cNvPr id="38" name="Shape 34"/>
           <p:cNvSpPr/>
           <p:nvPr/>
         </p:nvSpPr>
@@ -29352,7 +29010,7 @@
       </p:sp>
       <p:sp>
         <p:nvSpPr>
-          <p:cNvPr id="40" name="Shape 36"/>
+          <p:cNvPr id="39" name="Shape 35"/>
           <p:cNvSpPr/>
           <p:nvPr/>
         </p:nvSpPr>
@@ -29377,7 +29035,7 @@
       </p:sp>
       <p:sp>
         <p:nvSpPr>
-          <p:cNvPr id="41" name="Shape 37"/>
+          <p:cNvPr id="40" name="Shape 36"/>
           <p:cNvSpPr/>
           <p:nvPr/>
         </p:nvSpPr>
@@ -29402,7 +29060,7 @@
       </p:sp>
       <p:sp>
         <p:nvSpPr>
-          <p:cNvPr id="42" name="Shape 38"/>
+          <p:cNvPr id="41" name="Shape 37"/>
           <p:cNvSpPr/>
           <p:nvPr/>
         </p:nvSpPr>
@@ -29427,7 +29085,7 @@
       </p:sp>
       <p:sp>
         <p:nvSpPr>
-          <p:cNvPr id="43" name="Shape 39"/>
+          <p:cNvPr id="42" name="Shape 38"/>
           <p:cNvSpPr/>
           <p:nvPr/>
         </p:nvSpPr>
@@ -29452,7 +29110,7 @@
       </p:sp>
       <p:sp>
         <p:nvSpPr>
-          <p:cNvPr id="44" name="Shape 40"/>
+          <p:cNvPr id="43" name="Shape 39"/>
           <p:cNvSpPr/>
           <p:nvPr/>
         </p:nvSpPr>
@@ -29477,7 +29135,7 @@
       </p:sp>
       <p:sp>
         <p:nvSpPr>
-          <p:cNvPr id="45" name="Shape 41"/>
+          <p:cNvPr id="44" name="Shape 40"/>
           <p:cNvSpPr/>
           <p:nvPr/>
         </p:nvSpPr>
@@ -29502,7 +29160,7 @@
       </p:sp>
       <p:sp>
         <p:nvSpPr>
-          <p:cNvPr id="46" name="Shape 42"/>
+          <p:cNvPr id="45" name="Shape 41"/>
           <p:cNvSpPr/>
           <p:nvPr/>
         </p:nvSpPr>
@@ -29527,7 +29185,7 @@
       </p:sp>
       <p:sp>
         <p:nvSpPr>
-          <p:cNvPr id="47" name="Shape 43"/>
+          <p:cNvPr id="46" name="Shape 42"/>
           <p:cNvSpPr/>
           <p:nvPr/>
         </p:nvSpPr>
@@ -29552,7 +29210,7 @@
       </p:sp>
       <p:sp>
         <p:nvSpPr>
-          <p:cNvPr id="48" name="Shape 44"/>
+          <p:cNvPr id="47" name="Shape 43"/>
           <p:cNvSpPr/>
           <p:nvPr/>
         </p:nvSpPr>
@@ -29577,7 +29235,7 @@
       </p:sp>
       <p:sp>
         <p:nvSpPr>
-          <p:cNvPr id="49" name="Shape 45"/>
+          <p:cNvPr id="48" name="Shape 44"/>
           <p:cNvSpPr/>
           <p:nvPr/>
         </p:nvSpPr>
@@ -29602,7 +29260,7 @@
       </p:sp>
       <p:sp>
         <p:nvSpPr>
-          <p:cNvPr id="50" name="Shape 46"/>
+          <p:cNvPr id="49" name="Shape 45"/>
           <p:cNvSpPr/>
           <p:nvPr/>
         </p:nvSpPr>
@@ -29627,7 +29285,7 @@
       </p:sp>
       <p:sp>
         <p:nvSpPr>
-          <p:cNvPr id="51" name="Shape 47"/>
+          <p:cNvPr id="50" name="Shape 46"/>
           <p:cNvSpPr/>
           <p:nvPr/>
         </p:nvSpPr>
@@ -29652,7 +29310,7 @@
       </p:sp>
       <p:sp>
         <p:nvSpPr>
-          <p:cNvPr id="52" name="Shape 48"/>
+          <p:cNvPr id="51" name="Shape 47"/>
           <p:cNvSpPr/>
           <p:nvPr/>
         </p:nvSpPr>
@@ -29677,7 +29335,7 @@
       </p:sp>
       <p:sp>
         <p:nvSpPr>
-          <p:cNvPr id="53" name="Shape 49"/>
+          <p:cNvPr id="52" name="Shape 48"/>
           <p:cNvSpPr/>
           <p:nvPr/>
         </p:nvSpPr>
@@ -29702,7 +29360,7 @@
       </p:sp>
       <p:sp>
         <p:nvSpPr>
-          <p:cNvPr id="54" name="Shape 50"/>
+          <p:cNvPr id="53" name="Shape 49"/>
           <p:cNvSpPr/>
           <p:nvPr/>
         </p:nvSpPr>
@@ -29727,7 +29385,7 @@
       </p:sp>
       <p:sp>
         <p:nvSpPr>
-          <p:cNvPr id="55" name="Shape 51"/>
+          <p:cNvPr id="54" name="Shape 50"/>
           <p:cNvSpPr/>
           <p:nvPr/>
         </p:nvSpPr>
@@ -29752,7 +29410,7 @@
       </p:sp>
       <p:sp>
         <p:nvSpPr>
-          <p:cNvPr id="56" name="Shape 52"/>
+          <p:cNvPr id="55" name="Shape 51"/>
           <p:cNvSpPr/>
           <p:nvPr/>
         </p:nvSpPr>
@@ -29777,7 +29435,7 @@
       </p:sp>
       <p:sp>
         <p:nvSpPr>
-          <p:cNvPr id="57" name="Shape 53"/>
+          <p:cNvPr id="56" name="Shape 52"/>
           <p:cNvSpPr/>
           <p:nvPr/>
         </p:nvSpPr>
@@ -29802,7 +29460,7 @@
       </p:sp>
       <p:sp>
         <p:nvSpPr>
-          <p:cNvPr id="58" name="Shape 54"/>
+          <p:cNvPr id="57" name="Shape 53"/>
           <p:cNvSpPr/>
           <p:nvPr/>
         </p:nvSpPr>
@@ -29827,7 +29485,7 @@
       </p:sp>
       <p:sp>
         <p:nvSpPr>
-          <p:cNvPr id="59" name="Shape 55"/>
+          <p:cNvPr id="58" name="Shape 54"/>
           <p:cNvSpPr/>
           <p:nvPr/>
         </p:nvSpPr>
@@ -29852,7 +29510,7 @@
       </p:sp>
       <p:sp>
         <p:nvSpPr>
-          <p:cNvPr id="60" name="Shape 56"/>
+          <p:cNvPr id="59" name="Shape 55"/>
           <p:cNvSpPr/>
           <p:nvPr/>
         </p:nvSpPr>
@@ -29877,7 +29535,7 @@
       </p:sp>
       <p:sp>
         <p:nvSpPr>
-          <p:cNvPr id="61" name="Shape 57"/>
+          <p:cNvPr id="60" name="Shape 56"/>
           <p:cNvSpPr/>
           <p:nvPr/>
         </p:nvSpPr>
@@ -29902,7 +29560,7 @@
       </p:sp>
       <p:sp>
         <p:nvSpPr>
-          <p:cNvPr id="62" name="Shape 58"/>
+          <p:cNvPr id="61" name="Shape 57"/>
           <p:cNvSpPr/>
           <p:nvPr/>
         </p:nvSpPr>
@@ -29927,7 +29585,7 @@
       </p:sp>
       <p:sp>
         <p:nvSpPr>
-          <p:cNvPr id="63" name="Shape 59"/>
+          <p:cNvPr id="62" name="Shape 58"/>
           <p:cNvSpPr/>
           <p:nvPr/>
         </p:nvSpPr>
@@ -29952,7 +29610,7 @@
       </p:sp>
       <p:sp>
         <p:nvSpPr>
-          <p:cNvPr id="64" name="Shape 60"/>
+          <p:cNvPr id="63" name="Shape 59"/>
           <p:cNvSpPr/>
           <p:nvPr/>
         </p:nvSpPr>
@@ -29977,7 +29635,7 @@
       </p:sp>
       <p:sp>
         <p:nvSpPr>
-          <p:cNvPr id="65" name="Shape 61"/>
+          <p:cNvPr id="64" name="Shape 60"/>
           <p:cNvSpPr/>
           <p:nvPr/>
         </p:nvSpPr>
@@ -30002,7 +29660,7 @@
       </p:sp>
       <p:sp>
         <p:nvSpPr>
-          <p:cNvPr id="66" name="Shape 62"/>
+          <p:cNvPr id="65" name="Shape 61"/>
           <p:cNvSpPr/>
           <p:nvPr/>
         </p:nvSpPr>
@@ -30027,7 +29685,7 @@
       </p:sp>
       <p:sp>
         <p:nvSpPr>
-          <p:cNvPr id="67" name="Shape 63"/>
+          <p:cNvPr id="66" name="Shape 62"/>
           <p:cNvSpPr/>
           <p:nvPr/>
         </p:nvSpPr>
@@ -30052,7 +29710,7 @@
       </p:sp>
       <p:sp>
         <p:nvSpPr>
-          <p:cNvPr id="68" name="Shape 64"/>
+          <p:cNvPr id="67" name="Shape 63"/>
           <p:cNvSpPr/>
           <p:nvPr/>
         </p:nvSpPr>
@@ -30077,7 +29735,7 @@
       </p:sp>
       <p:sp>
         <p:nvSpPr>
-          <p:cNvPr id="69" name="Shape 65"/>
+          <p:cNvPr id="68" name="Shape 64"/>
           <p:cNvSpPr/>
           <p:nvPr/>
         </p:nvSpPr>
@@ -30102,7 +29760,7 @@
       </p:sp>
       <p:sp>
         <p:nvSpPr>
-          <p:cNvPr id="70" name="Shape 66"/>
+          <p:cNvPr id="69" name="Shape 65"/>
           <p:cNvSpPr/>
           <p:nvPr/>
         </p:nvSpPr>
@@ -30127,7 +29785,7 @@
       </p:sp>
       <p:sp>
         <p:nvSpPr>
-          <p:cNvPr id="71" name="Shape 67"/>
+          <p:cNvPr id="70" name="Shape 66"/>
           <p:cNvSpPr/>
           <p:nvPr/>
         </p:nvSpPr>
@@ -30152,7 +29810,7 @@
       </p:sp>
       <p:sp>
         <p:nvSpPr>
-          <p:cNvPr id="72" name="Shape 68"/>
+          <p:cNvPr id="71" name="Shape 67"/>
           <p:cNvSpPr/>
           <p:nvPr/>
         </p:nvSpPr>
@@ -30177,7 +29835,7 @@
       </p:sp>
       <p:sp>
         <p:nvSpPr>
-          <p:cNvPr id="73" name="Shape 69"/>
+          <p:cNvPr id="72" name="Shape 68"/>
           <p:cNvSpPr/>
           <p:nvPr/>
         </p:nvSpPr>
@@ -30202,7 +29860,7 @@
       </p:sp>
       <p:sp>
         <p:nvSpPr>
-          <p:cNvPr id="74" name="Shape 70"/>
+          <p:cNvPr id="73" name="Shape 69"/>
           <p:cNvSpPr/>
           <p:nvPr/>
         </p:nvSpPr>
@@ -30227,7 +29885,7 @@
       </p:sp>
       <p:sp>
         <p:nvSpPr>
-          <p:cNvPr id="75" name="Shape 71"/>
+          <p:cNvPr id="74" name="Shape 70"/>
           <p:cNvSpPr/>
           <p:nvPr/>
         </p:nvSpPr>
@@ -30252,7 +29910,7 @@
       </p:sp>
       <p:sp>
         <p:nvSpPr>
-          <p:cNvPr id="76" name="Shape 72"/>
+          <p:cNvPr id="75" name="Shape 71"/>
           <p:cNvSpPr/>
           <p:nvPr/>
         </p:nvSpPr>
@@ -30277,7 +29935,7 @@
       </p:sp>
       <p:sp>
         <p:nvSpPr>
-          <p:cNvPr id="77" name="Shape 73"/>
+          <p:cNvPr id="76" name="Shape 72"/>
           <p:cNvSpPr/>
           <p:nvPr/>
         </p:nvSpPr>
@@ -30302,7 +29960,7 @@
       </p:sp>
       <p:sp>
         <p:nvSpPr>
-          <p:cNvPr id="78" name="Shape 74"/>
+          <p:cNvPr id="77" name="Shape 73"/>
           <p:cNvSpPr/>
           <p:nvPr/>
         </p:nvSpPr>
@@ -30327,7 +29985,7 @@
       </p:sp>
       <p:sp>
         <p:nvSpPr>
-          <p:cNvPr id="79" name="Shape 75"/>
+          <p:cNvPr id="78" name="Shape 74"/>
           <p:cNvSpPr/>
           <p:nvPr/>
         </p:nvSpPr>
@@ -30352,7 +30010,7 @@
       </p:sp>
       <p:sp>
         <p:nvSpPr>
-          <p:cNvPr id="80" name="Shape 76"/>
+          <p:cNvPr id="79" name="Shape 75"/>
           <p:cNvSpPr/>
           <p:nvPr/>
         </p:nvSpPr>
@@ -30377,7 +30035,7 @@
       </p:sp>
       <p:sp>
         <p:nvSpPr>
-          <p:cNvPr id="81" name="Shape 77"/>
+          <p:cNvPr id="80" name="Shape 76"/>
           <p:cNvSpPr/>
           <p:nvPr/>
         </p:nvSpPr>
@@ -30402,7 +30060,7 @@
       </p:sp>
       <p:sp>
         <p:nvSpPr>
-          <p:cNvPr id="82" name="Shape 78"/>
+          <p:cNvPr id="81" name="Shape 77"/>
           <p:cNvSpPr/>
           <p:nvPr/>
         </p:nvSpPr>
@@ -30427,7 +30085,7 @@
       </p:sp>
       <p:sp>
         <p:nvSpPr>
-          <p:cNvPr id="83" name="Shape 79"/>
+          <p:cNvPr id="82" name="Shape 78"/>
           <p:cNvSpPr/>
           <p:nvPr/>
         </p:nvSpPr>
@@ -30452,7 +30110,7 @@
       </p:sp>
       <p:sp>
         <p:nvSpPr>
-          <p:cNvPr id="84" name="Shape 80"/>
+          <p:cNvPr id="83" name="Shape 79"/>
           <p:cNvSpPr/>
           <p:nvPr/>
         </p:nvSpPr>
@@ -30477,7 +30135,7 @@
       </p:sp>
       <p:sp>
         <p:nvSpPr>
-          <p:cNvPr id="85" name="Shape 81"/>
+          <p:cNvPr id="84" name="Shape 80"/>
           <p:cNvSpPr/>
           <p:nvPr/>
         </p:nvSpPr>
@@ -30502,7 +30160,7 @@
       </p:sp>
       <p:sp>
         <p:nvSpPr>
-          <p:cNvPr id="86" name="Shape 82"/>
+          <p:cNvPr id="85" name="Shape 81"/>
           <p:cNvSpPr/>
           <p:nvPr/>
         </p:nvSpPr>
@@ -30527,7 +30185,7 @@
       </p:sp>
       <p:sp>
         <p:nvSpPr>
-          <p:cNvPr id="87" name="Shape 83"/>
+          <p:cNvPr id="86" name="Shape 82"/>
           <p:cNvSpPr/>
           <p:nvPr/>
         </p:nvSpPr>
@@ -30552,7 +30210,7 @@
       </p:sp>
       <p:sp>
         <p:nvSpPr>
-          <p:cNvPr id="88" name="Shape 84"/>
+          <p:cNvPr id="87" name="Shape 83"/>
           <p:cNvSpPr/>
           <p:nvPr/>
         </p:nvSpPr>
@@ -30577,7 +30235,7 @@
       </p:sp>
       <p:sp>
         <p:nvSpPr>
-          <p:cNvPr id="89" name="Shape 85"/>
+          <p:cNvPr id="88" name="Shape 84"/>
           <p:cNvSpPr/>
           <p:nvPr/>
         </p:nvSpPr>
@@ -30602,7 +30260,7 @@
       </p:sp>
       <p:sp>
         <p:nvSpPr>
-          <p:cNvPr id="90" name="Shape 86"/>
+          <p:cNvPr id="89" name="Shape 85"/>
           <p:cNvSpPr/>
           <p:nvPr/>
         </p:nvSpPr>
@@ -30627,7 +30285,7 @@
       </p:sp>
       <p:sp>
         <p:nvSpPr>
-          <p:cNvPr id="91" name="Shape 87"/>
+          <p:cNvPr id="90" name="Shape 86"/>
           <p:cNvSpPr/>
           <p:nvPr/>
         </p:nvSpPr>
@@ -30652,7 +30310,7 @@
       </p:sp>
       <p:sp>
         <p:nvSpPr>
-          <p:cNvPr id="92" name="Shape 88"/>
+          <p:cNvPr id="91" name="Shape 87"/>
           <p:cNvSpPr/>
           <p:nvPr/>
         </p:nvSpPr>
@@ -30677,7 +30335,7 @@
       </p:sp>
       <p:sp>
         <p:nvSpPr>
-          <p:cNvPr id="93" name="Shape 89"/>
+          <p:cNvPr id="92" name="Shape 88"/>
           <p:cNvSpPr/>
           <p:nvPr/>
         </p:nvSpPr>
@@ -30702,7 +30360,7 @@
       </p:sp>
       <p:sp>
         <p:nvSpPr>
-          <p:cNvPr id="94" name="Shape 90"/>
+          <p:cNvPr id="93" name="Shape 89"/>
           <p:cNvSpPr/>
           <p:nvPr/>
         </p:nvSpPr>
@@ -30727,7 +30385,7 @@
       </p:sp>
       <p:sp>
         <p:nvSpPr>
-          <p:cNvPr id="95" name="Shape 91"/>
+          <p:cNvPr id="94" name="Shape 90"/>
           <p:cNvSpPr/>
           <p:nvPr/>
         </p:nvSpPr>
@@ -30752,7 +30410,7 @@
       </p:sp>
       <p:sp>
         <p:nvSpPr>
-          <p:cNvPr id="96" name="Shape 92"/>
+          <p:cNvPr id="95" name="Shape 91"/>
           <p:cNvSpPr/>
           <p:nvPr/>
         </p:nvSpPr>
@@ -30777,7 +30435,7 @@
       </p:sp>
       <p:sp>
         <p:nvSpPr>
-          <p:cNvPr id="97" name="Shape 93"/>
+          <p:cNvPr id="96" name="Shape 92"/>
           <p:cNvSpPr/>
           <p:nvPr/>
         </p:nvSpPr>
@@ -30802,7 +30460,7 @@
       </p:sp>
       <p:sp>
         <p:nvSpPr>
-          <p:cNvPr id="98" name="Shape 94"/>
+          <p:cNvPr id="97" name="Shape 93"/>
           <p:cNvSpPr/>
           <p:nvPr/>
         </p:nvSpPr>
@@ -30827,7 +30485,7 @@
       </p:sp>
       <p:sp>
         <p:nvSpPr>
-          <p:cNvPr id="99" name="Shape 95"/>
+          <p:cNvPr id="98" name="Shape 94"/>
           <p:cNvSpPr/>
           <p:nvPr/>
         </p:nvSpPr>
@@ -30852,7 +30510,7 @@
       </p:sp>
       <p:sp>
         <p:nvSpPr>
-          <p:cNvPr id="100" name="Shape 96"/>
+          <p:cNvPr id="99" name="Shape 95"/>
           <p:cNvSpPr/>
           <p:nvPr/>
         </p:nvSpPr>
@@ -30877,7 +30535,7 @@
       </p:sp>
       <p:sp>
         <p:nvSpPr>
-          <p:cNvPr id="101" name="Shape 97"/>
+          <p:cNvPr id="100" name="Shape 96"/>
           <p:cNvSpPr/>
           <p:nvPr/>
         </p:nvSpPr>
@@ -30902,7 +30560,7 @@
       </p:sp>
       <p:sp>
         <p:nvSpPr>
-          <p:cNvPr id="102" name="Shape 98"/>
+          <p:cNvPr id="101" name="Shape 97"/>
           <p:cNvSpPr/>
           <p:nvPr/>
         </p:nvSpPr>
@@ -30927,7 +30585,7 @@
       </p:sp>
       <p:sp>
         <p:nvSpPr>
-          <p:cNvPr id="103" name="Shape 99"/>
+          <p:cNvPr id="102" name="Shape 98"/>
           <p:cNvSpPr/>
           <p:nvPr/>
         </p:nvSpPr>
@@ -30952,7 +30610,7 @@
       </p:sp>
       <p:sp>
         <p:nvSpPr>
-          <p:cNvPr id="104" name="Shape 100"/>
+          <p:cNvPr id="103" name="Shape 99"/>
           <p:cNvSpPr/>
           <p:nvPr/>
         </p:nvSpPr>
@@ -30977,7 +30635,7 @@
       </p:sp>
       <p:sp>
         <p:nvSpPr>
-          <p:cNvPr id="105" name="Shape 101"/>
+          <p:cNvPr id="104" name="Shape 100"/>
           <p:cNvSpPr/>
           <p:nvPr/>
         </p:nvSpPr>
@@ -31002,7 +30660,7 @@
       </p:sp>
       <p:sp>
         <p:nvSpPr>
-          <p:cNvPr id="106" name="Shape 102"/>
+          <p:cNvPr id="105" name="Shape 101"/>
           <p:cNvSpPr/>
           <p:nvPr/>
         </p:nvSpPr>
@@ -31027,7 +30685,7 @@
       </p:sp>
       <p:sp>
         <p:nvSpPr>
-          <p:cNvPr id="107" name="Shape 103"/>
+          <p:cNvPr id="106" name="Shape 102"/>
           <p:cNvSpPr/>
           <p:nvPr/>
         </p:nvSpPr>
@@ -31052,7 +30710,7 @@
       </p:sp>
       <p:sp>
         <p:nvSpPr>
-          <p:cNvPr id="108" name="Shape 104"/>
+          <p:cNvPr id="107" name="Shape 103"/>
           <p:cNvSpPr/>
           <p:nvPr/>
         </p:nvSpPr>
@@ -31077,7 +30735,7 @@
       </p:sp>
       <p:sp>
         <p:nvSpPr>
-          <p:cNvPr id="109" name="Shape 105"/>
+          <p:cNvPr id="108" name="Shape 104"/>
           <p:cNvSpPr/>
           <p:nvPr/>
         </p:nvSpPr>
@@ -31102,7 +30760,7 @@
       </p:sp>
       <p:sp>
         <p:nvSpPr>
-          <p:cNvPr id="110" name="Shape 106"/>
+          <p:cNvPr id="109" name="Shape 105"/>
           <p:cNvSpPr/>
           <p:nvPr/>
         </p:nvSpPr>
@@ -31127,7 +30785,7 @@
       </p:sp>
       <p:sp>
         <p:nvSpPr>
-          <p:cNvPr id="111" name="Shape 107"/>
+          <p:cNvPr id="110" name="Shape 106"/>
           <p:cNvSpPr/>
           <p:nvPr/>
         </p:nvSpPr>
@@ -31152,7 +30810,7 @@
       </p:sp>
       <p:sp>
         <p:nvSpPr>
-          <p:cNvPr id="112" name="Shape 108"/>
+          <p:cNvPr id="111" name="Shape 107"/>
           <p:cNvSpPr/>
           <p:nvPr/>
         </p:nvSpPr>
@@ -31177,7 +30835,7 @@
       </p:sp>
       <p:sp>
         <p:nvSpPr>
-          <p:cNvPr id="113" name="Shape 109"/>
+          <p:cNvPr id="112" name="Shape 108"/>
           <p:cNvSpPr/>
           <p:nvPr/>
         </p:nvSpPr>
@@ -31202,7 +30860,7 @@
       </p:sp>
       <p:sp>
         <p:nvSpPr>
-          <p:cNvPr id="114" name="Shape 110"/>
+          <p:cNvPr id="113" name="Shape 109"/>
           <p:cNvSpPr/>
           <p:nvPr/>
         </p:nvSpPr>
@@ -31227,7 +30885,7 @@
       </p:sp>
       <p:sp>
         <p:nvSpPr>
-          <p:cNvPr id="115" name="Shape 111"/>
+          <p:cNvPr id="114" name="Shape 110"/>
           <p:cNvSpPr/>
           <p:nvPr/>
         </p:nvSpPr>
@@ -31252,7 +30910,7 @@
       </p:sp>
       <p:sp>
         <p:nvSpPr>
-          <p:cNvPr id="116" name="Shape 112"/>
+          <p:cNvPr id="115" name="Shape 111"/>
           <p:cNvSpPr/>
           <p:nvPr/>
         </p:nvSpPr>
@@ -31277,7 +30935,7 @@
       </p:sp>
       <p:sp>
         <p:nvSpPr>
-          <p:cNvPr id="117" name="Shape 113"/>
+          <p:cNvPr id="116" name="Shape 112"/>
           <p:cNvSpPr/>
           <p:nvPr/>
         </p:nvSpPr>
@@ -31302,7 +30960,7 @@
       </p:sp>
       <p:sp>
         <p:nvSpPr>
-          <p:cNvPr id="118" name="Shape 114"/>
+          <p:cNvPr id="117" name="Shape 113"/>
           <p:cNvSpPr/>
           <p:nvPr/>
         </p:nvSpPr>
@@ -31327,7 +30985,7 @@
       </p:sp>
       <p:sp>
         <p:nvSpPr>
-          <p:cNvPr id="119" name="Shape 115"/>
+          <p:cNvPr id="118" name="Shape 114"/>
           <p:cNvSpPr/>
           <p:nvPr/>
         </p:nvSpPr>
@@ -31352,7 +31010,7 @@
       </p:sp>
       <p:sp>
         <p:nvSpPr>
-          <p:cNvPr id="120" name="Shape 116"/>
+          <p:cNvPr id="119" name="Shape 115"/>
           <p:cNvSpPr/>
           <p:nvPr/>
         </p:nvSpPr>
@@ -31377,7 +31035,7 @@
       </p:sp>
       <p:sp>
         <p:nvSpPr>
-          <p:cNvPr id="121" name="Shape 117"/>
+          <p:cNvPr id="120" name="Shape 116"/>
           <p:cNvSpPr/>
           <p:nvPr/>
         </p:nvSpPr>
@@ -31402,7 +31060,7 @@
       </p:sp>
       <p:sp>
         <p:nvSpPr>
-          <p:cNvPr id="122" name="Shape 118"/>
+          <p:cNvPr id="121" name="Shape 117"/>
           <p:cNvSpPr/>
           <p:nvPr/>
         </p:nvSpPr>
@@ -31427,7 +31085,7 @@
       </p:sp>
       <p:sp>
         <p:nvSpPr>
-          <p:cNvPr id="123" name="Shape 119"/>
+          <p:cNvPr id="122" name="Shape 118"/>
           <p:cNvSpPr/>
           <p:nvPr/>
         </p:nvSpPr>
@@ -31452,7 +31110,7 @@
       </p:sp>
       <p:sp>
         <p:nvSpPr>
-          <p:cNvPr id="124" name="Shape 120"/>
+          <p:cNvPr id="123" name="Shape 119"/>
           <p:cNvSpPr/>
           <p:nvPr/>
         </p:nvSpPr>
@@ -31477,7 +31135,7 @@
       </p:sp>
       <p:sp>
         <p:nvSpPr>
-          <p:cNvPr id="125" name="Shape 121"/>
+          <p:cNvPr id="124" name="Shape 120"/>
           <p:cNvSpPr/>
           <p:nvPr/>
         </p:nvSpPr>
@@ -31502,7 +31160,7 @@
       </p:sp>
       <p:sp>
         <p:nvSpPr>
-          <p:cNvPr id="126" name="Shape 122"/>
+          <p:cNvPr id="125" name="Shape 121"/>
           <p:cNvSpPr/>
           <p:nvPr/>
         </p:nvSpPr>
@@ -31527,7 +31185,7 @@
       </p:sp>
       <p:sp>
         <p:nvSpPr>
-          <p:cNvPr id="127" name="Shape 123"/>
+          <p:cNvPr id="126" name="Shape 122"/>
           <p:cNvSpPr/>
           <p:nvPr/>
         </p:nvSpPr>
@@ -31552,7 +31210,7 @@
       </p:sp>
       <p:sp>
         <p:nvSpPr>
-          <p:cNvPr id="128" name="Shape 124"/>
+          <p:cNvPr id="127" name="Shape 123"/>
           <p:cNvSpPr/>
           <p:nvPr/>
         </p:nvSpPr>
@@ -31577,7 +31235,7 @@
       </p:sp>
       <p:sp>
         <p:nvSpPr>
-          <p:cNvPr id="129" name="Shape 125"/>
+          <p:cNvPr id="128" name="Shape 124"/>
           <p:cNvSpPr/>
           <p:nvPr/>
         </p:nvSpPr>
@@ -31602,7 +31260,7 @@
       </p:sp>
       <p:sp>
         <p:nvSpPr>
-          <p:cNvPr id="130" name="Shape 126"/>
+          <p:cNvPr id="129" name="Shape 125"/>
           <p:cNvSpPr/>
           <p:nvPr/>
         </p:nvSpPr>
@@ -31627,7 +31285,7 @@
       </p:sp>
       <p:sp>
         <p:nvSpPr>
-          <p:cNvPr id="131" name="Shape 127"/>
+          <p:cNvPr id="130" name="Shape 126"/>
           <p:cNvSpPr/>
           <p:nvPr/>
         </p:nvSpPr>
@@ -31652,7 +31310,7 @@
       </p:sp>
       <p:sp>
         <p:nvSpPr>
-          <p:cNvPr id="132" name="Shape 128"/>
+          <p:cNvPr id="131" name="Shape 127"/>
           <p:cNvSpPr/>
           <p:nvPr/>
         </p:nvSpPr>
@@ -31677,7 +31335,7 @@
       </p:sp>
       <p:sp>
         <p:nvSpPr>
-          <p:cNvPr id="133" name="Shape 129"/>
+          <p:cNvPr id="132" name="Shape 128"/>
           <p:cNvSpPr/>
           <p:nvPr/>
         </p:nvSpPr>
@@ -31702,7 +31360,7 @@
       </p:sp>
       <p:sp>
         <p:nvSpPr>
-          <p:cNvPr id="134" name="Shape 130"/>
+          <p:cNvPr id="133" name="Shape 129"/>
           <p:cNvSpPr/>
           <p:nvPr/>
         </p:nvSpPr>
@@ -31727,7 +31385,7 @@
       </p:sp>
       <p:sp>
         <p:nvSpPr>
-          <p:cNvPr id="135" name="Shape 131"/>
+          <p:cNvPr id="134" name="Shape 130"/>
           <p:cNvSpPr/>
           <p:nvPr/>
         </p:nvSpPr>
@@ -31752,7 +31410,7 @@
       </p:sp>
       <p:sp>
         <p:nvSpPr>
-          <p:cNvPr id="136" name="Shape 132"/>
+          <p:cNvPr id="135" name="Shape 131"/>
           <p:cNvSpPr/>
           <p:nvPr/>
         </p:nvSpPr>
@@ -31777,7 +31435,7 @@
       </p:sp>
       <p:sp>
         <p:nvSpPr>
-          <p:cNvPr id="137" name="Shape 133"/>
+          <p:cNvPr id="136" name="Shape 132"/>
           <p:cNvSpPr/>
           <p:nvPr/>
         </p:nvSpPr>
@@ -31802,7 +31460,7 @@
       </p:sp>
       <p:sp>
         <p:nvSpPr>
-          <p:cNvPr id="138" name="Shape 134"/>
+          <p:cNvPr id="137" name="Shape 133"/>
           <p:cNvSpPr/>
           <p:nvPr/>
         </p:nvSpPr>
@@ -31827,7 +31485,7 @@
       </p:sp>
       <p:sp>
         <p:nvSpPr>
-          <p:cNvPr id="139" name="Shape 135"/>
+          <p:cNvPr id="138" name="Shape 134"/>
           <p:cNvSpPr/>
           <p:nvPr/>
         </p:nvSpPr>
@@ -31852,7 +31510,7 @@
       </p:sp>
       <p:sp>
         <p:nvSpPr>
-          <p:cNvPr id="140" name="Shape 136"/>
+          <p:cNvPr id="139" name="Shape 135"/>
           <p:cNvSpPr/>
           <p:nvPr/>
         </p:nvSpPr>
@@ -31877,7 +31535,7 @@
       </p:sp>
       <p:sp>
         <p:nvSpPr>
-          <p:cNvPr id="141" name="Shape 137"/>
+          <p:cNvPr id="140" name="Shape 136"/>
           <p:cNvSpPr/>
           <p:nvPr/>
         </p:nvSpPr>
@@ -31902,7 +31560,7 @@
       </p:sp>
       <p:sp>
         <p:nvSpPr>
-          <p:cNvPr id="142" name="Shape 138"/>
+          <p:cNvPr id="141" name="Shape 137"/>
           <p:cNvSpPr/>
           <p:nvPr/>
         </p:nvSpPr>
@@ -31927,7 +31585,7 @@
       </p:sp>
       <p:sp>
         <p:nvSpPr>
-          <p:cNvPr id="143" name="Shape 139"/>
+          <p:cNvPr id="142" name="Shape 138"/>
           <p:cNvSpPr/>
           <p:nvPr/>
         </p:nvSpPr>
@@ -31952,7 +31610,7 @@
       </p:sp>
       <p:sp>
         <p:nvSpPr>
-          <p:cNvPr id="144" name="Shape 140"/>
+          <p:cNvPr id="143" name="Shape 139"/>
           <p:cNvSpPr/>
           <p:nvPr/>
         </p:nvSpPr>
@@ -31977,7 +31635,7 @@
       </p:sp>
       <p:sp>
         <p:nvSpPr>
-          <p:cNvPr id="145" name="Shape 141"/>
+          <p:cNvPr id="144" name="Shape 140"/>
           <p:cNvSpPr/>
           <p:nvPr/>
         </p:nvSpPr>
@@ -32002,7 +31660,7 @@
       </p:sp>
       <p:sp>
         <p:nvSpPr>
-          <p:cNvPr id="146" name="Shape 142"/>
+          <p:cNvPr id="145" name="Shape 141"/>
           <p:cNvSpPr/>
           <p:nvPr/>
         </p:nvSpPr>
@@ -32027,7 +31685,7 @@
       </p:sp>
       <p:sp>
         <p:nvSpPr>
-          <p:cNvPr id="147" name="Shape 143"/>
+          <p:cNvPr id="146" name="Shape 142"/>
           <p:cNvSpPr/>
           <p:nvPr/>
         </p:nvSpPr>
@@ -32052,7 +31710,7 @@
       </p:sp>
       <p:sp>
         <p:nvSpPr>
-          <p:cNvPr id="148" name="Shape 144"/>
+          <p:cNvPr id="147" name="Shape 143"/>
           <p:cNvSpPr/>
           <p:nvPr/>
         </p:nvSpPr>
@@ -32077,7 +31735,7 @@
       </p:sp>
       <p:sp>
         <p:nvSpPr>
-          <p:cNvPr id="149" name="Shape 145"/>
+          <p:cNvPr id="148" name="Shape 144"/>
           <p:cNvSpPr/>
           <p:nvPr/>
         </p:nvSpPr>
@@ -32102,7 +31760,7 @@
       </p:sp>
       <p:sp>
         <p:nvSpPr>
-          <p:cNvPr id="150" name="Shape 146"/>
+          <p:cNvPr id="149" name="Shape 145"/>
           <p:cNvSpPr/>
           <p:nvPr/>
         </p:nvSpPr>
@@ -32127,7 +31785,7 @@
       </p:sp>
       <p:sp>
         <p:nvSpPr>
-          <p:cNvPr id="151" name="Shape 147"/>
+          <p:cNvPr id="150" name="Shape 146"/>
           <p:cNvSpPr/>
           <p:nvPr/>
         </p:nvSpPr>
@@ -32152,7 +31810,7 @@
       </p:sp>
       <p:sp>
         <p:nvSpPr>
-          <p:cNvPr id="152" name="Shape 148"/>
+          <p:cNvPr id="151" name="Shape 147"/>
           <p:cNvSpPr/>
           <p:nvPr/>
         </p:nvSpPr>
@@ -32177,7 +31835,7 @@
       </p:sp>
       <p:sp>
         <p:nvSpPr>
-          <p:cNvPr id="153" name="Shape 149"/>
+          <p:cNvPr id="152" name="Shape 148"/>
           <p:cNvSpPr/>
           <p:nvPr/>
         </p:nvSpPr>
@@ -32202,7 +31860,7 @@
       </p:sp>
       <p:sp>
         <p:nvSpPr>
-          <p:cNvPr id="154" name="Shape 150"/>
+          <p:cNvPr id="153" name="Shape 149"/>
           <p:cNvSpPr/>
           <p:nvPr/>
         </p:nvSpPr>
@@ -32227,7 +31885,7 @@
       </p:sp>
       <p:sp>
         <p:nvSpPr>
-          <p:cNvPr id="155" name="Shape 151"/>
+          <p:cNvPr id="154" name="Shape 150"/>
           <p:cNvSpPr/>
           <p:nvPr/>
         </p:nvSpPr>
@@ -32252,7 +31910,7 @@
       </p:sp>
       <p:sp>
         <p:nvSpPr>
-          <p:cNvPr id="156" name="Shape 152"/>
+          <p:cNvPr id="155" name="Shape 151"/>
           <p:cNvSpPr/>
           <p:nvPr/>
         </p:nvSpPr>
@@ -32277,7 +31935,7 @@
       </p:sp>
       <p:sp>
         <p:nvSpPr>
-          <p:cNvPr id="157" name="Shape 153"/>
+          <p:cNvPr id="156" name="Shape 152"/>
           <p:cNvSpPr/>
           <p:nvPr/>
         </p:nvSpPr>
@@ -32302,7 +31960,7 @@
       </p:sp>
       <p:sp>
         <p:nvSpPr>
-          <p:cNvPr id="158" name="Shape 154"/>
+          <p:cNvPr id="157" name="Shape 153"/>
           <p:cNvSpPr/>
           <p:nvPr/>
         </p:nvSpPr>
@@ -32327,7 +31985,7 @@
       </p:sp>
       <p:sp>
         <p:nvSpPr>
-          <p:cNvPr id="159" name="Shape 155"/>
+          <p:cNvPr id="158" name="Shape 154"/>
           <p:cNvSpPr/>
           <p:nvPr/>
         </p:nvSpPr>
@@ -32352,7 +32010,7 @@
       </p:sp>
       <p:sp>
         <p:nvSpPr>
-          <p:cNvPr id="160" name="Shape 156"/>
+          <p:cNvPr id="159" name="Shape 155"/>
           <p:cNvSpPr/>
           <p:nvPr/>
         </p:nvSpPr>
@@ -32377,7 +32035,7 @@
       </p:sp>
       <p:sp>
         <p:nvSpPr>
-          <p:cNvPr id="161" name="Shape 157"/>
+          <p:cNvPr id="160" name="Shape 156"/>
           <p:cNvSpPr/>
           <p:nvPr/>
         </p:nvSpPr>
@@ -32402,7 +32060,7 @@
       </p:sp>
       <p:sp>
         <p:nvSpPr>
-          <p:cNvPr id="162" name="Shape 158"/>
+          <p:cNvPr id="161" name="Shape 157"/>
           <p:cNvSpPr/>
           <p:nvPr/>
         </p:nvSpPr>
@@ -32427,7 +32085,7 @@
       </p:sp>
       <p:sp>
         <p:nvSpPr>
-          <p:cNvPr id="163" name="Shape 159"/>
+          <p:cNvPr id="162" name="Shape 158"/>
           <p:cNvSpPr/>
           <p:nvPr/>
         </p:nvSpPr>
@@ -32452,7 +32110,7 @@
       </p:sp>
       <p:sp>
         <p:nvSpPr>
-          <p:cNvPr id="164" name="Shape 160"/>
+          <p:cNvPr id="163" name="Shape 159"/>
           <p:cNvSpPr/>
           <p:nvPr/>
         </p:nvSpPr>
@@ -32477,7 +32135,7 @@
       </p:sp>
       <p:sp>
         <p:nvSpPr>
-          <p:cNvPr id="165" name="Shape 161"/>
+          <p:cNvPr id="164" name="Shape 160"/>
           <p:cNvSpPr/>
           <p:nvPr/>
         </p:nvSpPr>
@@ -32502,7 +32160,7 @@
       </p:sp>
       <p:sp>
         <p:nvSpPr>
-          <p:cNvPr id="166" name="Shape 162"/>
+          <p:cNvPr id="165" name="Shape 161"/>
           <p:cNvSpPr/>
           <p:nvPr/>
         </p:nvSpPr>
@@ -32527,7 +32185,7 @@
       </p:sp>
       <p:sp>
         <p:nvSpPr>
-          <p:cNvPr id="167" name="Shape 163"/>
+          <p:cNvPr id="166" name="Shape 162"/>
           <p:cNvSpPr/>
           <p:nvPr/>
         </p:nvSpPr>
@@ -32552,7 +32210,7 @@
       </p:sp>
       <p:sp>
         <p:nvSpPr>
-          <p:cNvPr id="168" name="Shape 164"/>
+          <p:cNvPr id="167" name="Shape 163"/>
           <p:cNvSpPr/>
           <p:nvPr/>
         </p:nvSpPr>
@@ -32577,7 +32235,7 @@
       </p:sp>
       <p:sp>
         <p:nvSpPr>
-          <p:cNvPr id="169" name="Shape 165"/>
+          <p:cNvPr id="168" name="Shape 164"/>
           <p:cNvSpPr/>
           <p:nvPr/>
         </p:nvSpPr>
@@ -32602,7 +32260,7 @@
       </p:sp>
       <p:sp>
         <p:nvSpPr>
-          <p:cNvPr id="170" name="Shape 166"/>
+          <p:cNvPr id="169" name="Shape 165"/>
           <p:cNvSpPr/>
           <p:nvPr/>
         </p:nvSpPr>
@@ -32627,7 +32285,7 @@
       </p:sp>
       <p:sp>
         <p:nvSpPr>
-          <p:cNvPr id="171" name="Shape 167"/>
+          <p:cNvPr id="170" name="Shape 166"/>
           <p:cNvSpPr/>
           <p:nvPr/>
         </p:nvSpPr>
@@ -32652,7 +32310,7 @@
       </p:sp>
       <p:sp>
         <p:nvSpPr>
-          <p:cNvPr id="172" name="Shape 168"/>
+          <p:cNvPr id="171" name="Shape 167"/>
           <p:cNvSpPr/>
           <p:nvPr/>
         </p:nvSpPr>
@@ -32677,7 +32335,7 @@
       </p:sp>
       <p:sp>
         <p:nvSpPr>
-          <p:cNvPr id="173" name="Shape 169"/>
+          <p:cNvPr id="172" name="Shape 168"/>
           <p:cNvSpPr/>
           <p:nvPr/>
         </p:nvSpPr>
@@ -32702,7 +32360,7 @@
       </p:sp>
       <p:sp>
         <p:nvSpPr>
-          <p:cNvPr id="174" name="Shape 170"/>
+          <p:cNvPr id="173" name="Shape 169"/>
           <p:cNvSpPr/>
           <p:nvPr/>
         </p:nvSpPr>
@@ -32727,7 +32385,7 @@
       </p:sp>
       <p:sp>
         <p:nvSpPr>
-          <p:cNvPr id="175" name="Shape 171"/>
+          <p:cNvPr id="174" name="Shape 170"/>
           <p:cNvSpPr/>
           <p:nvPr/>
         </p:nvSpPr>
@@ -32752,7 +32410,7 @@
       </p:sp>
       <p:sp>
         <p:nvSpPr>
-          <p:cNvPr id="176" name="Shape 172"/>
+          <p:cNvPr id="175" name="Shape 171"/>
           <p:cNvSpPr/>
           <p:nvPr/>
         </p:nvSpPr>
@@ -32777,7 +32435,7 @@
       </p:sp>
       <p:sp>
         <p:nvSpPr>
-          <p:cNvPr id="177" name="Shape 173"/>
+          <p:cNvPr id="176" name="Shape 172"/>
           <p:cNvSpPr/>
           <p:nvPr/>
         </p:nvSpPr>
@@ -32802,7 +32460,7 @@
       </p:sp>
       <p:sp>
         <p:nvSpPr>
-          <p:cNvPr id="178" name="Shape 174"/>
+          <p:cNvPr id="177" name="Shape 173"/>
           <p:cNvSpPr/>
           <p:nvPr/>
         </p:nvSpPr>
@@ -32827,7 +32485,7 @@
       </p:sp>
       <p:sp>
         <p:nvSpPr>
-          <p:cNvPr id="179" name="Shape 175"/>
+          <p:cNvPr id="178" name="Shape 174"/>
           <p:cNvSpPr/>
           <p:nvPr/>
         </p:nvSpPr>
@@ -32852,7 +32510,7 @@
       </p:sp>
       <p:sp>
         <p:nvSpPr>
-          <p:cNvPr id="180" name="Shape 176"/>
+          <p:cNvPr id="179" name="Shape 175"/>
           <p:cNvSpPr/>
           <p:nvPr/>
         </p:nvSpPr>
@@ -32877,7 +32535,7 @@
       </p:sp>
       <p:sp>
         <p:nvSpPr>
-          <p:cNvPr id="181" name="Shape 177"/>
+          <p:cNvPr id="180" name="Shape 176"/>
           <p:cNvSpPr/>
           <p:nvPr/>
         </p:nvSpPr>
@@ -32902,7 +32560,7 @@
       </p:sp>
       <p:sp>
         <p:nvSpPr>
-          <p:cNvPr id="182" name="Shape 178"/>
+          <p:cNvPr id="181" name="Shape 177"/>
           <p:cNvSpPr/>
           <p:nvPr/>
         </p:nvSpPr>
@@ -32927,7 +32585,7 @@
       </p:sp>
       <p:sp>
         <p:nvSpPr>
-          <p:cNvPr id="183" name="Shape 179"/>
+          <p:cNvPr id="182" name="Shape 178"/>
           <p:cNvSpPr/>
           <p:nvPr/>
         </p:nvSpPr>
@@ -32952,7 +32610,7 @@
       </p:sp>
       <p:sp>
         <p:nvSpPr>
-          <p:cNvPr id="184" name="Shape 180"/>
+          <p:cNvPr id="183" name="Shape 179"/>
           <p:cNvSpPr/>
           <p:nvPr/>
         </p:nvSpPr>
@@ -32977,7 +32635,7 @@
       </p:sp>
       <p:sp>
         <p:nvSpPr>
-          <p:cNvPr id="185" name="Shape 181"/>
+          <p:cNvPr id="184" name="Shape 180"/>
           <p:cNvSpPr/>
           <p:nvPr/>
         </p:nvSpPr>
@@ -33002,7 +32660,7 @@
       </p:sp>
       <p:sp>
         <p:nvSpPr>
-          <p:cNvPr id="186" name="Shape 182"/>
+          <p:cNvPr id="185" name="Shape 181"/>
           <p:cNvSpPr/>
           <p:nvPr/>
         </p:nvSpPr>
@@ -33027,7 +32685,7 @@
       </p:sp>
       <p:sp>
         <p:nvSpPr>
-          <p:cNvPr id="187" name="Shape 183"/>
+          <p:cNvPr id="186" name="Shape 182"/>
           <p:cNvSpPr/>
           <p:nvPr/>
         </p:nvSpPr>
@@ -33052,7 +32710,7 @@
       </p:sp>
       <p:sp>
         <p:nvSpPr>
-          <p:cNvPr id="188" name="Shape 184"/>
+          <p:cNvPr id="187" name="Shape 183"/>
           <p:cNvSpPr/>
           <p:nvPr/>
         </p:nvSpPr>
@@ -33077,7 +32735,7 @@
       </p:sp>
       <p:sp>
         <p:nvSpPr>
-          <p:cNvPr id="189" name="Shape 185"/>
+          <p:cNvPr id="188" name="Shape 184"/>
           <p:cNvSpPr/>
           <p:nvPr/>
         </p:nvSpPr>
@@ -33102,7 +32760,7 @@
       </p:sp>
       <p:sp>
         <p:nvSpPr>
-          <p:cNvPr id="190" name="Shape 186"/>
+          <p:cNvPr id="189" name="Shape 185"/>
           <p:cNvSpPr/>
           <p:nvPr/>
         </p:nvSpPr>
@@ -33127,7 +32785,7 @@
       </p:sp>
       <p:sp>
         <p:nvSpPr>
-          <p:cNvPr id="191" name="Shape 187"/>
+          <p:cNvPr id="190" name="Shape 186"/>
           <p:cNvSpPr/>
           <p:nvPr/>
         </p:nvSpPr>
@@ -33152,7 +32810,7 @@
       </p:sp>
       <p:sp>
         <p:nvSpPr>
-          <p:cNvPr id="192" name="Shape 188"/>
+          <p:cNvPr id="191" name="Shape 187"/>
           <p:cNvSpPr/>
           <p:nvPr/>
         </p:nvSpPr>
@@ -33177,7 +32835,7 @@
       </p:sp>
       <p:sp>
         <p:nvSpPr>
-          <p:cNvPr id="193" name="Shape 189"/>
+          <p:cNvPr id="192" name="Shape 188"/>
           <p:cNvSpPr/>
           <p:nvPr/>
         </p:nvSpPr>
@@ -33202,7 +32860,7 @@
       </p:sp>
       <p:sp>
         <p:nvSpPr>
-          <p:cNvPr id="194" name="Shape 190"/>
+          <p:cNvPr id="193" name="Shape 189"/>
           <p:cNvSpPr/>
           <p:nvPr/>
         </p:nvSpPr>
@@ -33227,7 +32885,7 @@
       </p:sp>
       <p:sp>
         <p:nvSpPr>
-          <p:cNvPr id="195" name="Shape 191"/>
+          <p:cNvPr id="194" name="Shape 190"/>
           <p:cNvSpPr/>
           <p:nvPr/>
         </p:nvSpPr>
@@ -33252,7 +32910,7 @@
       </p:sp>
       <p:sp>
         <p:nvSpPr>
-          <p:cNvPr id="196" name="Shape 192"/>
+          <p:cNvPr id="195" name="Shape 191"/>
           <p:cNvSpPr/>
           <p:nvPr/>
         </p:nvSpPr>
@@ -33277,7 +32935,7 @@
       </p:sp>
       <p:sp>
         <p:nvSpPr>
-          <p:cNvPr id="197" name="Shape 193"/>
+          <p:cNvPr id="196" name="Shape 192"/>
           <p:cNvSpPr/>
           <p:nvPr/>
         </p:nvSpPr>
@@ -33302,7 +32960,7 @@
       </p:sp>
       <p:sp>
         <p:nvSpPr>
-          <p:cNvPr id="198" name="Shape 194"/>
+          <p:cNvPr id="197" name="Shape 193"/>
           <p:cNvSpPr/>
           <p:nvPr/>
         </p:nvSpPr>
@@ -33327,7 +32985,7 @@
       </p:sp>
       <p:sp>
         <p:nvSpPr>
-          <p:cNvPr id="199" name="Shape 195"/>
+          <p:cNvPr id="198" name="Shape 194"/>
           <p:cNvSpPr/>
           <p:nvPr/>
         </p:nvSpPr>
@@ -33352,7 +33010,7 @@
       </p:sp>
       <p:sp>
         <p:nvSpPr>
-          <p:cNvPr id="200" name="Shape 196"/>
+          <p:cNvPr id="199" name="Shape 195"/>
           <p:cNvSpPr/>
           <p:nvPr/>
         </p:nvSpPr>
@@ -33377,7 +33035,7 @@
       </p:sp>
       <p:sp>
         <p:nvSpPr>
-          <p:cNvPr id="201" name="Shape 197"/>
+          <p:cNvPr id="200" name="Shape 196"/>
           <p:cNvSpPr/>
           <p:nvPr/>
         </p:nvSpPr>
@@ -33402,7 +33060,7 @@
       </p:sp>
       <p:sp>
         <p:nvSpPr>
-          <p:cNvPr id="202" name="Shape 198"/>
+          <p:cNvPr id="201" name="Shape 197"/>
           <p:cNvSpPr/>
           <p:nvPr/>
         </p:nvSpPr>
@@ -33427,7 +33085,7 @@
       </p:sp>
       <p:sp>
         <p:nvSpPr>
-          <p:cNvPr id="203" name="Shape 199"/>
+          <p:cNvPr id="202" name="Shape 198"/>
           <p:cNvSpPr/>
           <p:nvPr/>
         </p:nvSpPr>
@@ -33452,7 +33110,7 @@
       </p:sp>
       <p:sp>
         <p:nvSpPr>
-          <p:cNvPr id="204" name="Shape 200"/>
+          <p:cNvPr id="203" name="Shape 199"/>
           <p:cNvSpPr/>
           <p:nvPr/>
         </p:nvSpPr>
@@ -33477,7 +33135,7 @@
       </p:sp>
       <p:sp>
         <p:nvSpPr>
-          <p:cNvPr id="205" name="Shape 201"/>
+          <p:cNvPr id="204" name="Shape 200"/>
           <p:cNvSpPr/>
           <p:nvPr/>
         </p:nvSpPr>
@@ -33502,7 +33160,7 @@
       </p:sp>
       <p:sp>
         <p:nvSpPr>
-          <p:cNvPr id="206" name="Shape 202"/>
+          <p:cNvPr id="205" name="Shape 201"/>
           <p:cNvSpPr/>
           <p:nvPr/>
         </p:nvSpPr>
@@ -33527,7 +33185,7 @@
       </p:sp>
       <p:sp>
         <p:nvSpPr>
-          <p:cNvPr id="207" name="Shape 203"/>
+          <p:cNvPr id="206" name="Shape 202"/>
           <p:cNvSpPr/>
           <p:nvPr/>
         </p:nvSpPr>
@@ -33552,7 +33210,7 @@
       </p:sp>
       <p:sp>
         <p:nvSpPr>
-          <p:cNvPr id="208" name="Shape 204"/>
+          <p:cNvPr id="207" name="Shape 203"/>
           <p:cNvSpPr/>
           <p:nvPr/>
         </p:nvSpPr>
@@ -33577,7 +33235,7 @@
       </p:sp>
       <p:sp>
         <p:nvSpPr>
-          <p:cNvPr id="209" name="Shape 205"/>
+          <p:cNvPr id="208" name="Shape 204"/>
           <p:cNvSpPr/>
           <p:nvPr/>
         </p:nvSpPr>
@@ -33602,7 +33260,7 @@
       </p:sp>
       <p:sp>
         <p:nvSpPr>
-          <p:cNvPr id="210" name="Shape 206"/>
+          <p:cNvPr id="209" name="Shape 205"/>
           <p:cNvSpPr/>
           <p:nvPr/>
         </p:nvSpPr>
@@ -33627,7 +33285,7 @@
       </p:sp>
       <p:sp>
         <p:nvSpPr>
-          <p:cNvPr id="211" name="Shape 207"/>
+          <p:cNvPr id="210" name="Shape 206"/>
           <p:cNvSpPr/>
           <p:nvPr/>
         </p:nvSpPr>
@@ -33652,7 +33310,7 @@
       </p:sp>
       <p:sp>
         <p:nvSpPr>
-          <p:cNvPr id="212" name="Shape 208"/>
+          <p:cNvPr id="211" name="Shape 207"/>
           <p:cNvSpPr/>
           <p:nvPr/>
         </p:nvSpPr>
@@ -33677,7 +33335,7 @@
       </p:sp>
       <p:sp>
         <p:nvSpPr>
-          <p:cNvPr id="213" name="Shape 209"/>
+          <p:cNvPr id="212" name="Shape 208"/>
           <p:cNvSpPr/>
           <p:nvPr/>
         </p:nvSpPr>
@@ -33702,7 +33360,7 @@
       </p:sp>
       <p:sp>
         <p:nvSpPr>
-          <p:cNvPr id="214" name="Shape 210"/>
+          <p:cNvPr id="213" name="Shape 209"/>
           <p:cNvSpPr/>
           <p:nvPr/>
         </p:nvSpPr>
@@ -33727,7 +33385,7 @@
       </p:sp>
       <p:sp>
         <p:nvSpPr>
-          <p:cNvPr id="215" name="Shape 211"/>
+          <p:cNvPr id="214" name="Shape 210"/>
           <p:cNvSpPr/>
           <p:nvPr/>
         </p:nvSpPr>
@@ -33752,7 +33410,7 @@
       </p:sp>
       <p:sp>
         <p:nvSpPr>
-          <p:cNvPr id="216" name="Shape 212"/>
+          <p:cNvPr id="215" name="Shape 211"/>
           <p:cNvSpPr/>
           <p:nvPr/>
         </p:nvSpPr>
@@ -33777,7 +33435,7 @@
       </p:sp>
       <p:sp>
         <p:nvSpPr>
-          <p:cNvPr id="217" name="Shape 213"/>
+          <p:cNvPr id="216" name="Shape 212"/>
           <p:cNvSpPr/>
           <p:nvPr/>
         </p:nvSpPr>
@@ -33802,7 +33460,7 @@
       </p:sp>
       <p:sp>
         <p:nvSpPr>
-          <p:cNvPr id="218" name="Shape 214"/>
+          <p:cNvPr id="217" name="Shape 213"/>
           <p:cNvSpPr/>
           <p:nvPr/>
         </p:nvSpPr>
@@ -33827,7 +33485,7 @@
       </p:sp>
       <p:sp>
         <p:nvSpPr>
-          <p:cNvPr id="219" name="Shape 215"/>
+          <p:cNvPr id="218" name="Shape 214"/>
           <p:cNvSpPr/>
           <p:nvPr/>
         </p:nvSpPr>
@@ -33852,7 +33510,7 @@
       </p:sp>
       <p:sp>
         <p:nvSpPr>
-          <p:cNvPr id="220" name="Shape 216"/>
+          <p:cNvPr id="219" name="Shape 215"/>
           <p:cNvSpPr/>
           <p:nvPr/>
         </p:nvSpPr>
@@ -33877,7 +33535,7 @@
       </p:sp>
       <p:sp>
         <p:nvSpPr>
-          <p:cNvPr id="221" name="Shape 217"/>
+          <p:cNvPr id="220" name="Shape 216"/>
           <p:cNvSpPr/>
           <p:nvPr/>
         </p:nvSpPr>
@@ -33902,7 +33560,7 @@
       </p:sp>
       <p:sp>
         <p:nvSpPr>
-          <p:cNvPr id="222" name="Shape 218"/>
+          <p:cNvPr id="221" name="Shape 217"/>
           <p:cNvSpPr/>
           <p:nvPr/>
         </p:nvSpPr>
@@ -33927,7 +33585,7 @@
       </p:sp>
       <p:sp>
         <p:nvSpPr>
-          <p:cNvPr id="223" name="Shape 219"/>
+          <p:cNvPr id="222" name="Shape 218"/>
           <p:cNvSpPr/>
           <p:nvPr/>
         </p:nvSpPr>
@@ -33952,7 +33610,7 @@
       </p:sp>
       <p:sp>
         <p:nvSpPr>
-          <p:cNvPr id="224" name="Shape 220"/>
+          <p:cNvPr id="223" name="Shape 219"/>
           <p:cNvSpPr/>
           <p:nvPr/>
         </p:nvSpPr>
@@ -33977,7 +33635,7 @@
       </p:sp>
       <p:sp>
         <p:nvSpPr>
-          <p:cNvPr id="225" name="Shape 221"/>
+          <p:cNvPr id="224" name="Shape 220"/>
           <p:cNvSpPr/>
           <p:nvPr/>
         </p:nvSpPr>
@@ -34002,7 +33660,7 @@
       </p:sp>
       <p:sp>
         <p:nvSpPr>
-          <p:cNvPr id="226" name="Shape 222"/>
+          <p:cNvPr id="225" name="Shape 221"/>
           <p:cNvSpPr/>
           <p:nvPr/>
         </p:nvSpPr>
@@ -34027,7 +33685,7 @@
       </p:sp>
       <p:sp>
         <p:nvSpPr>
-          <p:cNvPr id="227" name="Shape 223"/>
+          <p:cNvPr id="226" name="Shape 222"/>
           <p:cNvSpPr/>
           <p:nvPr/>
         </p:nvSpPr>
@@ -34052,7 +33710,7 @@
       </p:sp>
       <p:sp>
         <p:nvSpPr>
-          <p:cNvPr id="228" name="Shape 224"/>
+          <p:cNvPr id="227" name="Shape 223"/>
           <p:cNvSpPr/>
           <p:nvPr/>
         </p:nvSpPr>
@@ -34077,7 +33735,7 @@
       </p:sp>
       <p:sp>
         <p:nvSpPr>
-          <p:cNvPr id="229" name="Shape 225"/>
+          <p:cNvPr id="228" name="Shape 224"/>
           <p:cNvSpPr/>
           <p:nvPr/>
         </p:nvSpPr>
@@ -34102,7 +33760,7 @@
       </p:sp>
       <p:sp>
         <p:nvSpPr>
-          <p:cNvPr id="230" name="Shape 226"/>
+          <p:cNvPr id="229" name="Shape 225"/>
           <p:cNvSpPr/>
           <p:nvPr/>
         </p:nvSpPr>
@@ -34127,7 +33785,7 @@
       </p:sp>
       <p:sp>
         <p:nvSpPr>
-          <p:cNvPr id="231" name="Shape 227"/>
+          <p:cNvPr id="230" name="Shape 226"/>
           <p:cNvSpPr/>
           <p:nvPr/>
         </p:nvSpPr>
@@ -34152,7 +33810,7 @@
       </p:sp>
       <p:sp>
         <p:nvSpPr>
-          <p:cNvPr id="232" name="Shape 228"/>
+          <p:cNvPr id="231" name="Shape 227"/>
           <p:cNvSpPr/>
           <p:nvPr/>
         </p:nvSpPr>
@@ -34177,7 +33835,7 @@
       </p:sp>
       <p:sp>
         <p:nvSpPr>
-          <p:cNvPr id="233" name="Shape 229"/>
+          <p:cNvPr id="232" name="Shape 228"/>
           <p:cNvSpPr/>
           <p:nvPr/>
         </p:nvSpPr>
@@ -34202,7 +33860,7 @@
       </p:sp>
       <p:sp>
         <p:nvSpPr>
-          <p:cNvPr id="234" name="Shape 230"/>
+          <p:cNvPr id="233" name="Shape 229"/>
           <p:cNvSpPr/>
           <p:nvPr/>
         </p:nvSpPr>
@@ -34227,7 +33885,7 @@
       </p:sp>
       <p:sp>
         <p:nvSpPr>
-          <p:cNvPr id="235" name="Shape 231"/>
+          <p:cNvPr id="234" name="Shape 230"/>
           <p:cNvSpPr/>
           <p:nvPr/>
         </p:nvSpPr>
@@ -34252,7 +33910,7 @@
       </p:sp>
       <p:sp>
         <p:nvSpPr>
-          <p:cNvPr id="236" name="Shape 232"/>
+          <p:cNvPr id="235" name="Shape 231"/>
           <p:cNvSpPr/>
           <p:nvPr/>
         </p:nvSpPr>
@@ -34277,7 +33935,7 @@
       </p:sp>
       <p:sp>
         <p:nvSpPr>
-          <p:cNvPr id="237" name="Shape 233"/>
+          <p:cNvPr id="236" name="Shape 232"/>
           <p:cNvSpPr/>
           <p:nvPr/>
         </p:nvSpPr>
@@ -34302,7 +33960,7 @@
       </p:sp>
       <p:sp>
         <p:nvSpPr>
-          <p:cNvPr id="238" name="Shape 234"/>
+          <p:cNvPr id="237" name="Shape 233"/>
           <p:cNvSpPr/>
           <p:nvPr/>
         </p:nvSpPr>
@@ -34327,7 +33985,7 @@
       </p:sp>
       <p:sp>
         <p:nvSpPr>
-          <p:cNvPr id="239" name="Shape 235"/>
+          <p:cNvPr id="238" name="Shape 234"/>
           <p:cNvSpPr/>
           <p:nvPr/>
         </p:nvSpPr>
@@ -34352,7 +34010,7 @@
       </p:sp>
       <p:sp>
         <p:nvSpPr>
-          <p:cNvPr id="240" name="Shape 236"/>
+          <p:cNvPr id="239" name="Shape 235"/>
           <p:cNvSpPr/>
           <p:nvPr/>
         </p:nvSpPr>
@@ -34377,7 +34035,7 @@
       </p:sp>
       <p:sp>
         <p:nvSpPr>
-          <p:cNvPr id="241" name="Shape 237"/>
+          <p:cNvPr id="240" name="Shape 236"/>
           <p:cNvSpPr/>
           <p:nvPr/>
         </p:nvSpPr>
@@ -34402,7 +34060,7 @@
       </p:sp>
       <p:sp>
         <p:nvSpPr>
-          <p:cNvPr id="242" name="Shape 238"/>
+          <p:cNvPr id="241" name="Shape 237"/>
           <p:cNvSpPr/>
           <p:nvPr/>
         </p:nvSpPr>
@@ -34427,7 +34085,7 @@
       </p:sp>
       <p:sp>
         <p:nvSpPr>
-          <p:cNvPr id="243" name="Shape 239"/>
+          <p:cNvPr id="242" name="Shape 238"/>
           <p:cNvSpPr/>
           <p:nvPr/>
         </p:nvSpPr>
@@ -34452,7 +34110,7 @@
       </p:sp>
       <p:sp>
         <p:nvSpPr>
-          <p:cNvPr id="244" name="Shape 240"/>
+          <p:cNvPr id="243" name="Shape 239"/>
           <p:cNvSpPr/>
           <p:nvPr/>
         </p:nvSpPr>
@@ -34477,7 +34135,7 @@
       </p:sp>
       <p:sp>
         <p:nvSpPr>
-          <p:cNvPr id="245" name="Shape 241"/>
+          <p:cNvPr id="244" name="Shape 240"/>
           <p:cNvSpPr/>
           <p:nvPr/>
         </p:nvSpPr>
@@ -34502,7 +34160,7 @@
       </p:sp>
       <p:sp>
         <p:nvSpPr>
-          <p:cNvPr id="246" name="Shape 242"/>
+          <p:cNvPr id="245" name="Shape 241"/>
           <p:cNvSpPr/>
           <p:nvPr/>
         </p:nvSpPr>
@@ -34527,7 +34185,7 @@
       </p:sp>
       <p:sp>
         <p:nvSpPr>
-          <p:cNvPr id="247" name="Shape 243"/>
+          <p:cNvPr id="246" name="Shape 242"/>
           <p:cNvSpPr/>
           <p:nvPr/>
         </p:nvSpPr>
@@ -34552,7 +34210,7 @@
       </p:sp>
       <p:sp>
         <p:nvSpPr>
-          <p:cNvPr id="248" name="Shape 244"/>
+          <p:cNvPr id="247" name="Shape 243"/>
           <p:cNvSpPr/>
           <p:nvPr/>
         </p:nvSpPr>
@@ -34577,7 +34235,7 @@
       </p:sp>
       <p:sp>
         <p:nvSpPr>
-          <p:cNvPr id="249" name="Shape 245"/>
+          <p:cNvPr id="248" name="Shape 244"/>
           <p:cNvSpPr/>
           <p:nvPr/>
         </p:nvSpPr>
@@ -34602,7 +34260,7 @@
       </p:sp>
       <p:sp>
         <p:nvSpPr>
-          <p:cNvPr id="250" name="Shape 246"/>
+          <p:cNvPr id="249" name="Shape 245"/>
           <p:cNvSpPr/>
           <p:nvPr/>
         </p:nvSpPr>
@@ -34627,7 +34285,7 @@
       </p:sp>
       <p:sp>
         <p:nvSpPr>
-          <p:cNvPr id="251" name="Shape 247"/>
+          <p:cNvPr id="250" name="Shape 246"/>
           <p:cNvSpPr/>
           <p:nvPr/>
         </p:nvSpPr>
@@ -34652,7 +34310,7 @@
       </p:sp>
       <p:sp>
         <p:nvSpPr>
-          <p:cNvPr id="252" name="Shape 248"/>
+          <p:cNvPr id="251" name="Shape 247"/>
           <p:cNvSpPr/>
           <p:nvPr/>
         </p:nvSpPr>
@@ -34677,7 +34335,7 @@
       </p:sp>
       <p:sp>
         <p:nvSpPr>
-          <p:cNvPr id="253" name="Shape 249"/>
+          <p:cNvPr id="252" name="Shape 248"/>
           <p:cNvSpPr/>
           <p:nvPr/>
         </p:nvSpPr>
@@ -34702,7 +34360,7 @@
       </p:sp>
       <p:sp>
         <p:nvSpPr>
-          <p:cNvPr id="254" name="Shape 250"/>
+          <p:cNvPr id="253" name="Shape 249"/>
           <p:cNvSpPr/>
           <p:nvPr/>
         </p:nvSpPr>
@@ -34727,7 +34385,7 @@
       </p:sp>
       <p:sp>
         <p:nvSpPr>
-          <p:cNvPr id="255" name="Shape 251"/>
+          <p:cNvPr id="254" name="Shape 250"/>
           <p:cNvSpPr/>
           <p:nvPr/>
         </p:nvSpPr>
@@ -34752,7 +34410,7 @@
       </p:sp>
       <p:sp>
         <p:nvSpPr>
-          <p:cNvPr id="256" name="Shape 252"/>
+          <p:cNvPr id="255" name="Shape 251"/>
           <p:cNvSpPr/>
           <p:nvPr/>
         </p:nvSpPr>
@@ -34777,7 +34435,7 @@
       </p:sp>
       <p:sp>
         <p:nvSpPr>
-          <p:cNvPr id="257" name="Shape 253"/>
+          <p:cNvPr id="256" name="Shape 252"/>
           <p:cNvSpPr/>
           <p:nvPr/>
         </p:nvSpPr>
@@ -34802,7 +34460,7 @@
       </p:sp>
       <p:sp>
         <p:nvSpPr>
-          <p:cNvPr id="258" name="Shape 254"/>
+          <p:cNvPr id="257" name="Shape 253"/>
           <p:cNvSpPr/>
           <p:nvPr/>
         </p:nvSpPr>
@@ -34827,7 +34485,7 @@
       </p:sp>
       <p:sp>
         <p:nvSpPr>
-          <p:cNvPr id="259" name="Shape 255"/>
+          <p:cNvPr id="258" name="Shape 254"/>
           <p:cNvSpPr/>
           <p:nvPr/>
         </p:nvSpPr>
@@ -34852,7 +34510,7 @@
       </p:sp>
       <p:sp>
         <p:nvSpPr>
-          <p:cNvPr id="260" name="Shape 256"/>
+          <p:cNvPr id="259" name="Shape 255"/>
           <p:cNvSpPr/>
           <p:nvPr/>
         </p:nvSpPr>
@@ -34877,7 +34535,7 @@
       </p:sp>
       <p:sp>
         <p:nvSpPr>
-          <p:cNvPr id="261" name="Shape 257"/>
+          <p:cNvPr id="260" name="Shape 256"/>
           <p:cNvSpPr/>
           <p:nvPr/>
         </p:nvSpPr>
@@ -34902,7 +34560,7 @@
       </p:sp>
       <p:sp>
         <p:nvSpPr>
-          <p:cNvPr id="262" name="Shape 258"/>
+          <p:cNvPr id="261" name="Shape 257"/>
           <p:cNvSpPr/>
           <p:nvPr/>
         </p:nvSpPr>
@@ -34927,7 +34585,7 @@
       </p:sp>
       <p:sp>
         <p:nvSpPr>
-          <p:cNvPr id="263" name="Shape 259"/>
+          <p:cNvPr id="262" name="Shape 258"/>
           <p:cNvSpPr/>
           <p:nvPr/>
         </p:nvSpPr>
@@ -34952,7 +34610,7 @@
       </p:sp>
       <p:sp>
         <p:nvSpPr>
-          <p:cNvPr id="264" name="Shape 260"/>
+          <p:cNvPr id="263" name="Shape 259"/>
           <p:cNvSpPr/>
           <p:nvPr/>
         </p:nvSpPr>
@@ -34977,7 +34635,7 @@
       </p:sp>
       <p:sp>
         <p:nvSpPr>
-          <p:cNvPr id="265" name="Shape 261"/>
+          <p:cNvPr id="264" name="Shape 260"/>
           <p:cNvSpPr/>
           <p:nvPr/>
         </p:nvSpPr>
@@ -35002,7 +34660,7 @@
       </p:sp>
       <p:sp>
         <p:nvSpPr>
-          <p:cNvPr id="266" name="Shape 262"/>
+          <p:cNvPr id="265" name="Shape 261"/>
           <p:cNvSpPr/>
           <p:nvPr/>
         </p:nvSpPr>
@@ -35027,7 +34685,7 @@
       </p:sp>
       <p:sp>
         <p:nvSpPr>
-          <p:cNvPr id="267" name="Shape 263"/>
+          <p:cNvPr id="266" name="Shape 262"/>
           <p:cNvSpPr/>
           <p:nvPr/>
         </p:nvSpPr>
@@ -35052,7 +34710,7 @@
       </p:sp>
       <p:sp>
         <p:nvSpPr>
-          <p:cNvPr id="268" name="Shape 264"/>
+          <p:cNvPr id="267" name="Shape 263"/>
           <p:cNvSpPr/>
           <p:nvPr/>
         </p:nvSpPr>
@@ -35077,7 +34735,7 @@
       </p:sp>
       <p:sp>
         <p:nvSpPr>
-          <p:cNvPr id="269" name="Shape 265"/>
+          <p:cNvPr id="268" name="Shape 264"/>
           <p:cNvSpPr/>
           <p:nvPr/>
         </p:nvSpPr>
@@ -35102,7 +34760,7 @@
       </p:sp>
       <p:sp>
         <p:nvSpPr>
-          <p:cNvPr id="270" name="Shape 266"/>
+          <p:cNvPr id="269" name="Shape 265"/>
           <p:cNvSpPr/>
           <p:nvPr/>
         </p:nvSpPr>
@@ -35127,7 +34785,7 @@
       </p:sp>
       <p:sp>
         <p:nvSpPr>
-          <p:cNvPr id="271" name="Shape 267"/>
+          <p:cNvPr id="270" name="Shape 266"/>
           <p:cNvSpPr/>
           <p:nvPr/>
         </p:nvSpPr>
@@ -35152,7 +34810,7 @@
       </p:sp>
       <p:sp>
         <p:nvSpPr>
-          <p:cNvPr id="272" name="Shape 268"/>
+          <p:cNvPr id="271" name="Shape 267"/>
           <p:cNvSpPr/>
           <p:nvPr/>
         </p:nvSpPr>
@@ -35177,7 +34835,7 @@
       </p:sp>
       <p:sp>
         <p:nvSpPr>
-          <p:cNvPr id="273" name="Shape 269"/>
+          <p:cNvPr id="272" name="Shape 268"/>
           <p:cNvSpPr/>
           <p:nvPr/>
         </p:nvSpPr>
@@ -35202,7 +34860,7 @@
       </p:sp>
       <p:sp>
         <p:nvSpPr>
-          <p:cNvPr id="274" name="Shape 270"/>
+          <p:cNvPr id="273" name="Shape 269"/>
           <p:cNvSpPr/>
           <p:nvPr/>
         </p:nvSpPr>
@@ -35227,7 +34885,7 @@
       </p:sp>
       <p:sp>
         <p:nvSpPr>
-          <p:cNvPr id="275" name="Shape 271"/>
+          <p:cNvPr id="274" name="Shape 270"/>
           <p:cNvSpPr/>
           <p:nvPr/>
         </p:nvSpPr>
@@ -35252,7 +34910,7 @@
       </p:sp>
       <p:sp>
         <p:nvSpPr>
-          <p:cNvPr id="276" name="Shape 272"/>
+          <p:cNvPr id="275" name="Shape 271"/>
           <p:cNvSpPr/>
           <p:nvPr/>
         </p:nvSpPr>
@@ -35277,7 +34935,7 @@
       </p:sp>
       <p:sp>
         <p:nvSpPr>
-          <p:cNvPr id="277" name="Shape 273"/>
+          <p:cNvPr id="276" name="Shape 272"/>
           <p:cNvSpPr/>
           <p:nvPr/>
         </p:nvSpPr>
@@ -35302,7 +34960,7 @@
       </p:sp>
       <p:sp>
         <p:nvSpPr>
-          <p:cNvPr id="278" name="Shape 274"/>
+          <p:cNvPr id="277" name="Shape 273"/>
           <p:cNvSpPr/>
           <p:nvPr/>
         </p:nvSpPr>
@@ -35327,7 +34985,7 @@
       </p:sp>
       <p:sp>
         <p:nvSpPr>
-          <p:cNvPr id="279" name="Shape 275"/>
+          <p:cNvPr id="278" name="Shape 274"/>
           <p:cNvSpPr/>
           <p:nvPr/>
         </p:nvSpPr>
@@ -35352,7 +35010,7 @@
       </p:sp>
       <p:sp>
         <p:nvSpPr>
-          <p:cNvPr id="280" name="Shape 276"/>
+          <p:cNvPr id="279" name="Shape 275"/>
           <p:cNvSpPr/>
           <p:nvPr/>
         </p:nvSpPr>
@@ -35377,7 +35035,7 @@
       </p:sp>
       <p:sp>
         <p:nvSpPr>
-          <p:cNvPr id="281" name="Shape 277"/>
+          <p:cNvPr id="280" name="Shape 276"/>
           <p:cNvSpPr/>
           <p:nvPr/>
         </p:nvSpPr>
@@ -35402,7 +35060,7 @@
       </p:sp>
       <p:sp>
         <p:nvSpPr>
-          <p:cNvPr id="282" name="Shape 278"/>
+          <p:cNvPr id="281" name="Shape 277"/>
           <p:cNvSpPr/>
           <p:nvPr/>
         </p:nvSpPr>
@@ -35427,7 +35085,7 @@
       </p:sp>
       <p:sp>
         <p:nvSpPr>
-          <p:cNvPr id="283" name="Shape 279"/>
+          <p:cNvPr id="282" name="Shape 278"/>
           <p:cNvSpPr/>
           <p:nvPr/>
         </p:nvSpPr>
@@ -35452,7 +35110,7 @@
       </p:sp>
       <p:sp>
         <p:nvSpPr>
-          <p:cNvPr id="284" name="Shape 280"/>
+          <p:cNvPr id="283" name="Shape 279"/>
           <p:cNvSpPr/>
           <p:nvPr/>
         </p:nvSpPr>
@@ -35477,7 +35135,7 @@
       </p:sp>
       <p:sp>
         <p:nvSpPr>
-          <p:cNvPr id="285" name="Shape 281"/>
+          <p:cNvPr id="284" name="Shape 280"/>
           <p:cNvSpPr/>
           <p:nvPr/>
         </p:nvSpPr>
@@ -35502,7 +35160,7 @@
       </p:sp>
       <p:sp>
         <p:nvSpPr>
-          <p:cNvPr id="286" name="Shape 282"/>
+          <p:cNvPr id="285" name="Shape 281"/>
           <p:cNvSpPr/>
           <p:nvPr/>
         </p:nvSpPr>
@@ -35527,7 +35185,7 @@
       </p:sp>
       <p:sp>
         <p:nvSpPr>
-          <p:cNvPr id="287" name="Shape 283"/>
+          <p:cNvPr id="286" name="Shape 282"/>
           <p:cNvSpPr/>
           <p:nvPr/>
         </p:nvSpPr>
@@ -35552,7 +35210,7 @@
       </p:sp>
       <p:sp>
         <p:nvSpPr>
-          <p:cNvPr id="288" name="Shape 284"/>
+          <p:cNvPr id="287" name="Shape 283"/>
           <p:cNvSpPr/>
           <p:nvPr/>
         </p:nvSpPr>
@@ -35577,7 +35235,7 @@
       </p:sp>
       <p:sp>
         <p:nvSpPr>
-          <p:cNvPr id="289" name="Shape 285"/>
+          <p:cNvPr id="288" name="Shape 284"/>
           <p:cNvSpPr/>
           <p:nvPr/>
         </p:nvSpPr>
@@ -35602,7 +35260,7 @@
       </p:sp>
       <p:sp>
         <p:nvSpPr>
-          <p:cNvPr id="290" name="Shape 286"/>
+          <p:cNvPr id="289" name="Shape 285"/>
           <p:cNvSpPr/>
           <p:nvPr/>
         </p:nvSpPr>
@@ -35627,7 +35285,7 @@
       </p:sp>
       <p:sp>
         <p:nvSpPr>
-          <p:cNvPr id="291" name="Shape 287"/>
+          <p:cNvPr id="290" name="Shape 286"/>
           <p:cNvSpPr/>
           <p:nvPr/>
         </p:nvSpPr>
@@ -35652,7 +35310,7 @@
       </p:sp>
       <p:sp>
         <p:nvSpPr>
-          <p:cNvPr id="292" name="Shape 288"/>
+          <p:cNvPr id="291" name="Shape 287"/>
           <p:cNvSpPr/>
           <p:nvPr/>
         </p:nvSpPr>
@@ -35677,7 +35335,7 @@
       </p:sp>
       <p:sp>
         <p:nvSpPr>
-          <p:cNvPr id="293" name="Shape 289"/>
+          <p:cNvPr id="292" name="Shape 288"/>
           <p:cNvSpPr/>
           <p:nvPr/>
         </p:nvSpPr>
@@ -35702,7 +35360,7 @@
       </p:sp>
       <p:sp>
         <p:nvSpPr>
-          <p:cNvPr id="294" name="Shape 290"/>
+          <p:cNvPr id="293" name="Shape 289"/>
           <p:cNvSpPr/>
           <p:nvPr/>
         </p:nvSpPr>
@@ -35727,7 +35385,7 @@
       </p:sp>
       <p:sp>
         <p:nvSpPr>
-          <p:cNvPr id="295" name="Shape 291"/>
+          <p:cNvPr id="294" name="Shape 290"/>
           <p:cNvSpPr/>
           <p:nvPr/>
         </p:nvSpPr>
@@ -35752,7 +35410,7 @@
       </p:sp>
       <p:sp>
         <p:nvSpPr>
-          <p:cNvPr id="296" name="Shape 292"/>
+          <p:cNvPr id="295" name="Shape 291"/>
           <p:cNvSpPr/>
           <p:nvPr/>
         </p:nvSpPr>
@@ -35777,7 +35435,7 @@
       </p:sp>
       <p:sp>
         <p:nvSpPr>
-          <p:cNvPr id="297" name="Shape 293"/>
+          <p:cNvPr id="296" name="Shape 292"/>
           <p:cNvSpPr/>
           <p:nvPr/>
         </p:nvSpPr>
@@ -35802,7 +35460,7 @@
       </p:sp>
       <p:sp>
         <p:nvSpPr>
-          <p:cNvPr id="298" name="Shape 294"/>
+          <p:cNvPr id="297" name="Shape 293"/>
           <p:cNvSpPr/>
           <p:nvPr/>
         </p:nvSpPr>
@@ -35827,7 +35485,7 @@
       </p:sp>
       <p:sp>
         <p:nvSpPr>
-          <p:cNvPr id="299" name="Shape 295"/>
+          <p:cNvPr id="298" name="Shape 294"/>
           <p:cNvSpPr/>
           <p:nvPr/>
         </p:nvSpPr>
@@ -35852,7 +35510,7 @@
       </p:sp>
       <p:sp>
         <p:nvSpPr>
-          <p:cNvPr id="300" name="Shape 296"/>
+          <p:cNvPr id="299" name="Shape 295"/>
           <p:cNvSpPr/>
           <p:nvPr/>
         </p:nvSpPr>
@@ -35877,7 +35535,7 @@
       </p:sp>
       <p:sp>
         <p:nvSpPr>
-          <p:cNvPr id="301" name="Shape 297"/>
+          <p:cNvPr id="300" name="Shape 296"/>
           <p:cNvSpPr/>
           <p:nvPr/>
         </p:nvSpPr>
@@ -35902,7 +35560,7 @@
       </p:sp>
       <p:sp>
         <p:nvSpPr>
-          <p:cNvPr id="302" name="Shape 298"/>
+          <p:cNvPr id="301" name="Shape 297"/>
           <p:cNvSpPr/>
           <p:nvPr/>
         </p:nvSpPr>
@@ -35927,7 +35585,7 @@
       </p:sp>
       <p:sp>
         <p:nvSpPr>
-          <p:cNvPr id="303" name="Shape 299"/>
+          <p:cNvPr id="302" name="Shape 298"/>
           <p:cNvSpPr/>
           <p:nvPr/>
         </p:nvSpPr>
@@ -35952,7 +35610,7 @@
       </p:sp>
       <p:sp>
         <p:nvSpPr>
-          <p:cNvPr id="304" name="Shape 300"/>
+          <p:cNvPr id="303" name="Shape 299"/>
           <p:cNvSpPr/>
           <p:nvPr/>
         </p:nvSpPr>
@@ -35977,7 +35635,7 @@
       </p:sp>
       <p:sp>
         <p:nvSpPr>
-          <p:cNvPr id="305" name="Shape 301"/>
+          <p:cNvPr id="304" name="Shape 300"/>
           <p:cNvSpPr/>
           <p:nvPr/>
         </p:nvSpPr>
@@ -36002,7 +35660,7 @@
       </p:sp>
       <p:sp>
         <p:nvSpPr>
-          <p:cNvPr id="306" name="Shape 302"/>
+          <p:cNvPr id="305" name="Shape 301"/>
           <p:cNvSpPr/>
           <p:nvPr/>
         </p:nvSpPr>
@@ -36027,7 +35685,7 @@
       </p:sp>
       <p:sp>
         <p:nvSpPr>
-          <p:cNvPr id="307" name="Shape 303"/>
+          <p:cNvPr id="306" name="Shape 302"/>
           <p:cNvSpPr/>
           <p:nvPr/>
         </p:nvSpPr>
@@ -36052,7 +35710,7 @@
       </p:sp>
       <p:sp>
         <p:nvSpPr>
-          <p:cNvPr id="308" name="Shape 304"/>
+          <p:cNvPr id="307" name="Shape 303"/>
           <p:cNvSpPr/>
           <p:nvPr/>
         </p:nvSpPr>
@@ -36077,7 +35735,7 @@
       </p:sp>
       <p:sp>
         <p:nvSpPr>
-          <p:cNvPr id="309" name="Shape 305"/>
+          <p:cNvPr id="308" name="Shape 304"/>
           <p:cNvSpPr/>
           <p:nvPr/>
         </p:nvSpPr>
@@ -36102,7 +35760,7 @@
       </p:sp>
       <p:sp>
         <p:nvSpPr>
-          <p:cNvPr id="310" name="Shape 306"/>
+          <p:cNvPr id="309" name="Shape 305"/>
           <p:cNvSpPr/>
           <p:nvPr/>
         </p:nvSpPr>
@@ -36127,7 +35785,7 @@
       </p:sp>
       <p:sp>
         <p:nvSpPr>
-          <p:cNvPr id="311" name="Shape 307"/>
+          <p:cNvPr id="310" name="Shape 306"/>
           <p:cNvSpPr/>
           <p:nvPr/>
         </p:nvSpPr>
@@ -36152,7 +35810,7 @@
       </p:sp>
       <p:sp>
         <p:nvSpPr>
-          <p:cNvPr id="312" name="Shape 308"/>
+          <p:cNvPr id="311" name="Shape 307"/>
           <p:cNvSpPr/>
           <p:nvPr/>
         </p:nvSpPr>
@@ -36177,7 +35835,7 @@
       </p:sp>
       <p:sp>
         <p:nvSpPr>
-          <p:cNvPr id="313" name="Shape 309"/>
+          <p:cNvPr id="312" name="Shape 308"/>
           <p:cNvSpPr/>
           <p:nvPr/>
         </p:nvSpPr>
@@ -36202,7 +35860,7 @@
       </p:sp>
       <p:sp>
         <p:nvSpPr>
-          <p:cNvPr id="314" name="Shape 310"/>
+          <p:cNvPr id="313" name="Shape 309"/>
           <p:cNvSpPr/>
           <p:nvPr/>
         </p:nvSpPr>
@@ -36227,7 +35885,7 @@
       </p:sp>
       <p:sp>
         <p:nvSpPr>
-          <p:cNvPr id="315" name="Shape 311"/>
+          <p:cNvPr id="314" name="Shape 310"/>
           <p:cNvSpPr/>
           <p:nvPr/>
         </p:nvSpPr>
@@ -36252,7 +35910,7 @@
       </p:sp>
       <p:sp>
         <p:nvSpPr>
-          <p:cNvPr id="316" name="Shape 312"/>
+          <p:cNvPr id="315" name="Shape 311"/>
           <p:cNvSpPr/>
           <p:nvPr/>
         </p:nvSpPr>
@@ -36277,7 +35935,7 @@
       </p:sp>
       <p:sp>
         <p:nvSpPr>
-          <p:cNvPr id="317" name="Shape 313"/>
+          <p:cNvPr id="316" name="Shape 312"/>
           <p:cNvSpPr/>
           <p:nvPr/>
         </p:nvSpPr>
@@ -36302,7 +35960,7 @@
       </p:sp>
       <p:sp>
         <p:nvSpPr>
-          <p:cNvPr id="318" name="Shape 314"/>
+          <p:cNvPr id="317" name="Shape 313"/>
           <p:cNvSpPr/>
           <p:nvPr/>
         </p:nvSpPr>
@@ -36327,7 +35985,7 @@
       </p:sp>
       <p:sp>
         <p:nvSpPr>
-          <p:cNvPr id="319" name="Shape 315"/>
+          <p:cNvPr id="318" name="Shape 314"/>
           <p:cNvSpPr/>
           <p:nvPr/>
         </p:nvSpPr>
@@ -36352,7 +36010,7 @@
       </p:sp>
       <p:sp>
         <p:nvSpPr>
-          <p:cNvPr id="320" name="Shape 316"/>
+          <p:cNvPr id="319" name="Shape 315"/>
           <p:cNvSpPr/>
           <p:nvPr/>
         </p:nvSpPr>
@@ -36377,7 +36035,7 @@
       </p:sp>
       <p:sp>
         <p:nvSpPr>
-          <p:cNvPr id="321" name="Shape 317"/>
+          <p:cNvPr id="320" name="Shape 316"/>
           <p:cNvSpPr/>
           <p:nvPr/>
         </p:nvSpPr>
@@ -36402,7 +36060,7 @@
       </p:sp>
       <p:sp>
         <p:nvSpPr>
-          <p:cNvPr id="322" name="Shape 318"/>
+          <p:cNvPr id="321" name="Shape 317"/>
           <p:cNvSpPr/>
           <p:nvPr/>
         </p:nvSpPr>
@@ -36427,7 +36085,7 @@
       </p:sp>
       <p:sp>
         <p:nvSpPr>
-          <p:cNvPr id="323" name="Shape 319"/>
+          <p:cNvPr id="322" name="Shape 318"/>
           <p:cNvSpPr/>
           <p:nvPr/>
         </p:nvSpPr>
@@ -36452,7 +36110,7 @@
       </p:sp>
       <p:sp>
         <p:nvSpPr>
-          <p:cNvPr id="324" name="Shape 320"/>
+          <p:cNvPr id="323" name="Shape 319"/>
           <p:cNvSpPr/>
           <p:nvPr/>
         </p:nvSpPr>
@@ -36477,7 +36135,7 @@
       </p:sp>
       <p:sp>
         <p:nvSpPr>
-          <p:cNvPr id="325" name="Shape 321"/>
+          <p:cNvPr id="324" name="Shape 320"/>
           <p:cNvSpPr/>
           <p:nvPr/>
         </p:nvSpPr>
@@ -36502,7 +36160,7 @@
       </p:sp>
       <p:sp>
         <p:nvSpPr>
-          <p:cNvPr id="326" name="Shape 322"/>
+          <p:cNvPr id="325" name="Shape 321"/>
           <p:cNvSpPr/>
           <p:nvPr/>
         </p:nvSpPr>
@@ -36527,7 +36185,7 @@
       </p:sp>
       <p:sp>
         <p:nvSpPr>
-          <p:cNvPr id="327" name="Shape 323"/>
+          <p:cNvPr id="326" name="Shape 322"/>
           <p:cNvSpPr/>
           <p:nvPr/>
         </p:nvSpPr>
@@ -36552,7 +36210,7 @@
       </p:sp>
       <p:sp>
         <p:nvSpPr>
-          <p:cNvPr id="328" name="Shape 324"/>
+          <p:cNvPr id="327" name="Shape 323"/>
           <p:cNvSpPr/>
           <p:nvPr/>
         </p:nvSpPr>
@@ -36577,7 +36235,7 @@
       </p:sp>
       <p:sp>
         <p:nvSpPr>
-          <p:cNvPr id="329" name="Shape 325"/>
+          <p:cNvPr id="328" name="Shape 324"/>
           <p:cNvSpPr/>
           <p:nvPr/>
         </p:nvSpPr>
@@ -36602,7 +36260,7 @@
       </p:sp>
       <p:sp>
         <p:nvSpPr>
-          <p:cNvPr id="330" name="Shape 326"/>
+          <p:cNvPr id="329" name="Shape 325"/>
           <p:cNvSpPr/>
           <p:nvPr/>
         </p:nvSpPr>
@@ -36627,7 +36285,7 @@
       </p:sp>
       <p:sp>
         <p:nvSpPr>
-          <p:cNvPr id="331" name="Shape 327"/>
+          <p:cNvPr id="330" name="Shape 326"/>
           <p:cNvSpPr/>
           <p:nvPr/>
         </p:nvSpPr>
@@ -36652,7 +36310,7 @@
       </p:sp>
       <p:sp>
         <p:nvSpPr>
-          <p:cNvPr id="332" name="Shape 328"/>
+          <p:cNvPr id="331" name="Shape 327"/>
           <p:cNvSpPr/>
           <p:nvPr/>
         </p:nvSpPr>
@@ -36677,7 +36335,7 @@
       </p:sp>
       <p:sp>
         <p:nvSpPr>
-          <p:cNvPr id="333" name="Shape 329"/>
+          <p:cNvPr id="332" name="Shape 328"/>
           <p:cNvSpPr/>
           <p:nvPr/>
         </p:nvSpPr>
@@ -36702,7 +36360,7 @@
       </p:sp>
       <p:sp>
         <p:nvSpPr>
-          <p:cNvPr id="334" name="Shape 330"/>
+          <p:cNvPr id="333" name="Shape 329"/>
           <p:cNvSpPr/>
           <p:nvPr/>
         </p:nvSpPr>
@@ -36727,7 +36385,7 @@
       </p:sp>
       <p:sp>
         <p:nvSpPr>
-          <p:cNvPr id="335" name="Shape 331"/>
+          <p:cNvPr id="334" name="Shape 330"/>
           <p:cNvSpPr/>
           <p:nvPr/>
         </p:nvSpPr>
@@ -36752,7 +36410,7 @@
       </p:sp>
       <p:sp>
         <p:nvSpPr>
-          <p:cNvPr id="336" name="Shape 332"/>
+          <p:cNvPr id="335" name="Shape 331"/>
           <p:cNvSpPr/>
           <p:nvPr/>
         </p:nvSpPr>
@@ -36777,7 +36435,7 @@
       </p:sp>
       <p:sp>
         <p:nvSpPr>
-          <p:cNvPr id="337" name="Shape 333"/>
+          <p:cNvPr id="336" name="Shape 332"/>
           <p:cNvSpPr/>
           <p:nvPr/>
         </p:nvSpPr>
@@ -36802,7 +36460,7 @@
       </p:sp>
       <p:sp>
         <p:nvSpPr>
-          <p:cNvPr id="338" name="Shape 334"/>
+          <p:cNvPr id="337" name="Shape 333"/>
           <p:cNvSpPr/>
           <p:nvPr/>
         </p:nvSpPr>
@@ -36827,7 +36485,7 @@
       </p:sp>
       <p:sp>
         <p:nvSpPr>
-          <p:cNvPr id="339" name="Shape 335"/>
+          <p:cNvPr id="338" name="Shape 334"/>
           <p:cNvSpPr/>
           <p:nvPr/>
         </p:nvSpPr>
@@ -36852,7 +36510,7 @@
       </p:sp>
       <p:sp>
         <p:nvSpPr>
-          <p:cNvPr id="340" name="Shape 336"/>
+          <p:cNvPr id="339" name="Shape 335"/>
           <p:cNvSpPr/>
           <p:nvPr/>
         </p:nvSpPr>
@@ -36877,7 +36535,7 @@
       </p:sp>
       <p:sp>
         <p:nvSpPr>
-          <p:cNvPr id="341" name="Shape 337"/>
+          <p:cNvPr id="340" name="Shape 336"/>
           <p:cNvSpPr/>
           <p:nvPr/>
         </p:nvSpPr>
@@ -36902,7 +36560,7 @@
       </p:sp>
       <p:sp>
         <p:nvSpPr>
-          <p:cNvPr id="342" name="Shape 338"/>
+          <p:cNvPr id="341" name="Shape 337"/>
           <p:cNvSpPr/>
           <p:nvPr/>
         </p:nvSpPr>
@@ -36927,7 +36585,7 @@
       </p:sp>
       <p:sp>
         <p:nvSpPr>
-          <p:cNvPr id="343" name="Shape 339"/>
+          <p:cNvPr id="342" name="Shape 338"/>
           <p:cNvSpPr/>
           <p:nvPr/>
         </p:nvSpPr>
@@ -36952,7 +36610,7 @@
       </p:sp>
       <p:sp>
         <p:nvSpPr>
-          <p:cNvPr id="344" name="Shape 340"/>
+          <p:cNvPr id="343" name="Shape 339"/>
           <p:cNvSpPr/>
           <p:nvPr/>
         </p:nvSpPr>
@@ -36977,7 +36635,7 @@
       </p:sp>
       <p:sp>
         <p:nvSpPr>
-          <p:cNvPr id="345" name="Shape 341"/>
+          <p:cNvPr id="344" name="Shape 340"/>
           <p:cNvSpPr/>
           <p:nvPr/>
         </p:nvSpPr>
@@ -37002,7 +36660,7 @@
       </p:sp>
       <p:sp>
         <p:nvSpPr>
-          <p:cNvPr id="346" name="Shape 342"/>
+          <p:cNvPr id="345" name="Shape 341"/>
           <p:cNvSpPr/>
           <p:nvPr/>
         </p:nvSpPr>
@@ -37027,7 +36685,7 @@
       </p:sp>
       <p:sp>
         <p:nvSpPr>
-          <p:cNvPr id="347" name="Shape 343"/>
+          <p:cNvPr id="346" name="Shape 342"/>
           <p:cNvSpPr/>
           <p:nvPr/>
         </p:nvSpPr>
@@ -37052,7 +36710,7 @@
       </p:sp>
       <p:sp>
         <p:nvSpPr>
-          <p:cNvPr id="348" name="Shape 344"/>
+          <p:cNvPr id="347" name="Shape 343"/>
           <p:cNvSpPr/>
           <p:nvPr/>
         </p:nvSpPr>
@@ -37077,7 +36735,7 @@
       </p:sp>
       <p:sp>
         <p:nvSpPr>
-          <p:cNvPr id="349" name="Shape 345"/>
+          <p:cNvPr id="348" name="Shape 344"/>
           <p:cNvSpPr/>
           <p:nvPr/>
         </p:nvSpPr>
@@ -37102,7 +36760,7 @@
       </p:sp>
       <p:sp>
         <p:nvSpPr>
-          <p:cNvPr id="350" name="Shape 346"/>
+          <p:cNvPr id="349" name="Shape 345"/>
           <p:cNvSpPr/>
           <p:nvPr/>
         </p:nvSpPr>
@@ -37127,7 +36785,7 @@
       </p:sp>
       <p:sp>
         <p:nvSpPr>
-          <p:cNvPr id="351" name="Shape 347"/>
+          <p:cNvPr id="350" name="Shape 346"/>
           <p:cNvSpPr/>
           <p:nvPr/>
         </p:nvSpPr>
@@ -37152,7 +36810,7 @@
       </p:sp>
       <p:sp>
         <p:nvSpPr>
-          <p:cNvPr id="352" name="Shape 348"/>
+          <p:cNvPr id="351" name="Shape 347"/>
           <p:cNvSpPr/>
           <p:nvPr/>
         </p:nvSpPr>
@@ -37177,7 +36835,7 @@
       </p:sp>
       <p:sp>
         <p:nvSpPr>
-          <p:cNvPr id="353" name="Shape 349"/>
+          <p:cNvPr id="352" name="Shape 348"/>
           <p:cNvSpPr/>
           <p:nvPr/>
         </p:nvSpPr>
@@ -37202,7 +36860,7 @@
       </p:sp>
       <p:sp>
         <p:nvSpPr>
-          <p:cNvPr id="354" name="Shape 350"/>
+          <p:cNvPr id="353" name="Shape 349"/>
           <p:cNvSpPr/>
           <p:nvPr/>
         </p:nvSpPr>
@@ -37227,7 +36885,7 @@
       </p:sp>
       <p:sp>
         <p:nvSpPr>
-          <p:cNvPr id="355" name="Shape 351"/>
+          <p:cNvPr id="354" name="Shape 350"/>
           <p:cNvSpPr/>
           <p:nvPr/>
         </p:nvSpPr>
@@ -37252,7 +36910,7 @@
       </p:sp>
       <p:sp>
         <p:nvSpPr>
-          <p:cNvPr id="356" name="Shape 352"/>
+          <p:cNvPr id="355" name="Shape 351"/>
           <p:cNvSpPr/>
           <p:nvPr/>
         </p:nvSpPr>
@@ -37277,7 +36935,7 @@
       </p:sp>
       <p:sp>
         <p:nvSpPr>
-          <p:cNvPr id="357" name="Shape 353"/>
+          <p:cNvPr id="356" name="Shape 352"/>
           <p:cNvSpPr/>
           <p:nvPr/>
         </p:nvSpPr>
@@ -37302,7 +36960,7 @@
       </p:sp>
       <p:sp>
         <p:nvSpPr>
-          <p:cNvPr id="358" name="Shape 354"/>
+          <p:cNvPr id="357" name="Shape 353"/>
           <p:cNvSpPr/>
           <p:nvPr/>
         </p:nvSpPr>
@@ -37327,7 +36985,7 @@
       </p:sp>
       <p:sp>
         <p:nvSpPr>
-          <p:cNvPr id="359" name="Shape 355"/>
+          <p:cNvPr id="358" name="Shape 354"/>
           <p:cNvSpPr/>
           <p:nvPr/>
         </p:nvSpPr>
@@ -37352,7 +37010,7 @@
       </p:sp>
       <p:sp>
         <p:nvSpPr>
-          <p:cNvPr id="360" name="Shape 356"/>
+          <p:cNvPr id="359" name="Shape 355"/>
           <p:cNvSpPr/>
           <p:nvPr/>
         </p:nvSpPr>
@@ -37377,7 +37035,7 @@
       </p:sp>
       <p:sp>
         <p:nvSpPr>
-          <p:cNvPr id="361" name="Shape 357"/>
+          <p:cNvPr id="360" name="Shape 356"/>
           <p:cNvSpPr/>
           <p:nvPr/>
         </p:nvSpPr>
@@ -37402,7 +37060,7 @@
       </p:sp>
       <p:sp>
         <p:nvSpPr>
-          <p:cNvPr id="362" name="Shape 358"/>
+          <p:cNvPr id="361" name="Shape 357"/>
           <p:cNvSpPr/>
           <p:nvPr/>
         </p:nvSpPr>
@@ -37427,7 +37085,7 @@
       </p:sp>
       <p:sp>
         <p:nvSpPr>
-          <p:cNvPr id="363" name="Shape 359"/>
+          <p:cNvPr id="362" name="Shape 358"/>
           <p:cNvSpPr/>
           <p:nvPr/>
         </p:nvSpPr>
@@ -37452,7 +37110,7 @@
       </p:sp>
       <p:sp>
         <p:nvSpPr>
-          <p:cNvPr id="364" name="Shape 360"/>
+          <p:cNvPr id="363" name="Shape 359"/>
           <p:cNvSpPr/>
           <p:nvPr/>
         </p:nvSpPr>
@@ -37477,7 +37135,7 @@
       </p:sp>
       <p:sp>
         <p:nvSpPr>
-          <p:cNvPr id="365" name="Shape 361"/>
+          <p:cNvPr id="364" name="Shape 360"/>
           <p:cNvSpPr/>
           <p:nvPr/>
         </p:nvSpPr>
@@ -37502,7 +37160,7 @@
       </p:sp>
       <p:sp>
         <p:nvSpPr>
-          <p:cNvPr id="366" name="Shape 362"/>
+          <p:cNvPr id="365" name="Shape 361"/>
           <p:cNvSpPr/>
           <p:nvPr/>
         </p:nvSpPr>
@@ -37527,7 +37185,7 @@
       </p:sp>
       <p:sp>
         <p:nvSpPr>
-          <p:cNvPr id="367" name="Shape 363"/>
+          <p:cNvPr id="366" name="Shape 362"/>
           <p:cNvSpPr/>
           <p:nvPr/>
         </p:nvSpPr>
@@ -37552,7 +37210,7 @@
       </p:sp>
       <p:sp>
         <p:nvSpPr>
-          <p:cNvPr id="368" name="Shape 364"/>
+          <p:cNvPr id="367" name="Shape 363"/>
           <p:cNvSpPr/>
           <p:nvPr/>
         </p:nvSpPr>
@@ -37577,7 +37235,7 @@
       </p:sp>
       <p:sp>
         <p:nvSpPr>
-          <p:cNvPr id="369" name="Shape 365"/>
+          <p:cNvPr id="368" name="Shape 364"/>
           <p:cNvSpPr/>
           <p:nvPr/>
         </p:nvSpPr>
@@ -37602,7 +37260,7 @@
       </p:sp>
       <p:sp>
         <p:nvSpPr>
-          <p:cNvPr id="370" name="Shape 366"/>
+          <p:cNvPr id="369" name="Shape 365"/>
           <p:cNvSpPr/>
           <p:nvPr/>
         </p:nvSpPr>
@@ -37627,7 +37285,7 @@
       </p:sp>
       <p:sp>
         <p:nvSpPr>
-          <p:cNvPr id="371" name="Shape 367"/>
+          <p:cNvPr id="370" name="Shape 366"/>
           <p:cNvSpPr/>
           <p:nvPr/>
         </p:nvSpPr>
@@ -37652,7 +37310,7 @@
       </p:sp>
       <p:sp>
         <p:nvSpPr>
-          <p:cNvPr id="372" name="Shape 368"/>
+          <p:cNvPr id="371" name="Shape 367"/>
           <p:cNvSpPr/>
           <p:nvPr/>
         </p:nvSpPr>
@@ -37677,7 +37335,7 @@
       </p:sp>
       <p:sp>
         <p:nvSpPr>
-          <p:cNvPr id="373" name="Shape 369"/>
+          <p:cNvPr id="372" name="Shape 368"/>
           <p:cNvSpPr/>
           <p:nvPr/>
         </p:nvSpPr>
@@ -37702,7 +37360,7 @@
       </p:sp>
       <p:sp>
         <p:nvSpPr>
-          <p:cNvPr id="374" name="Shape 370"/>
+          <p:cNvPr id="373" name="Shape 369"/>
           <p:cNvSpPr/>
           <p:nvPr/>
         </p:nvSpPr>
@@ -37727,7 +37385,7 @@
       </p:sp>
       <p:sp>
         <p:nvSpPr>
-          <p:cNvPr id="375" name="Shape 371"/>
+          <p:cNvPr id="374" name="Shape 370"/>
           <p:cNvSpPr/>
           <p:nvPr/>
         </p:nvSpPr>
@@ -37752,7 +37410,7 @@
       </p:sp>
       <p:sp>
         <p:nvSpPr>
-          <p:cNvPr id="376" name="Shape 372"/>
+          <p:cNvPr id="375" name="Shape 371"/>
           <p:cNvSpPr/>
           <p:nvPr/>
         </p:nvSpPr>
@@ -37777,7 +37435,7 @@
       </p:sp>
       <p:sp>
         <p:nvSpPr>
-          <p:cNvPr id="377" name="Shape 373"/>
+          <p:cNvPr id="376" name="Shape 372"/>
           <p:cNvSpPr/>
           <p:nvPr/>
         </p:nvSpPr>
@@ -37802,7 +37460,7 @@
       </p:sp>
       <p:sp>
         <p:nvSpPr>
-          <p:cNvPr id="378" name="Shape 374"/>
+          <p:cNvPr id="377" name="Shape 373"/>
           <p:cNvSpPr/>
           <p:nvPr/>
         </p:nvSpPr>
@@ -37827,7 +37485,7 @@
       </p:sp>
       <p:sp>
         <p:nvSpPr>
-          <p:cNvPr id="379" name="Shape 375"/>
+          <p:cNvPr id="378" name="Shape 374"/>
           <p:cNvSpPr/>
           <p:nvPr/>
         </p:nvSpPr>
@@ -37852,7 +37510,7 @@
       </p:sp>
       <p:sp>
         <p:nvSpPr>
-          <p:cNvPr id="380" name="Shape 376"/>
+          <p:cNvPr id="379" name="Shape 375"/>
           <p:cNvSpPr/>
           <p:nvPr/>
         </p:nvSpPr>
@@ -37877,7 +37535,7 @@
       </p:sp>
       <p:sp>
         <p:nvSpPr>
-          <p:cNvPr id="381" name="Shape 377"/>
+          <p:cNvPr id="380" name="Shape 376"/>
           <p:cNvSpPr/>
           <p:nvPr/>
         </p:nvSpPr>
@@ -37902,7 +37560,7 @@
       </p:sp>
       <p:sp>
         <p:nvSpPr>
-          <p:cNvPr id="382" name="Shape 378"/>
+          <p:cNvPr id="381" name="Shape 377"/>
           <p:cNvSpPr/>
           <p:nvPr/>
         </p:nvSpPr>
@@ -37927,7 +37585,7 @@
       </p:sp>
       <p:sp>
         <p:nvSpPr>
-          <p:cNvPr id="383" name="Shape 379"/>
+          <p:cNvPr id="382" name="Shape 378"/>
           <p:cNvSpPr/>
           <p:nvPr/>
         </p:nvSpPr>
@@ -37952,7 +37610,7 @@
       </p:sp>
       <p:sp>
         <p:nvSpPr>
-          <p:cNvPr id="384" name="Shape 380"/>
+          <p:cNvPr id="383" name="Shape 379"/>
           <p:cNvSpPr/>
           <p:nvPr/>
         </p:nvSpPr>
@@ -37977,7 +37635,7 @@
       </p:sp>
       <p:sp>
         <p:nvSpPr>
-          <p:cNvPr id="385" name="Shape 381"/>
+          <p:cNvPr id="384" name="Shape 380"/>
           <p:cNvSpPr/>
           <p:nvPr/>
         </p:nvSpPr>
@@ -38002,7 +37660,7 @@
       </p:sp>
       <p:sp>
         <p:nvSpPr>
-          <p:cNvPr id="386" name="Shape 382"/>
+          <p:cNvPr id="385" name="Shape 381"/>
           <p:cNvSpPr/>
           <p:nvPr/>
         </p:nvSpPr>
@@ -38027,7 +37685,7 @@
       </p:sp>
       <p:sp>
         <p:nvSpPr>
-          <p:cNvPr id="387" name="Shape 383"/>
+          <p:cNvPr id="386" name="Shape 382"/>
           <p:cNvSpPr/>
           <p:nvPr/>
         </p:nvSpPr>
@@ -38052,7 +37710,7 @@
       </p:sp>
       <p:sp>
         <p:nvSpPr>
-          <p:cNvPr id="388" name="Shape 384"/>
+          <p:cNvPr id="387" name="Shape 383"/>
           <p:cNvSpPr/>
           <p:nvPr/>
         </p:nvSpPr>
@@ -38077,7 +37735,7 @@
       </p:sp>
       <p:sp>
         <p:nvSpPr>
-          <p:cNvPr id="389" name="Shape 385"/>
+          <p:cNvPr id="388" name="Shape 384"/>
           <p:cNvSpPr/>
           <p:nvPr/>
         </p:nvSpPr>
@@ -38102,7 +37760,7 @@
       </p:sp>
       <p:sp>
         <p:nvSpPr>
-          <p:cNvPr id="390" name="Shape 386"/>
+          <p:cNvPr id="389" name="Shape 385"/>
           <p:cNvSpPr/>
           <p:nvPr/>
         </p:nvSpPr>
@@ -38127,7 +37785,7 @@
       </p:sp>
       <p:sp>
         <p:nvSpPr>
-          <p:cNvPr id="391" name="Shape 387"/>
+          <p:cNvPr id="390" name="Shape 386"/>
           <p:cNvSpPr/>
           <p:nvPr/>
         </p:nvSpPr>
@@ -38152,7 +37810,7 @@
       </p:sp>
       <p:sp>
         <p:nvSpPr>
-          <p:cNvPr id="392" name="Shape 388"/>
+          <p:cNvPr id="391" name="Shape 387"/>
           <p:cNvSpPr/>
           <p:nvPr/>
         </p:nvSpPr>
@@ -38177,7 +37835,7 @@
       </p:sp>
       <p:sp>
         <p:nvSpPr>
-          <p:cNvPr id="393" name="Shape 389"/>
+          <p:cNvPr id="392" name="Shape 388"/>
           <p:cNvSpPr/>
           <p:nvPr/>
         </p:nvSpPr>
@@ -38202,7 +37860,7 @@
       </p:sp>
       <p:sp>
         <p:nvSpPr>
-          <p:cNvPr id="394" name="Shape 390"/>
+          <p:cNvPr id="393" name="Shape 389"/>
           <p:cNvSpPr/>
           <p:nvPr/>
         </p:nvSpPr>
@@ -38227,7 +37885,7 @@
       </p:sp>
       <p:sp>
         <p:nvSpPr>
-          <p:cNvPr id="395" name="Shape 391"/>
+          <p:cNvPr id="394" name="Shape 390"/>
           <p:cNvSpPr/>
           <p:nvPr/>
         </p:nvSpPr>
@@ -38252,7 +37910,7 @@
       </p:sp>
       <p:sp>
         <p:nvSpPr>
-          <p:cNvPr id="396" name="Shape 392"/>
+          <p:cNvPr id="395" name="Shape 391"/>
           <p:cNvSpPr/>
           <p:nvPr/>
         </p:nvSpPr>
@@ -38277,7 +37935,7 @@
       </p:sp>
       <p:sp>
         <p:nvSpPr>
-          <p:cNvPr id="397" name="Shape 393"/>
+          <p:cNvPr id="396" name="Shape 392"/>
           <p:cNvSpPr/>
           <p:nvPr/>
         </p:nvSpPr>
@@ -38302,7 +37960,7 @@
       </p:sp>
       <p:sp>
         <p:nvSpPr>
-          <p:cNvPr id="398" name="Shape 394"/>
+          <p:cNvPr id="397" name="Shape 393"/>
           <p:cNvSpPr/>
           <p:nvPr/>
         </p:nvSpPr>
@@ -38327,7 +37985,7 @@
       </p:sp>
       <p:sp>
         <p:nvSpPr>
-          <p:cNvPr id="399" name="Shape 395"/>
+          <p:cNvPr id="398" name="Shape 394"/>
           <p:cNvSpPr/>
           <p:nvPr/>
         </p:nvSpPr>
@@ -38352,7 +38010,7 @@
       </p:sp>
       <p:sp>
         <p:nvSpPr>
-          <p:cNvPr id="400" name="Shape 396"/>
+          <p:cNvPr id="399" name="Shape 395"/>
           <p:cNvSpPr/>
           <p:nvPr/>
         </p:nvSpPr>
@@ -38377,7 +38035,7 @@
       </p:sp>
       <p:sp>
         <p:nvSpPr>
-          <p:cNvPr id="401" name="Shape 397"/>
+          <p:cNvPr id="400" name="Shape 396"/>
           <p:cNvSpPr/>
           <p:nvPr/>
         </p:nvSpPr>
@@ -38402,7 +38060,7 @@
       </p:sp>
       <p:sp>
         <p:nvSpPr>
-          <p:cNvPr id="402" name="Shape 398"/>
+          <p:cNvPr id="401" name="Shape 397"/>
           <p:cNvSpPr/>
           <p:nvPr/>
         </p:nvSpPr>
@@ -38427,7 +38085,7 @@
       </p:sp>
       <p:sp>
         <p:nvSpPr>
-          <p:cNvPr id="403" name="Shape 399"/>
+          <p:cNvPr id="402" name="Shape 398"/>
           <p:cNvSpPr/>
           <p:nvPr/>
         </p:nvSpPr>
@@ -38452,7 +38110,7 @@
       </p:sp>
       <p:sp>
         <p:nvSpPr>
-          <p:cNvPr id="404" name="Shape 400"/>
+          <p:cNvPr id="403" name="Shape 399"/>
           <p:cNvSpPr/>
           <p:nvPr/>
         </p:nvSpPr>
@@ -38477,7 +38135,7 @@
       </p:sp>
       <p:sp>
         <p:nvSpPr>
-          <p:cNvPr id="405" name="Shape 401"/>
+          <p:cNvPr id="404" name="Shape 400"/>
           <p:cNvSpPr/>
           <p:nvPr/>
         </p:nvSpPr>
@@ -38502,7 +38160,7 @@
       </p:sp>
       <p:sp>
         <p:nvSpPr>
-          <p:cNvPr id="406" name="Shape 402"/>
+          <p:cNvPr id="405" name="Shape 401"/>
           <p:cNvSpPr/>
           <p:nvPr/>
         </p:nvSpPr>
@@ -38527,7 +38185,7 @@
       </p:sp>
       <p:sp>
         <p:nvSpPr>
-          <p:cNvPr id="407" name="Shape 403"/>
+          <p:cNvPr id="406" name="Shape 402"/>
           <p:cNvSpPr/>
           <p:nvPr/>
         </p:nvSpPr>
@@ -38552,7 +38210,7 @@
       </p:sp>
       <p:sp>
         <p:nvSpPr>
-          <p:cNvPr id="408" name="Shape 404"/>
+          <p:cNvPr id="407" name="Shape 403"/>
           <p:cNvSpPr/>
           <p:nvPr/>
         </p:nvSpPr>
@@ -38577,7 +38235,7 @@
       </p:sp>
       <p:sp>
         <p:nvSpPr>
-          <p:cNvPr id="409" name="Shape 405"/>
+          <p:cNvPr id="408" name="Shape 404"/>
           <p:cNvSpPr/>
           <p:nvPr/>
         </p:nvSpPr>
@@ -38602,7 +38260,7 @@
       </p:sp>
       <p:sp>
         <p:nvSpPr>
-          <p:cNvPr id="410" name="Shape 406"/>
+          <p:cNvPr id="409" name="Shape 405"/>
           <p:cNvSpPr/>
           <p:nvPr/>
         </p:nvSpPr>
@@ -38627,7 +38285,7 @@
       </p:sp>
       <p:sp>
         <p:nvSpPr>
-          <p:cNvPr id="411" name="Shape 407"/>
+          <p:cNvPr id="410" name="Shape 406"/>
           <p:cNvSpPr/>
           <p:nvPr/>
         </p:nvSpPr>
@@ -38652,7 +38310,7 @@
       </p:sp>
       <p:sp>
         <p:nvSpPr>
-          <p:cNvPr id="412" name="Shape 408"/>
+          <p:cNvPr id="411" name="Shape 407"/>
           <p:cNvSpPr/>
           <p:nvPr/>
         </p:nvSpPr>
@@ -38677,7 +38335,7 @@
       </p:sp>
       <p:sp>
         <p:nvSpPr>
-          <p:cNvPr id="413" name="Shape 409"/>
+          <p:cNvPr id="412" name="Shape 408"/>
           <p:cNvSpPr/>
           <p:nvPr/>
         </p:nvSpPr>
@@ -38702,7 +38360,7 @@
       </p:sp>
       <p:sp>
         <p:nvSpPr>
-          <p:cNvPr id="414" name="Shape 410"/>
+          <p:cNvPr id="413" name="Shape 409"/>
           <p:cNvSpPr/>
           <p:nvPr/>
         </p:nvSpPr>
@@ -38727,7 +38385,7 @@
       </p:sp>
       <p:sp>
         <p:nvSpPr>
-          <p:cNvPr id="415" name="Shape 411"/>
+          <p:cNvPr id="414" name="Shape 410"/>
           <p:cNvSpPr/>
           <p:nvPr/>
         </p:nvSpPr>
@@ -38752,7 +38410,7 @@
       </p:sp>
       <p:sp>
         <p:nvSpPr>
-          <p:cNvPr id="416" name="Shape 412"/>
+          <p:cNvPr id="415" name="Shape 411"/>
           <p:cNvSpPr/>
           <p:nvPr/>
         </p:nvSpPr>
@@ -38777,7 +38435,7 @@
       </p:sp>
       <p:sp>
         <p:nvSpPr>
-          <p:cNvPr id="417" name="Shape 413"/>
+          <p:cNvPr id="416" name="Shape 412"/>
           <p:cNvSpPr/>
           <p:nvPr/>
         </p:nvSpPr>
@@ -38802,7 +38460,7 @@
       </p:sp>
       <p:sp>
         <p:nvSpPr>
-          <p:cNvPr id="418" name="Shape 414"/>
+          <p:cNvPr id="417" name="Shape 413"/>
           <p:cNvSpPr/>
           <p:nvPr/>
         </p:nvSpPr>
@@ -38827,7 +38485,7 @@
       </p:sp>
       <p:sp>
         <p:nvSpPr>
-          <p:cNvPr id="419" name="Shape 415"/>
+          <p:cNvPr id="418" name="Shape 414"/>
           <p:cNvSpPr/>
           <p:nvPr/>
         </p:nvSpPr>
@@ -38852,7 +38510,7 @@
       </p:sp>
       <p:sp>
         <p:nvSpPr>
-          <p:cNvPr id="420" name="Shape 416"/>
+          <p:cNvPr id="419" name="Shape 415"/>
           <p:cNvSpPr/>
           <p:nvPr/>
         </p:nvSpPr>
@@ -38877,7 +38535,7 @@
       </p:sp>
       <p:sp>
         <p:nvSpPr>
-          <p:cNvPr id="421" name="Shape 417"/>
+          <p:cNvPr id="420" name="Shape 416"/>
           <p:cNvSpPr/>
           <p:nvPr/>
         </p:nvSpPr>
@@ -38902,7 +38560,7 @@
       </p:sp>
       <p:sp>
         <p:nvSpPr>
-          <p:cNvPr id="422" name="Shape 418"/>
+          <p:cNvPr id="421" name="Shape 417"/>
           <p:cNvSpPr/>
           <p:nvPr/>
         </p:nvSpPr>
@@ -38927,7 +38585,7 @@
       </p:sp>
       <p:sp>
         <p:nvSpPr>
-          <p:cNvPr id="423" name="Shape 419"/>
+          <p:cNvPr id="422" name="Shape 418"/>
           <p:cNvSpPr/>
           <p:nvPr/>
         </p:nvSpPr>
@@ -38952,7 +38610,7 @@
       </p:sp>
       <p:sp>
         <p:nvSpPr>
-          <p:cNvPr id="424" name="Shape 420"/>
+          <p:cNvPr id="423" name="Shape 419"/>
           <p:cNvSpPr/>
           <p:nvPr/>
         </p:nvSpPr>
@@ -38977,7 +38635,7 @@
       </p:sp>
       <p:sp>
         <p:nvSpPr>
-          <p:cNvPr id="425" name="Shape 421"/>
+          <p:cNvPr id="424" name="Shape 420"/>
           <p:cNvSpPr/>
           <p:nvPr/>
         </p:nvSpPr>
@@ -39002,7 +38660,7 @@
       </p:sp>
       <p:sp>
         <p:nvSpPr>
-          <p:cNvPr id="426" name="Shape 422"/>
+          <p:cNvPr id="425" name="Shape 421"/>
           <p:cNvSpPr/>
           <p:nvPr/>
         </p:nvSpPr>
@@ -39027,7 +38685,7 @@
       </p:sp>
       <p:sp>
         <p:nvSpPr>
-          <p:cNvPr id="427" name="Shape 423"/>
+          <p:cNvPr id="426" name="Shape 422"/>
           <p:cNvSpPr/>
           <p:nvPr/>
         </p:nvSpPr>
@@ -39052,7 +38710,7 @@
       </p:sp>
       <p:sp>
         <p:nvSpPr>
-          <p:cNvPr id="428" name="Shape 424"/>
+          <p:cNvPr id="427" name="Shape 423"/>
           <p:cNvSpPr/>
           <p:nvPr/>
         </p:nvSpPr>
@@ -39077,7 +38735,7 @@
       </p:sp>
       <p:sp>
         <p:nvSpPr>
-          <p:cNvPr id="429" name="Shape 425"/>
+          <p:cNvPr id="428" name="Shape 424"/>
           <p:cNvSpPr/>
           <p:nvPr/>
         </p:nvSpPr>
@@ -39102,7 +38760,7 @@
       </p:sp>
       <p:sp>
         <p:nvSpPr>
-          <p:cNvPr id="430" name="Shape 426"/>
+          <p:cNvPr id="429" name="Shape 425"/>
           <p:cNvSpPr/>
           <p:nvPr/>
         </p:nvSpPr>
@@ -39125,7 +38783,7 @@
       </p:sp>
       <p:sp>
         <p:nvSpPr>
-          <p:cNvPr id="431" name="Text 427"/>
+          <p:cNvPr id="430" name="Text 426"/>
           <p:cNvSpPr txBox="1"/>
           <p:nvPr/>
         </p:nvSpPr>
@@ -39164,7 +38822,7 @@
       </p:sp>
       <p:sp>
         <p:nvSpPr>
-          <p:cNvPr id="432" name="Shape 428"/>
+          <p:cNvPr id="431" name="Shape 427"/>
           <p:cNvSpPr/>
           <p:nvPr/>
         </p:nvSpPr>
@@ -39187,7 +38845,7 @@
       </p:sp>
       <p:sp>
         <p:nvSpPr>
-          <p:cNvPr id="433" name="Text 429"/>
+          <p:cNvPr id="432" name="Text 428"/>
           <p:cNvSpPr txBox="1"/>
           <p:nvPr/>
         </p:nvSpPr>
@@ -39226,7 +38884,7 @@
       </p:sp>
       <p:sp>
         <p:nvSpPr>
-          <p:cNvPr id="434" name="Shape 430"/>
+          <p:cNvPr id="433" name="Shape 429"/>
           <p:cNvSpPr/>
           <p:nvPr/>
         </p:nvSpPr>
@@ -39249,7 +38907,7 @@
       </p:sp>
       <p:sp>
         <p:nvSpPr>
-          <p:cNvPr id="435" name="Text 431"/>
+          <p:cNvPr id="434" name="Text 430"/>
           <p:cNvSpPr txBox="1"/>
           <p:nvPr/>
         </p:nvSpPr>
@@ -39288,7 +38946,7 @@
       </p:sp>
       <p:sp>
         <p:nvSpPr>
-          <p:cNvPr id="436" name="Shape 432"/>
+          <p:cNvPr id="435" name="Shape 431"/>
           <p:cNvSpPr/>
           <p:nvPr/>
         </p:nvSpPr>
@@ -39313,7 +38971,7 @@
       </p:sp>
       <p:sp>
         <p:nvSpPr>
-          <p:cNvPr id="437" name="Text 433"/>
+          <p:cNvPr id="436" name="Text 432"/>
           <p:cNvSpPr txBox="1"/>
           <p:nvPr/>
         </p:nvSpPr>
@@ -39352,7 +39010,7 @@
       </p:sp>
       <p:sp>
         <p:nvSpPr>
-          <p:cNvPr id="438" name="Shape 434"/>
+          <p:cNvPr id="437" name="Shape 433"/>
           <p:cNvSpPr/>
           <p:nvPr/>
         </p:nvSpPr>
@@ -39377,7 +39035,7 @@
       </p:sp>
       <p:sp>
         <p:nvSpPr>
-          <p:cNvPr id="439" name="Text 435"/>
+          <p:cNvPr id="438" name="Text 434"/>
           <p:cNvSpPr txBox="1"/>
           <p:nvPr/>
         </p:nvSpPr>
@@ -39416,7 +39074,7 @@
       </p:sp>
       <p:sp>
         <p:nvSpPr>
-          <p:cNvPr id="440" name="Shape 436"/>
+          <p:cNvPr id="439" name="Shape 435"/>
           <p:cNvSpPr/>
           <p:nvPr/>
         </p:nvSpPr>
@@ -39441,7 +39099,7 @@
       </p:sp>
       <p:sp>
         <p:nvSpPr>
-          <p:cNvPr id="441" name="Text 437"/>
+          <p:cNvPr id="440" name="Text 436"/>
           <p:cNvSpPr txBox="1"/>
           <p:nvPr/>
         </p:nvSpPr>
@@ -39480,7 +39138,7 @@
       </p:sp>
       <p:sp>
         <p:nvSpPr>
-          <p:cNvPr id="442" name="Text 438"/>
+          <p:cNvPr id="441" name="Text 437"/>
           <p:cNvSpPr txBox="1"/>
           <p:nvPr/>
         </p:nvSpPr>
@@ -39542,7 +39200,7 @@
       </p:sp>
       <p:sp>
         <p:nvSpPr>
-          <p:cNvPr id="443" name="Shape 439"/>
+          <p:cNvPr id="442" name="Shape 438"/>
           <p:cNvSpPr/>
           <p:nvPr/>
         </p:nvSpPr>
@@ -39569,7 +39227,7 @@
       </p:sp>
       <p:sp>
         <p:nvSpPr>
-          <p:cNvPr id="444" name="Text 440"/>
+          <p:cNvPr id="443" name="Text 439"/>
           <p:cNvSpPr txBox="1"/>
           <p:nvPr/>
         </p:nvSpPr>
